--- a/SEVEN-G/pptx/en/SEVEN-G_Curso_Empresa.pptx
+++ b/SEVEN-G/pptx/en/SEVEN-G_Curso_Empresa.pptx
@@ -6649,6 +6649,40 @@
           </a:p>
         </p:txBody>
       </p:sp>
+      <p:sp>
+        <p:nvSpPr>
+          <p:cNvPr id="236" name="Texto 236"/>
+          <p:cNvSpPr txBox="1"/>
+          <p:nvPr/>
+        </p:nvSpPr>
+        <p:spPr>
+          <a:xfrm>
+            <a:off x="609600" y="5550000"/>
+            <a:ext cx="10972800" cy="1000000"/>
+          </a:xfrm>
+          <a:prstGeom prst="rect">
+            <a:avLst/>
+          </a:prstGeom>
+          <a:noFill/>
+        </p:spPr>
+        <p:txBody>
+          <a:bodyPr wrap="square" anchor="t" lIns="45720" rIns="45720">
+            <a:noAutofit/>
+          </a:bodyPr>
+          <a:lstStyle/>
+          <a:p>
+            <a:pPr algn="ctr"/>
+            <a:r>
+              <a:rPr lang="es-ES" sz="1000" dirty="0">
+                <a:solidFill>
+                  <a:srgbClr val="564D47"/>
+                </a:solidFill>
+              </a:rPr>
+              <a:t>Legal notice: a generic, free methodological aid provided "as is" for information purposes; it is not legal advice and has not been legally reviewed for any case. Each organisation adapts it and is responsible for its legal review and its regulatory compliance; it may not reflect recent regulatory changes. To the fullest extent permitted by law, the author accepts no liability whatsoever for the effects of its application. It does not grant certification of any kind. Details in document 93.</a:t>
+            </a:r>
+          </a:p>
+        </p:txBody>
+      </p:sp>
     </p:spTree>
   </p:cSld>
   <p:clrMapOvr>

--- a/SEVEN-G/pptx/en/SEVEN-G_Curso_Empresa.pptx
+++ b/SEVEN-G/pptx/en/SEVEN-G_Curso_Empresa.pptx
@@ -31,6 +31,7 @@
     <p:sldId id="279" r:id="rIdS24"/>
     <p:sldId id="280" r:id="rIdS25"/>
     <p:sldId id="281" r:id="rIdS26"/>
+    <p:sldId id="282" r:id="rIdS27"/>
   </p:sldIdLst>
   <p:sldSz cx="12192000" cy="6858000" type="screen16x9"/>
   <p:notesSz cx="6858000" cy="9144000"/>
@@ -1125,7 +1126,7 @@
       </p:sp>
       <p:pic>
         <p:nvPicPr>
-          <p:cNvPr id="124" name="Imagen 124" descr="Board dashboard with the portfolio and value cards"/>
+          <p:cNvPr id="124" name="Imagen 124" descr="Board dashboard: portfolio and value cards and the «What holds back scaling» reading"/>
           <p:cNvPicPr>
             <a:picLocks noChangeAspect="1"/>
           </p:cNvPicPr>
@@ -1190,7 +1191,7 @@
                   <a:srgbClr val="2F2B28"/>
                 </a:solidFill>
               </a:rPr>
-              <a:t>15 cases: how many are in use, in development, in proof of concept, proposed and out.</a:t>
+              <a:t>At the top, the figures: 15 cases, costs of €2.4M a year, total return of €7.3M and annual net of €4.8M. Each figure can be clicked to open its cases.</a:t>
             </a:r>
           </a:p>
           <a:p>
@@ -1210,7 +1211,7 @@
                   <a:srgbClr val="2F2B28"/>
                 </a:solidFill>
               </a:rPr>
-              <a:t>Costs of €2.4M a year and total return of €7.3M (efficiencies plus return): annual net is €4.8M.</a:t>
+              <a:t>The yellow card is the one that matters: only 36% of the value is validated by finance. In red: only 3 of 15 cases have all the controls.</a:t>
             </a:r>
           </a:p>
           <a:p>
@@ -1230,7 +1231,7 @@
                   <a:srgbClr val="2F2B28"/>
                 </a:solidFill>
               </a:rPr>
-              <a:t>The yellow card is the one that matters: only 36% of the value is validated by finance. The rest is declared or estimated.</a:t>
+              <a:t>Below, «What holds back scaling»: the three barriers to start with, with what they block, what to do, who and the value at stake (document 60 §10.4).</a:t>
             </a:r>
           </a:p>
           <a:p>
@@ -1250,7 +1251,7 @@
                   <a:srgbClr val="2F2B28"/>
                 </a:solidFill>
               </a:rPr>
-              <a:t>Released capacity that has not been materialised is shown separately and does not add up.</a:t>
+              <a:t>In the example: first risk and compliance (blocks G5), then unvalidated value (blocks G7 · Scale) and cases that do not move forward.</a:t>
             </a:r>
           </a:p>
           <a:p>
@@ -1270,9 +1271,254 @@
                   <a:srgbClr val="2F2B28"/>
                 </a:solidFill>
               </a:rPr>
-              <a:t>In red: only 3 of 15 cases have all the controls (impact assessments, security, user manual).</a:t>
-            </a:r>
-          </a:p>
+              <a:t>The value at stake ranks, it does not promise: it is declared, not validated.</a:t>
+            </a:r>
+          </a:p>
+        </p:txBody>
+      </p:sp>
+      <p:sp>
+        <p:nvSpPr>
+          <p:cNvPr id="126" name="Texto 126"/>
+          <p:cNvSpPr txBox="1"/>
+          <p:nvPr/>
+        </p:nvSpPr>
+        <p:spPr>
+          <a:xfrm>
+            <a:off x="609600" y="6260000"/>
+            <a:ext cx="10972800" cy="450000"/>
+          </a:xfrm>
+          <a:prstGeom prst="rect">
+            <a:avLst/>
+          </a:prstGeom>
+          <a:noFill/>
+        </p:spPr>
+        <p:txBody>
+          <a:bodyPr wrap="square" anchor="t" lIns="45720" rIns="45720">
+            <a:noAutofit/>
+          </a:bodyPr>
+          <a:lstStyle/>
+          <a:p>
+            <a:pPr algn="l"/>
+            <a:r>
+              <a:rPr lang="es-ES" sz="1300" b="1" dirty="0">
+                <a:solidFill>
+                  <a:srgbClr val="0F5499"/>
+                </a:solidFill>
+              </a:rPr>
+              <a:t>If a figure on the dashboard looks wrong, the dashboard is not touched: the evidence is fixed in the register and it is generated again.</a:t>
+            </a:r>
+          </a:p>
+        </p:txBody>
+      </p:sp>
+    </p:spTree>
+  </p:cSld>
+  <p:clrMapOvr>
+    <a:overrideClrMapping bg1="lt1" tx1="dk1" bg2="lt2" tx2="dk2" accent1="accent1" accent2="accent2" accent3="accent3" accent4="accent4" accent5="accent5" accent6="accent6" hlink="hlink" folHlink="folHlink"/>
+  </p:clrMapOvr>
+</p:sld>
+</file>
+
+<file path=ppt/slides/slide13.xml><?xml version="1.0" encoding="utf-8"?>
+<p:sld xmlns:a="http://schemas.openxmlformats.org/drawingml/2006/main" xmlns:r="http://schemas.openxmlformats.org/officeDocument/2006/relationships" xmlns:p="http://schemas.openxmlformats.org/presentationml/2006/main">
+  <p:cSld>
+    <p:bg>
+      <p:bgPr>
+        <a:solidFill>
+          <a:srgbClr val="FBE2CD"/>
+        </a:solidFill>
+        <a:effectLst/>
+      </p:bgPr>
+    </p:bg>
+    <p:spTree>
+      <p:nvGrpSpPr>
+        <p:cNvPr id="1" name=""/>
+        <p:cNvGrpSpPr/>
+        <p:nvPr/>
+      </p:nvGrpSpPr>
+      <p:grpSpPr>
+        <a:xfrm>
+          <a:off x="0" y="0"/>
+          <a:ext cx="0" cy="0"/>
+          <a:chOff x="0" y="0"/>
+          <a:chExt cx="0" cy="0"/>
+        </a:xfrm>
+      </p:grpSpPr>
+      <p:sp>
+        <p:nvSpPr>
+          <p:cNvPr id="134" name="Marca"/>
+          <p:cNvSpPr/>
+          <p:nvPr/>
+        </p:nvSpPr>
+        <p:spPr>
+          <a:xfrm>
+            <a:off x="609600" y="365760"/>
+            <a:ext cx="182880" cy="182880"/>
+          </a:xfrm>
+          <a:prstGeom prst="rect">
+            <a:avLst/>
+          </a:prstGeom>
+          <a:solidFill>
+            <a:srgbClr val="990F3D"/>
+          </a:solidFill>
+        </p:spPr>
+        <p:txBody>
+          <a:bodyPr/>
+          <a:lstStyle/>
+          <a:p/>
+        </p:txBody>
+      </p:sp>
+      <p:sp>
+        <p:nvSpPr>
+          <p:cNvPr id="135" name="Texto 135"/>
+          <p:cNvSpPr txBox="1"/>
+          <p:nvPr/>
+        </p:nvSpPr>
+        <p:spPr>
+          <a:xfrm>
+            <a:off x="838200" y="300000"/>
+            <a:ext cx="10500000" cy="320000"/>
+          </a:xfrm>
+          <a:prstGeom prst="rect">
+            <a:avLst/>
+          </a:prstGeom>
+          <a:noFill/>
+        </p:spPr>
+        <p:txBody>
+          <a:bodyPr wrap="square" anchor="ctr" lIns="45720" rIns="45720">
+            <a:noAutofit/>
+          </a:bodyPr>
+          <a:lstStyle/>
+          <a:p>
+            <a:pPr algn="l"/>
+            <a:r>
+              <a:rPr lang="es-ES" sz="1400" b="1" dirty="0">
+                <a:solidFill>
+                  <a:srgbClr val="1A1817"/>
+                </a:solidFill>
+              </a:rPr>
+              <a:t>SEVEN-G · COURSE · COMPANY · SELF-CONSULTING</a:t>
+            </a:r>
+          </a:p>
+        </p:txBody>
+      </p:sp>
+      <p:sp>
+        <p:nvSpPr>
+          <p:cNvPr id="136" name="Texto 136"/>
+          <p:cNvSpPr txBox="1"/>
+          <p:nvPr/>
+        </p:nvSpPr>
+        <p:spPr>
+          <a:xfrm>
+            <a:off x="609600" y="700000"/>
+            <a:ext cx="10972800" cy="650000"/>
+          </a:xfrm>
+          <a:prstGeom prst="rect">
+            <a:avLst/>
+          </a:prstGeom>
+          <a:noFill/>
+        </p:spPr>
+        <p:txBody>
+          <a:bodyPr wrap="square" anchor="t" lIns="45720" rIns="45720">
+            <a:noAutofit/>
+          </a:bodyPr>
+          <a:lstStyle/>
+          <a:p>
+            <a:pPr algn="l"/>
+            <a:r>
+              <a:rPr lang="es-ES" sz="2700" b="1" dirty="0">
+                <a:solidFill>
+                  <a:srgbClr val="990F3D"/>
+                </a:solidFill>
+              </a:rPr>
+              <a:t>Where the impact is: spheres × ambition</a:t>
+            </a:r>
+          </a:p>
+        </p:txBody>
+      </p:sp>
+      <p:sp>
+        <p:nvSpPr>
+          <p:cNvPr id="137" name="Texto 137"/>
+          <p:cNvSpPr txBox="1"/>
+          <p:nvPr/>
+        </p:nvSpPr>
+        <p:spPr>
+          <a:xfrm>
+            <a:off x="609600" y="1330000"/>
+            <a:ext cx="10972800" cy="450000"/>
+          </a:xfrm>
+          <a:prstGeom prst="rect">
+            <a:avLst/>
+          </a:prstGeom>
+          <a:noFill/>
+        </p:spPr>
+        <p:txBody>
+          <a:bodyPr wrap="square" anchor="t" lIns="45720" rIns="45720">
+            <a:noAutofit/>
+          </a:bodyPr>
+          <a:lstStyle/>
+          <a:p>
+            <a:pPr algn="l"/>
+            <a:r>
+              <a:rPr lang="es-ES" sz="1500" dirty="0">
+                <a:solidFill>
+                  <a:srgbClr val="564D47"/>
+                </a:solidFill>
+              </a:rPr>
+              <a:t>The portfolio heat map (T16) in the same dashboard. Fictitious data</a:t>
+            </a:r>
+          </a:p>
+        </p:txBody>
+      </p:sp>
+      <p:pic>
+        <p:nvPicPr>
+          <p:cNvPr id="131" name="Imagen 131" descr="Heat map of spheres by ambition level with cases, investment, net and gaps"/>
+          <p:cNvPicPr>
+            <a:picLocks noChangeAspect="1"/>
+          </p:cNvPicPr>
+          <p:nvPr/>
+        </p:nvPicPr>
+        <p:blipFill>
+          <a:blip r:embed="rIdImg_impacto"/>
+          <a:stretch>
+            <a:fillRect/>
+          </a:stretch>
+        </p:blipFill>
+        <p:spPr>
+          <a:xfrm>
+            <a:off x="609600" y="1900000"/>
+            <a:ext cx="6700000" cy="4243333"/>
+          </a:xfrm>
+          <a:prstGeom prst="rect">
+            <a:avLst/>
+          </a:prstGeom>
+          <a:ln w="12700">
+            <a:solidFill>
+              <a:srgbClr val="C9A78D"/>
+            </a:solidFill>
+          </a:ln>
+        </p:spPr>
+      </p:pic>
+      <p:sp>
+        <p:nvSpPr>
+          <p:cNvPr id="132" name="Texto 132"/>
+          <p:cNvSpPr txBox="1"/>
+          <p:nvPr/>
+        </p:nvSpPr>
+        <p:spPr>
+          <a:xfrm>
+            <a:off x="7509600" y="1850000"/>
+            <a:ext cx="4072800" cy="4400000"/>
+          </a:xfrm>
+          <a:prstGeom prst="rect">
+            <a:avLst/>
+          </a:prstGeom>
+          <a:noFill/>
+        </p:spPr>
+        <p:txBody>
+          <a:bodyPr wrap="square" anchor="t" lIns="45720" rIns="45720">
+            <a:noAutofit/>
+          </a:bodyPr>
+          <a:lstStyle/>
           <a:p>
             <a:pPr marL="285750" indent="-285750">
               <a:spcAft>
@@ -1290,14 +1536,94 @@
                   <a:srgbClr val="2F2B28"/>
                 </a:solidFill>
               </a:rPr>
-              <a:t>Other pages: funnel and lifecycle, history and adoption, risk and compliance, inventory.</a:t>
-            </a:r>
-          </a:p>
-        </p:txBody>
-      </p:sp>
-      <p:sp>
-        <p:nvSpPr>
-          <p:cNvPr id="126" name="Texto 126"/>
+              <a:t>Rows: the areas where AI creates value (customer, product, people, operations, data, knowledge, decision). Columns: optimise, augment, transform.</a:t>
+            </a:r>
+          </a:p>
+          <a:p>
+            <a:pPr marL="285750" indent="-285750">
+              <a:spcAft>
+                <a:spcPts val="400"/>
+              </a:spcAft>
+              <a:buClr>
+                <a:srgbClr val="990F3D"/>
+              </a:buClr>
+              <a:buFont typeface="Arial"/>
+              <a:buChar char="•"/>
+            </a:pPr>
+            <a:r>
+              <a:rPr lang="es-ES" sz="1300" dirty="0">
+                <a:solidFill>
+                  <a:srgbClr val="2F2B28"/>
+                </a:solidFill>
+              </a:rPr>
+              <a:t>Each cell: cases, investment and cost, annual net and validated value; the colour shows where spending is concentrated.</a:t>
+            </a:r>
+          </a:p>
+          <a:p>
+            <a:pPr marL="285750" indent="-285750">
+              <a:spcAft>
+                <a:spcPts val="400"/>
+              </a:spcAft>
+              <a:buClr>
+                <a:srgbClr val="990F3D"/>
+              </a:buClr>
+              <a:buFont typeface="Arial"/>
+              <a:buChar char="•"/>
+            </a:pPr>
+            <a:r>
+              <a:rPr lang="es-ES" sz="1300" dirty="0">
+                <a:solidFill>
+                  <a:srgbClr val="2F2B28"/>
+                </a:solidFill>
+              </a:rPr>
+              <a:t>«Gap»: the ambition management approved in C2 for that sphere has no case that has passed G2.</a:t>
+            </a:r>
+          </a:p>
+          <a:p>
+            <a:pPr marL="285750" indent="-285750">
+              <a:spcAft>
+                <a:spcPts val="400"/>
+              </a:spcAft>
+              <a:buClr>
+                <a:srgbClr val="990F3D"/>
+              </a:buClr>
+              <a:buFont typeface="Arial"/>
+              <a:buChar char="•"/>
+            </a:pPr>
+            <a:r>
+              <a:rPr lang="es-ES" sz="1300" dirty="0">
+                <a:solidFill>
+                  <a:srgbClr val="2F2B28"/>
+                </a:solidFill>
+              </a:rPr>
+              <a:t>In the example: 40% of spending is in Customer, Data has no activity and five spheres have a gap.</a:t>
+            </a:r>
+          </a:p>
+          <a:p>
+            <a:pPr marL="285750" indent="-285750">
+              <a:spcAft>
+                <a:spcPts val="400"/>
+              </a:spcAft>
+              <a:buClr>
+                <a:srgbClr val="990F3D"/>
+              </a:buClr>
+              <a:buFont typeface="Arial"/>
+              <a:buChar char="•"/>
+            </a:pPr>
+            <a:r>
+              <a:rPr lang="es-ES" sz="1300" dirty="0">
+                <a:solidFill>
+                  <a:srgbClr val="2F2B28"/>
+                </a:solidFill>
+              </a:rPr>
+              <a:t>The target ambition comes from the thesis approved in the register; it is not written in the dashboard.</a:t>
+            </a:r>
+          </a:p>
+        </p:txBody>
+      </p:sp>
+      <p:sp>
+        <p:nvSpPr>
+          <p:cNvPr id="133" name="Texto 133"/>
           <p:cNvSpPr txBox="1"/>
           <p:nvPr/>
         </p:nvSpPr>
@@ -1324,7 +1650,7 @@
                   <a:srgbClr val="0F5499"/>
                 </a:solidFill>
               </a:rPr>
-              <a:t>If a figure on the dashboard looks wrong, the dashboard is not touched: the evidence is fixed in the register and it is generated again.</a:t>
+              <a:t>The question it answers: where does AI have most impact in the company and where are we not playing? (document 10 §8)</a:t>
             </a:r>
           </a:p>
         </p:txBody>
@@ -1337,7 +1663,7 @@
 </p:sld>
 </file>
 
-<file path=ppt/slides/slide13.xml><?xml version="1.0" encoding="utf-8"?>
+<file path=ppt/slides/slide14.xml><?xml version="1.0" encoding="utf-8"?>
 <p:sld xmlns:a="http://schemas.openxmlformats.org/drawingml/2006/main" xmlns:r="http://schemas.openxmlformats.org/officeDocument/2006/relationships" xmlns:p="http://schemas.openxmlformats.org/presentationml/2006/main">
   <p:cSld>
     <p:bg>
@@ -1364,7 +1690,7 @@
       </p:grpSpPr>
       <p:sp>
         <p:nvSpPr>
-          <p:cNvPr id="131" name="Marca"/>
+          <p:cNvPr id="138" name="Marca"/>
           <p:cNvSpPr/>
           <p:nvPr/>
         </p:nvSpPr>
@@ -1388,7 +1714,7 @@
       </p:sp>
       <p:sp>
         <p:nvSpPr>
-          <p:cNvPr id="132" name="Texto 132"/>
+          <p:cNvPr id="139" name="Texto 139"/>
           <p:cNvSpPr txBox="1"/>
           <p:nvPr/>
         </p:nvSpPr>
@@ -1422,7 +1748,7 @@
       </p:sp>
       <p:sp>
         <p:nvSpPr>
-          <p:cNvPr id="133" name="Texto 133"/>
+          <p:cNvPr id="140" name="Texto 140"/>
           <p:cNvSpPr txBox="1"/>
           <p:nvPr/>
         </p:nvSpPr>
@@ -1456,7 +1782,7 @@
       </p:sp>
       <p:sp>
         <p:nvSpPr>
-          <p:cNvPr id="134" name="Texto 134"/>
+          <p:cNvPr id="141" name="Texto 141"/>
           <p:cNvSpPr txBox="1"/>
           <p:nvPr/>
         </p:nvSpPr>
@@ -1484,349 +1810,6 @@
                 </a:solidFill>
               </a:rPr>
               <a:t>Fictitious, illustrative data: they do not describe any real company.</a:t>
-            </a:r>
-          </a:p>
-        </p:txBody>
-      </p:sp>
-    </p:spTree>
-  </p:cSld>
-  <p:clrMapOvr>
-    <a:overrideClrMapping bg1="lt1" tx1="dk1" bg2="lt2" tx2="dk2" accent1="accent1" accent2="accent2" accent3="accent3" accent4="accent4" accent5="accent5" accent6="accent6" hlink="hlink" folHlink="folHlink"/>
-  </p:clrMapOvr>
-</p:sld>
-</file>
-
-<file path=ppt/slides/slide14.xml><?xml version="1.0" encoding="utf-8"?>
-<p:sld xmlns:a="http://schemas.openxmlformats.org/drawingml/2006/main" xmlns:r="http://schemas.openxmlformats.org/officeDocument/2006/relationships" xmlns:p="http://schemas.openxmlformats.org/presentationml/2006/main">
-  <p:cSld>
-    <p:bg>
-      <p:bgPr>
-        <a:solidFill>
-          <a:srgbClr val="FBE2CD"/>
-        </a:solidFill>
-        <a:effectLst/>
-      </p:bgPr>
-    </p:bg>
-    <p:spTree>
-      <p:nvGrpSpPr>
-        <p:cNvPr id="1" name=""/>
-        <p:cNvGrpSpPr/>
-        <p:nvPr/>
-      </p:nvGrpSpPr>
-      <p:grpSpPr>
-        <a:xfrm>
-          <a:off x="0" y="0"/>
-          <a:ext cx="0" cy="0"/>
-          <a:chOff x="0" y="0"/>
-          <a:chExt cx="0" cy="0"/>
-        </a:xfrm>
-      </p:grpSpPr>
-      <p:sp>
-        <p:nvSpPr>
-          <p:cNvPr id="138" name="Marca"/>
-          <p:cNvSpPr/>
-          <p:nvPr/>
-        </p:nvSpPr>
-        <p:spPr>
-          <a:xfrm>
-            <a:off x="609600" y="365760"/>
-            <a:ext cx="182880" cy="182880"/>
-          </a:xfrm>
-          <a:prstGeom prst="rect">
-            <a:avLst/>
-          </a:prstGeom>
-          <a:solidFill>
-            <a:srgbClr val="990F3D"/>
-          </a:solidFill>
-        </p:spPr>
-        <p:txBody>
-          <a:bodyPr/>
-          <a:lstStyle/>
-          <a:p/>
-        </p:txBody>
-      </p:sp>
-      <p:sp>
-        <p:nvSpPr>
-          <p:cNvPr id="139" name="Texto 139"/>
-          <p:cNvSpPr txBox="1"/>
-          <p:nvPr/>
-        </p:nvSpPr>
-        <p:spPr>
-          <a:xfrm>
-            <a:off x="838200" y="300000"/>
-            <a:ext cx="10500000" cy="320000"/>
-          </a:xfrm>
-          <a:prstGeom prst="rect">
-            <a:avLst/>
-          </a:prstGeom>
-          <a:noFill/>
-        </p:spPr>
-        <p:txBody>
-          <a:bodyPr wrap="square" anchor="ctr" lIns="45720" rIns="45720">
-            <a:noAutofit/>
-          </a:bodyPr>
-          <a:lstStyle/>
-          <a:p>
-            <a:pPr algn="l"/>
-            <a:r>
-              <a:rPr lang="es-ES" sz="1400" b="1" dirty="0">
-                <a:solidFill>
-                  <a:srgbClr val="1A1817"/>
-                </a:solidFill>
-              </a:rPr>
-              <a:t>SEVEN-G · COURSE · COMPANY · SELF-CONSULTING</a:t>
-            </a:r>
-          </a:p>
-        </p:txBody>
-      </p:sp>
-      <p:sp>
-        <p:nvSpPr>
-          <p:cNvPr id="140" name="Texto 140"/>
-          <p:cNvSpPr txBox="1"/>
-          <p:nvPr/>
-        </p:nvSpPr>
-        <p:spPr>
-          <a:xfrm>
-            <a:off x="609600" y="700000"/>
-            <a:ext cx="10972800" cy="650000"/>
-          </a:xfrm>
-          <a:prstGeom prst="rect">
-            <a:avLst/>
-          </a:prstGeom>
-          <a:noFill/>
-        </p:spPr>
-        <p:txBody>
-          <a:bodyPr wrap="square" anchor="t" lIns="45720" rIns="45720">
-            <a:noAutofit/>
-          </a:bodyPr>
-          <a:lstStyle/>
-          <a:p>
-            <a:pPr algn="l"/>
-            <a:r>
-              <a:rPr lang="es-ES" sz="2700" b="1" dirty="0">
-                <a:solidFill>
-                  <a:srgbClr val="990F3D"/>
-                </a:solidFill>
-              </a:rPr>
-              <a:t>Example 1 · When an initiative stops</a:t>
-            </a:r>
-          </a:p>
-        </p:txBody>
-      </p:sp>
-      <p:sp>
-        <p:nvSpPr>
-          <p:cNvPr id="135" name="Texto 135"/>
-          <p:cNvSpPr txBox="1"/>
-          <p:nvPr/>
-        </p:nvSpPr>
-        <p:spPr>
-          <a:xfrm>
-            <a:off x="609600" y="1330000"/>
-            <a:ext cx="10972800" cy="500000"/>
-          </a:xfrm>
-          <a:prstGeom prst="rect">
-            <a:avLst/>
-          </a:prstGeom>
-          <a:noFill/>
-        </p:spPr>
-        <p:txBody>
-          <a:bodyPr wrap="square" anchor="t" lIns="45720" rIns="45720">
-            <a:noAutofit/>
-          </a:bodyPr>
-          <a:lstStyle/>
-          <a:p>
-            <a:pPr algn="l"/>
-            <a:r>
-              <a:rPr lang="es-ES" sz="1700" b="1" dirty="0">
-                <a:solidFill>
-                  <a:srgbClr val="2F2B28"/>
-                </a:solidFill>
-              </a:rPr>
-              <a:t>Candidate screening in recruitment (HR)</a:t>
-            </a:r>
-          </a:p>
-        </p:txBody>
-      </p:sp>
-      <p:sp>
-        <p:nvSpPr>
-          <p:cNvPr id="136" name="Texto 136"/>
-          <p:cNvSpPr txBox="1"/>
-          <p:nvPr/>
-        </p:nvSpPr>
-        <p:spPr>
-          <a:xfrm>
-            <a:off x="609600" y="1900000"/>
-            <a:ext cx="10972800" cy="3550000"/>
-          </a:xfrm>
-          <a:prstGeom prst="rect">
-            <a:avLst/>
-          </a:prstGeom>
-          <a:noFill/>
-        </p:spPr>
-        <p:txBody>
-          <a:bodyPr wrap="square" anchor="t" lIns="45720" rIns="45720">
-            <a:noAutofit/>
-          </a:bodyPr>
-          <a:lstStyle/>
-          <a:p>
-            <a:pPr marL="285750" indent="-285750">
-              <a:spcAft>
-                <a:spcPts val="400"/>
-              </a:spcAft>
-              <a:buClr>
-                <a:srgbClr val="990F3D"/>
-              </a:buClr>
-              <a:buFont typeface="Arial"/>
-              <a:buChar char="•"/>
-            </a:pPr>
-            <a:r>
-              <a:rPr lang="es-ES" sz="1500" dirty="0">
-                <a:solidFill>
-                  <a:srgbClr val="2F2B28"/>
-                </a:solidFill>
-              </a:rPr>
-              <a:t>Phases 0 and 1: HR sponsors it (P01–P05). Because it decides about people, intensity is Enterprise (P04). It enters "Proposed".</a:t>
-            </a:r>
-          </a:p>
-          <a:p>
-            <a:pPr marL="285750" indent="-285750">
-              <a:spcAft>
-                <a:spcPts val="400"/>
-              </a:spcAft>
-              <a:buClr>
-                <a:srgbClr val="990F3D"/>
-              </a:buClr>
-              <a:buFont typeface="Arial"/>
-              <a:buChar char="•"/>
-            </a:pPr>
-            <a:r>
-              <a:rPr lang="es-ES" sz="1500" dirty="0">
-                <a:solidFill>
-                  <a:srgbClr val="2F2B28"/>
-                </a:solidFill>
-              </a:rPr>
-              <a:t>Phase 2: the hypothesis (P08) promises 40% less screening time against the baseline (P09). The pilot confirms it: G2, Proceed.</a:t>
-            </a:r>
-          </a:p>
-          <a:p>
-            <a:pPr marL="285750" indent="-285750">
-              <a:spcAft>
-                <a:spcPts val="400"/>
-              </a:spcAft>
-              <a:buClr>
-                <a:srgbClr val="990F3D"/>
-              </a:buClr>
-              <a:buFont typeface="Arial"/>
-              <a:buChar char="•"/>
-            </a:pPr>
-            <a:r>
-              <a:rPr lang="es-ES" sz="1500" dirty="0">
-                <a:solidFill>
-                  <a:srgbClr val="2F2B28"/>
-                </a:solidFill>
-              </a:rPr>
-              <a:t>Phase 3: the regulatory classification (P11) makes it a high-risk system. The bias test finds it penalises older candidates.</a:t>
-            </a:r>
-          </a:p>
-          <a:p>
-            <a:pPr marL="285750" indent="-285750">
-              <a:spcAft>
-                <a:spcPts val="400"/>
-              </a:spcAft>
-              <a:buClr>
-                <a:srgbClr val="990F3D"/>
-              </a:buClr>
-              <a:buFont typeface="Arial"/>
-              <a:buChar char="•"/>
-            </a:pPr>
-            <a:r>
-              <a:rPr lang="es-ES" sz="1500" dirty="0">
-                <a:solidFill>
-                  <a:srgbClr val="2F2B28"/>
-                </a:solidFill>
-              </a:rPr>
-              <a:t>It iterates twice, adjusting variables: fixing the bias destroys the predictive power that justified the project.</a:t>
-            </a:r>
-          </a:p>
-          <a:p>
-            <a:pPr marL="285750" indent="-285750">
-              <a:spcAft>
-                <a:spcPts val="400"/>
-              </a:spcAft>
-              <a:buClr>
-                <a:srgbClr val="990F3D"/>
-              </a:buClr>
-              <a:buFont typeface="Arial"/>
-              <a:buChar char="•"/>
-            </a:pPr>
-            <a:r>
-              <a:rPr lang="es-ES" sz="1500" dirty="0">
-                <a:solidFill>
-                  <a:srgbClr val="2F2B28"/>
-                </a:solidFill>
-              </a:rPr>
-              <a:t>G3: high residual risk with no viable mitigation (P12, P13). The AI committee decides to Stop; it is recorded in P29 with its reason.</a:t>
-            </a:r>
-          </a:p>
-          <a:p>
-            <a:pPr marL="285750" indent="-285750">
-              <a:spcAft>
-                <a:spcPts val="400"/>
-              </a:spcAft>
-              <a:buClr>
-                <a:srgbClr val="990F3D"/>
-              </a:buClr>
-              <a:buFont typeface="Arial"/>
-              <a:buChar char="•"/>
-            </a:pPr>
-            <a:r>
-              <a:rPr lang="es-ES" sz="1500" dirty="0">
-                <a:solidFill>
-                  <a:srgbClr val="2F2B28"/>
-                </a:solidFill>
-              </a:rPr>
-              <a:t>In the funnel it shows to the right of "Proof of concept": Discarded · unacceptable risk. Lesson: test for bias earlier, in phase 2.</a:t>
-            </a:r>
-          </a:p>
-        </p:txBody>
-      </p:sp>
-      <p:sp>
-        <p:nvSpPr>
-          <p:cNvPr id="137" name="Caja 137"/>
-          <p:cNvSpPr/>
-          <p:nvPr/>
-        </p:nvSpPr>
-        <p:spPr>
-          <a:xfrm>
-            <a:off x="609600" y="5600000"/>
-            <a:ext cx="10972800" cy="900000"/>
-          </a:xfrm>
-          <a:prstGeom prst="roundRect">
-            <a:avLst>
-              <a:gd name="adj" fmla="val 6000"/>
-            </a:avLst>
-          </a:prstGeom>
-          <a:solidFill>
-            <a:srgbClr val="990F3D"/>
-          </a:solidFill>
-          <a:ln>
-            <a:noFill/>
-          </a:ln>
-        </p:spPr>
-        <p:txBody>
-          <a:bodyPr wrap="square" anchor="ctr" lIns="45720" rIns="45720">
-            <a:noAutofit/>
-          </a:bodyPr>
-          <a:lstStyle/>
-          <a:p>
-            <a:pPr algn="ctr"/>
-            <a:r>
-              <a:rPr lang="es-ES" sz="2100" b="1" dirty="0">
-                <a:solidFill>
-                  <a:srgbClr val="FFFFFF"/>
-                </a:solidFill>
-              </a:rPr>
-              <a:t>STOPPED AT G3 · BUILDING AND RUNNING AN UNVIABLE SYSTEM WAS AVOIDED</a:t>
             </a:r>
           </a:p>
         </p:txBody>
@@ -1866,7 +1849,7 @@
       </p:grpSpPr>
       <p:sp>
         <p:nvSpPr>
-          <p:cNvPr id="158" name="Marca"/>
+          <p:cNvPr id="145" name="Marca"/>
           <p:cNvSpPr/>
           <p:nvPr/>
         </p:nvSpPr>
@@ -1890,7 +1873,7 @@
       </p:sp>
       <p:sp>
         <p:nvSpPr>
-          <p:cNvPr id="159" name="Texto 159"/>
+          <p:cNvPr id="146" name="Texto 146"/>
           <p:cNvSpPr txBox="1"/>
           <p:nvPr/>
         </p:nvSpPr>
@@ -1924,7 +1907,7 @@
       </p:sp>
       <p:sp>
         <p:nvSpPr>
-          <p:cNvPr id="160" name="Texto 160"/>
+          <p:cNvPr id="147" name="Texto 147"/>
           <p:cNvSpPr txBox="1"/>
           <p:nvPr/>
         </p:nvSpPr>
@@ -1951,21 +1934,21 @@
                   <a:srgbClr val="990F3D"/>
                 </a:solidFill>
               </a:rPr>
-              <a:t>Initiative 1, on the lifecycle</a:t>
-            </a:r>
-          </a:p>
-        </p:txBody>
-      </p:sp>
-      <p:sp>
-        <p:nvSpPr>
-          <p:cNvPr id="161" name="Texto 161"/>
+              <a:t>Example 1 · When an initiative stops</a:t>
+            </a:r>
+          </a:p>
+        </p:txBody>
+      </p:sp>
+      <p:sp>
+        <p:nvSpPr>
+          <p:cNvPr id="142" name="Texto 142"/>
           <p:cNvSpPr txBox="1"/>
           <p:nvPr/>
         </p:nvSpPr>
         <p:spPr>
           <a:xfrm>
             <a:off x="609600" y="1330000"/>
-            <a:ext cx="10972800" cy="450000"/>
+            <a:ext cx="10972800" cy="500000"/>
           </a:xfrm>
           <a:prstGeom prst="rect">
             <a:avLst/>
@@ -1980,26 +1963,169 @@
           <a:p>
             <a:pPr algn="l"/>
             <a:r>
+              <a:rPr lang="es-ES" sz="1700" b="1" dirty="0">
+                <a:solidFill>
+                  <a:srgbClr val="2F2B28"/>
+                </a:solidFill>
+              </a:rPr>
+              <a:t>Candidate screening in recruitment (HR)</a:t>
+            </a:r>
+          </a:p>
+        </p:txBody>
+      </p:sp>
+      <p:sp>
+        <p:nvSpPr>
+          <p:cNvPr id="143" name="Texto 143"/>
+          <p:cNvSpPr txBox="1"/>
+          <p:nvPr/>
+        </p:nvSpPr>
+        <p:spPr>
+          <a:xfrm>
+            <a:off x="609600" y="1900000"/>
+            <a:ext cx="10972800" cy="3550000"/>
+          </a:xfrm>
+          <a:prstGeom prst="rect">
+            <a:avLst/>
+          </a:prstGeom>
+          <a:noFill/>
+        </p:spPr>
+        <p:txBody>
+          <a:bodyPr wrap="square" anchor="t" lIns="45720" rIns="45720">
+            <a:noAutofit/>
+          </a:bodyPr>
+          <a:lstStyle/>
+          <a:p>
+            <a:pPr marL="285750" indent="-285750">
+              <a:spcAft>
+                <a:spcPts val="400"/>
+              </a:spcAft>
+              <a:buClr>
+                <a:srgbClr val="990F3D"/>
+              </a:buClr>
+              <a:buFont typeface="Arial"/>
+              <a:buChar char="•"/>
+            </a:pPr>
+            <a:r>
               <a:rPr lang="es-ES" sz="1500" dirty="0">
                 <a:solidFill>
-                  <a:srgbClr val="564D47"/>
-                </a:solidFill>
-              </a:rPr>
-              <a:t>It reached phase 3 and did not pass gate G3</a:t>
-            </a:r>
-          </a:p>
-        </p:txBody>
-      </p:sp>
-      <p:sp>
-        <p:nvSpPr>
-          <p:cNvPr id="141" name="Caja 141"/>
+                  <a:srgbClr val="2F2B28"/>
+                </a:solidFill>
+              </a:rPr>
+              <a:t>Phases 0 and 1: HR sponsors it (P01–P05). Because it decides about people, intensity is Enterprise (P04). It enters "Proposed".</a:t>
+            </a:r>
+          </a:p>
+          <a:p>
+            <a:pPr marL="285750" indent="-285750">
+              <a:spcAft>
+                <a:spcPts val="400"/>
+              </a:spcAft>
+              <a:buClr>
+                <a:srgbClr val="990F3D"/>
+              </a:buClr>
+              <a:buFont typeface="Arial"/>
+              <a:buChar char="•"/>
+            </a:pPr>
+            <a:r>
+              <a:rPr lang="es-ES" sz="1500" dirty="0">
+                <a:solidFill>
+                  <a:srgbClr val="2F2B28"/>
+                </a:solidFill>
+              </a:rPr>
+              <a:t>Phase 2: the hypothesis (P08) promises 40% less screening time against the baseline (P09). The pilot confirms it: G2, Proceed.</a:t>
+            </a:r>
+          </a:p>
+          <a:p>
+            <a:pPr marL="285750" indent="-285750">
+              <a:spcAft>
+                <a:spcPts val="400"/>
+              </a:spcAft>
+              <a:buClr>
+                <a:srgbClr val="990F3D"/>
+              </a:buClr>
+              <a:buFont typeface="Arial"/>
+              <a:buChar char="•"/>
+            </a:pPr>
+            <a:r>
+              <a:rPr lang="es-ES" sz="1500" dirty="0">
+                <a:solidFill>
+                  <a:srgbClr val="2F2B28"/>
+                </a:solidFill>
+              </a:rPr>
+              <a:t>Phase 3: the regulatory classification (P11) makes it a high-risk system. The bias test finds it penalises older candidates.</a:t>
+            </a:r>
+          </a:p>
+          <a:p>
+            <a:pPr marL="285750" indent="-285750">
+              <a:spcAft>
+                <a:spcPts val="400"/>
+              </a:spcAft>
+              <a:buClr>
+                <a:srgbClr val="990F3D"/>
+              </a:buClr>
+              <a:buFont typeface="Arial"/>
+              <a:buChar char="•"/>
+            </a:pPr>
+            <a:r>
+              <a:rPr lang="es-ES" sz="1500" dirty="0">
+                <a:solidFill>
+                  <a:srgbClr val="2F2B28"/>
+                </a:solidFill>
+              </a:rPr>
+              <a:t>It iterates twice, adjusting variables: fixing the bias destroys the predictive power that justified the project.</a:t>
+            </a:r>
+          </a:p>
+          <a:p>
+            <a:pPr marL="285750" indent="-285750">
+              <a:spcAft>
+                <a:spcPts val="400"/>
+              </a:spcAft>
+              <a:buClr>
+                <a:srgbClr val="990F3D"/>
+              </a:buClr>
+              <a:buFont typeface="Arial"/>
+              <a:buChar char="•"/>
+            </a:pPr>
+            <a:r>
+              <a:rPr lang="es-ES" sz="1500" dirty="0">
+                <a:solidFill>
+                  <a:srgbClr val="2F2B28"/>
+                </a:solidFill>
+              </a:rPr>
+              <a:t>G3: high residual risk with no viable mitigation (P12, P13). The AI committee decides to Stop; it is recorded in P29 with its reason.</a:t>
+            </a:r>
+          </a:p>
+          <a:p>
+            <a:pPr marL="285750" indent="-285750">
+              <a:spcAft>
+                <a:spcPts val="400"/>
+              </a:spcAft>
+              <a:buClr>
+                <a:srgbClr val="990F3D"/>
+              </a:buClr>
+              <a:buFont typeface="Arial"/>
+              <a:buChar char="•"/>
+            </a:pPr>
+            <a:r>
+              <a:rPr lang="es-ES" sz="1500" dirty="0">
+                <a:solidFill>
+                  <a:srgbClr val="2F2B28"/>
+                </a:solidFill>
+              </a:rPr>
+              <a:t>In the funnel it shows to the right of "Proof of concept": Discarded · unacceptable risk. Lesson: test for bias earlier, in phase 2.</a:t>
+            </a:r>
+          </a:p>
+        </p:txBody>
+      </p:sp>
+      <p:sp>
+        <p:nvSpPr>
+          <p:cNvPr id="144" name="Caja 144"/>
           <p:cNvSpPr/>
           <p:nvPr/>
         </p:nvSpPr>
         <p:spPr>
           <a:xfrm>
-            <a:off x="681000" y="2350000"/>
-            <a:ext cx="1240000" cy="1500000"/>
+            <a:off x="609600" y="5600000"/>
+            <a:ext cx="10972800" cy="900000"/>
           </a:xfrm>
           <a:prstGeom prst="roundRect">
             <a:avLst>
@@ -2021,693 +2147,12 @@
           <a:p>
             <a:pPr algn="ctr"/>
             <a:r>
-              <a:rPr lang="es-ES" sz="2400" b="1" dirty="0">
+              <a:rPr lang="es-ES" sz="2100" b="1" dirty="0">
                 <a:solidFill>
                   <a:srgbClr val="FFFFFF"/>
                 </a:solidFill>
               </a:rPr>
-              <a:t>F0</a:t>
-            </a:r>
-          </a:p>
-          <a:p>
-            <a:pPr algn="ctr"/>
-            <a:r>
-              <a:rPr lang="es-ES" sz="1050" dirty="0">
-                <a:solidFill>
-                  <a:srgbClr val="FFFFFF"/>
-                </a:solidFill>
-              </a:rPr>
-              <a:t>Context and constraints</a:t>
-            </a:r>
-          </a:p>
-        </p:txBody>
-      </p:sp>
-      <p:sp>
-        <p:nvSpPr>
-          <p:cNvPr id="142" name="Texto 142"/>
-          <p:cNvSpPr txBox="1"/>
-          <p:nvPr/>
-        </p:nvSpPr>
-        <p:spPr>
-          <a:xfrm>
-            <a:off x="1591000" y="3900000"/>
-            <a:ext cx="800000" cy="300000"/>
-          </a:xfrm>
-          <a:prstGeom prst="rect">
-            <a:avLst/>
-          </a:prstGeom>
-          <a:noFill/>
-        </p:spPr>
-        <p:txBody>
-          <a:bodyPr wrap="square" anchor="t" lIns="45720" rIns="45720">
-            <a:noAutofit/>
-          </a:bodyPr>
-          <a:lstStyle/>
-          <a:p>
-            <a:pPr algn="ctr"/>
-            <a:r>
-              <a:rPr lang="es-ES" sz="1200" b="1" dirty="0">
-                <a:solidFill>
-                  <a:srgbClr val="990F3D"/>
-                </a:solidFill>
-              </a:rPr>
-              <a:t>G0</a:t>
-            </a:r>
-          </a:p>
-        </p:txBody>
-      </p:sp>
-      <p:sp>
-        <p:nvSpPr>
-          <p:cNvPr id="143" name="Caja 143"/>
-          <p:cNvSpPr/>
-          <p:nvPr/>
-        </p:nvSpPr>
-        <p:spPr>
-          <a:xfrm>
-            <a:off x="2051000" y="2350000"/>
-            <a:ext cx="1240000" cy="1500000"/>
-          </a:xfrm>
-          <a:prstGeom prst="roundRect">
-            <a:avLst>
-              <a:gd name="adj" fmla="val 6000"/>
-            </a:avLst>
-          </a:prstGeom>
-          <a:solidFill>
-            <a:srgbClr val="990F3D"/>
-          </a:solidFill>
-          <a:ln>
-            <a:noFill/>
-          </a:ln>
-        </p:spPr>
-        <p:txBody>
-          <a:bodyPr wrap="square" anchor="ctr" lIns="45720" rIns="45720">
-            <a:noAutofit/>
-          </a:bodyPr>
-          <a:lstStyle/>
-          <a:p>
-            <a:pPr algn="ctr"/>
-            <a:r>
-              <a:rPr lang="es-ES" sz="2400" b="1" dirty="0">
-                <a:solidFill>
-                  <a:srgbClr val="FFFFFF"/>
-                </a:solidFill>
-              </a:rPr>
-              <a:t>F1</a:t>
-            </a:r>
-          </a:p>
-          <a:p>
-            <a:pPr algn="ctr"/>
-            <a:r>
-              <a:rPr lang="es-ES" sz="1050" dirty="0">
-                <a:solidFill>
-                  <a:srgbClr val="FFFFFF"/>
-                </a:solidFill>
-              </a:rPr>
-              <a:t>Opportunity discovery</a:t>
-            </a:r>
-          </a:p>
-        </p:txBody>
-      </p:sp>
-      <p:sp>
-        <p:nvSpPr>
-          <p:cNvPr id="144" name="Texto 144"/>
-          <p:cNvSpPr txBox="1"/>
-          <p:nvPr/>
-        </p:nvSpPr>
-        <p:spPr>
-          <a:xfrm>
-            <a:off x="2961000" y="3900000"/>
-            <a:ext cx="800000" cy="300000"/>
-          </a:xfrm>
-          <a:prstGeom prst="rect">
-            <a:avLst/>
-          </a:prstGeom>
-          <a:noFill/>
-        </p:spPr>
-        <p:txBody>
-          <a:bodyPr wrap="square" anchor="t" lIns="45720" rIns="45720">
-            <a:noAutofit/>
-          </a:bodyPr>
-          <a:lstStyle/>
-          <a:p>
-            <a:pPr algn="ctr"/>
-            <a:r>
-              <a:rPr lang="es-ES" sz="1200" b="1" dirty="0">
-                <a:solidFill>
-                  <a:srgbClr val="990F3D"/>
-                </a:solidFill>
-              </a:rPr>
-              <a:t>G1</a:t>
-            </a:r>
-          </a:p>
-        </p:txBody>
-      </p:sp>
-      <p:sp>
-        <p:nvSpPr>
-          <p:cNvPr id="145" name="Caja 145"/>
-          <p:cNvSpPr/>
-          <p:nvPr/>
-        </p:nvSpPr>
-        <p:spPr>
-          <a:xfrm>
-            <a:off x="3421000" y="2350000"/>
-            <a:ext cx="1240000" cy="1500000"/>
-          </a:xfrm>
-          <a:prstGeom prst="roundRect">
-            <a:avLst>
-              <a:gd name="adj" fmla="val 6000"/>
-            </a:avLst>
-          </a:prstGeom>
-          <a:solidFill>
-            <a:srgbClr val="990F3D"/>
-          </a:solidFill>
-          <a:ln>
-            <a:noFill/>
-          </a:ln>
-        </p:spPr>
-        <p:txBody>
-          <a:bodyPr wrap="square" anchor="ctr" lIns="45720" rIns="45720">
-            <a:noAutofit/>
-          </a:bodyPr>
-          <a:lstStyle/>
-          <a:p>
-            <a:pPr algn="ctr"/>
-            <a:r>
-              <a:rPr lang="es-ES" sz="2400" b="1" dirty="0">
-                <a:solidFill>
-                  <a:srgbClr val="FFFFFF"/>
-                </a:solidFill>
-              </a:rPr>
-              <a:t>F2</a:t>
-            </a:r>
-          </a:p>
-          <a:p>
-            <a:pPr algn="ctr"/>
-            <a:r>
-              <a:rPr lang="es-ES" sz="1050" dirty="0">
-                <a:solidFill>
-                  <a:srgbClr val="FFFFFF"/>
-                </a:solidFill>
-              </a:rPr>
-              <a:t>Value hypothesis</a:t>
-            </a:r>
-          </a:p>
-        </p:txBody>
-      </p:sp>
-      <p:sp>
-        <p:nvSpPr>
-          <p:cNvPr id="146" name="Texto 146"/>
-          <p:cNvSpPr txBox="1"/>
-          <p:nvPr/>
-        </p:nvSpPr>
-        <p:spPr>
-          <a:xfrm>
-            <a:off x="4331000" y="3900000"/>
-            <a:ext cx="800000" cy="300000"/>
-          </a:xfrm>
-          <a:prstGeom prst="rect">
-            <a:avLst/>
-          </a:prstGeom>
-          <a:noFill/>
-        </p:spPr>
-        <p:txBody>
-          <a:bodyPr wrap="square" anchor="t" lIns="45720" rIns="45720">
-            <a:noAutofit/>
-          </a:bodyPr>
-          <a:lstStyle/>
-          <a:p>
-            <a:pPr algn="ctr"/>
-            <a:r>
-              <a:rPr lang="es-ES" sz="1200" b="1" dirty="0">
-                <a:solidFill>
-                  <a:srgbClr val="990F3D"/>
-                </a:solidFill>
-              </a:rPr>
-              <a:t>G2</a:t>
-            </a:r>
-          </a:p>
-        </p:txBody>
-      </p:sp>
-      <p:sp>
-        <p:nvSpPr>
-          <p:cNvPr id="147" name="Caja 147"/>
-          <p:cNvSpPr/>
-          <p:nvPr/>
-        </p:nvSpPr>
-        <p:spPr>
-          <a:xfrm>
-            <a:off x="4791000" y="2350000"/>
-            <a:ext cx="1240000" cy="1500000"/>
-          </a:xfrm>
-          <a:prstGeom prst="roundRect">
-            <a:avLst>
-              <a:gd name="adj" fmla="val 6000"/>
-            </a:avLst>
-          </a:prstGeom>
-          <a:solidFill>
-            <a:srgbClr val="990F3D"/>
-          </a:solidFill>
-          <a:ln>
-            <a:noFill/>
-          </a:ln>
-        </p:spPr>
-        <p:txBody>
-          <a:bodyPr wrap="square" anchor="ctr" lIns="45720" rIns="45720">
-            <a:noAutofit/>
-          </a:bodyPr>
-          <a:lstStyle/>
-          <a:p>
-            <a:pPr algn="ctr"/>
-            <a:r>
-              <a:rPr lang="es-ES" sz="2400" b="1" dirty="0">
-                <a:solidFill>
-                  <a:srgbClr val="FFFFFF"/>
-                </a:solidFill>
-              </a:rPr>
-              <a:t>F3</a:t>
-            </a:r>
-          </a:p>
-          <a:p>
-            <a:pPr algn="ctr"/>
-            <a:r>
-              <a:rPr lang="es-ES" sz="1050" dirty="0">
-                <a:solidFill>
-                  <a:srgbClr val="FFFFFF"/>
-                </a:solidFill>
-              </a:rPr>
-              <a:t>Feasibility and risk</a:t>
-            </a:r>
-          </a:p>
-        </p:txBody>
-      </p:sp>
-      <p:sp>
-        <p:nvSpPr>
-          <p:cNvPr id="148" name="Texto 148"/>
-          <p:cNvSpPr txBox="1"/>
-          <p:nvPr/>
-        </p:nvSpPr>
-        <p:spPr>
-          <a:xfrm>
-            <a:off x="5701000" y="3900000"/>
-            <a:ext cx="800000" cy="300000"/>
-          </a:xfrm>
-          <a:prstGeom prst="rect">
-            <a:avLst/>
-          </a:prstGeom>
-          <a:noFill/>
-        </p:spPr>
-        <p:txBody>
-          <a:bodyPr wrap="square" anchor="t" lIns="45720" rIns="45720">
-            <a:noAutofit/>
-          </a:bodyPr>
-          <a:lstStyle/>
-          <a:p>
-            <a:pPr algn="ctr"/>
-            <a:r>
-              <a:rPr lang="es-ES" sz="1200" b="1" dirty="0">
-                <a:solidFill>
-                  <a:srgbClr val="990F3D"/>
-                </a:solidFill>
-              </a:rPr>
-              <a:t>G3</a:t>
-            </a:r>
-          </a:p>
-        </p:txBody>
-      </p:sp>
-      <p:sp>
-        <p:nvSpPr>
-          <p:cNvPr id="149" name="Caja 149"/>
-          <p:cNvSpPr/>
-          <p:nvPr/>
-        </p:nvSpPr>
-        <p:spPr>
-          <a:xfrm>
-            <a:off x="6161000" y="2350000"/>
-            <a:ext cx="1240000" cy="1500000"/>
-          </a:xfrm>
-          <a:prstGeom prst="roundRect">
-            <a:avLst>
-              <a:gd name="adj" fmla="val 6000"/>
-            </a:avLst>
-          </a:prstGeom>
-          <a:solidFill>
-            <a:srgbClr val="C9A78D"/>
-          </a:solidFill>
-          <a:ln>
-            <a:noFill/>
-          </a:ln>
-        </p:spPr>
-        <p:txBody>
-          <a:bodyPr wrap="square" anchor="ctr" lIns="45720" rIns="45720">
-            <a:noAutofit/>
-          </a:bodyPr>
-          <a:lstStyle/>
-          <a:p>
-            <a:pPr algn="ctr"/>
-            <a:r>
-              <a:rPr lang="es-ES" sz="2400" b="1" dirty="0">
-                <a:solidFill>
-                  <a:srgbClr val="564D47"/>
-                </a:solidFill>
-              </a:rPr>
-              <a:t>F4</a:t>
-            </a:r>
-          </a:p>
-          <a:p>
-            <a:pPr algn="ctr"/>
-            <a:r>
-              <a:rPr lang="es-ES" sz="1050" dirty="0">
-                <a:solidFill>
-                  <a:srgbClr val="564D47"/>
-                </a:solidFill>
-              </a:rPr>
-              <a:t>Solution design</a:t>
-            </a:r>
-          </a:p>
-        </p:txBody>
-      </p:sp>
-      <p:sp>
-        <p:nvSpPr>
-          <p:cNvPr id="150" name="Texto 150"/>
-          <p:cNvSpPr txBox="1"/>
-          <p:nvPr/>
-        </p:nvSpPr>
-        <p:spPr>
-          <a:xfrm>
-            <a:off x="7071000" y="3900000"/>
-            <a:ext cx="800000" cy="300000"/>
-          </a:xfrm>
-          <a:prstGeom prst="rect">
-            <a:avLst/>
-          </a:prstGeom>
-          <a:noFill/>
-        </p:spPr>
-        <p:txBody>
-          <a:bodyPr wrap="square" anchor="t" lIns="45720" rIns="45720">
-            <a:noAutofit/>
-          </a:bodyPr>
-          <a:lstStyle/>
-          <a:p>
-            <a:pPr algn="ctr"/>
-            <a:r>
-              <a:rPr lang="es-ES" sz="1200" b="1" dirty="0">
-                <a:solidFill>
-                  <a:srgbClr val="990F3D"/>
-                </a:solidFill>
-              </a:rPr>
-              <a:t>G4</a:t>
-            </a:r>
-          </a:p>
-        </p:txBody>
-      </p:sp>
-      <p:sp>
-        <p:nvSpPr>
-          <p:cNvPr id="151" name="Caja 151"/>
-          <p:cNvSpPr/>
-          <p:nvPr/>
-        </p:nvSpPr>
-        <p:spPr>
-          <a:xfrm>
-            <a:off x="7531000" y="2350000"/>
-            <a:ext cx="1240000" cy="1500000"/>
-          </a:xfrm>
-          <a:prstGeom prst="roundRect">
-            <a:avLst>
-              <a:gd name="adj" fmla="val 6000"/>
-            </a:avLst>
-          </a:prstGeom>
-          <a:solidFill>
-            <a:srgbClr val="C9A78D"/>
-          </a:solidFill>
-          <a:ln>
-            <a:noFill/>
-          </a:ln>
-        </p:spPr>
-        <p:txBody>
-          <a:bodyPr wrap="square" anchor="ctr" lIns="45720" rIns="45720">
-            <a:noAutofit/>
-          </a:bodyPr>
-          <a:lstStyle/>
-          <a:p>
-            <a:pPr algn="ctr"/>
-            <a:r>
-              <a:rPr lang="es-ES" sz="2400" b="1" dirty="0">
-                <a:solidFill>
-                  <a:srgbClr val="564D47"/>
-                </a:solidFill>
-              </a:rPr>
-              <a:t>F5</a:t>
-            </a:r>
-          </a:p>
-          <a:p>
-            <a:pPr algn="ctr"/>
-            <a:r>
-              <a:rPr lang="es-ES" sz="1050" dirty="0">
-                <a:solidFill>
-                  <a:srgbClr val="564D47"/>
-                </a:solidFill>
-              </a:rPr>
-              <a:t>Delivery and validation</a:t>
-            </a:r>
-          </a:p>
-        </p:txBody>
-      </p:sp>
-      <p:sp>
-        <p:nvSpPr>
-          <p:cNvPr id="152" name="Texto 152"/>
-          <p:cNvSpPr txBox="1"/>
-          <p:nvPr/>
-        </p:nvSpPr>
-        <p:spPr>
-          <a:xfrm>
-            <a:off x="8441000" y="3900000"/>
-            <a:ext cx="800000" cy="300000"/>
-          </a:xfrm>
-          <a:prstGeom prst="rect">
-            <a:avLst/>
-          </a:prstGeom>
-          <a:noFill/>
-        </p:spPr>
-        <p:txBody>
-          <a:bodyPr wrap="square" anchor="t" lIns="45720" rIns="45720">
-            <a:noAutofit/>
-          </a:bodyPr>
-          <a:lstStyle/>
-          <a:p>
-            <a:pPr algn="ctr"/>
-            <a:r>
-              <a:rPr lang="es-ES" sz="1200" b="1" dirty="0">
-                <a:solidFill>
-                  <a:srgbClr val="990F3D"/>
-                </a:solidFill>
-              </a:rPr>
-              <a:t>G5</a:t>
-            </a:r>
-          </a:p>
-        </p:txBody>
-      </p:sp>
-      <p:sp>
-        <p:nvSpPr>
-          <p:cNvPr id="153" name="Caja 153"/>
-          <p:cNvSpPr/>
-          <p:nvPr/>
-        </p:nvSpPr>
-        <p:spPr>
-          <a:xfrm>
-            <a:off x="8901000" y="2350000"/>
-            <a:ext cx="1240000" cy="1500000"/>
-          </a:xfrm>
-          <a:prstGeom prst="roundRect">
-            <a:avLst>
-              <a:gd name="adj" fmla="val 6000"/>
-            </a:avLst>
-          </a:prstGeom>
-          <a:solidFill>
-            <a:srgbClr val="C9A78D"/>
-          </a:solidFill>
-          <a:ln>
-            <a:noFill/>
-          </a:ln>
-        </p:spPr>
-        <p:txBody>
-          <a:bodyPr wrap="square" anchor="ctr" lIns="45720" rIns="45720">
-            <a:noAutofit/>
-          </a:bodyPr>
-          <a:lstStyle/>
-          <a:p>
-            <a:pPr algn="ctr"/>
-            <a:r>
-              <a:rPr lang="es-ES" sz="2400" b="1" dirty="0">
-                <a:solidFill>
-                  <a:srgbClr val="564D47"/>
-                </a:solidFill>
-              </a:rPr>
-              <a:t>F6</a:t>
-            </a:r>
-          </a:p>
-          <a:p>
-            <a:pPr algn="ctr"/>
-            <a:r>
-              <a:rPr lang="es-ES" sz="1050" dirty="0">
-                <a:solidFill>
-                  <a:srgbClr val="564D47"/>
-                </a:solidFill>
-              </a:rPr>
-              <a:t>Operation and governance</a:t>
-            </a:r>
-          </a:p>
-        </p:txBody>
-      </p:sp>
-      <p:sp>
-        <p:nvSpPr>
-          <p:cNvPr id="154" name="Texto 154"/>
-          <p:cNvSpPr txBox="1"/>
-          <p:nvPr/>
-        </p:nvSpPr>
-        <p:spPr>
-          <a:xfrm>
-            <a:off x="9811000" y="3900000"/>
-            <a:ext cx="800000" cy="300000"/>
-          </a:xfrm>
-          <a:prstGeom prst="rect">
-            <a:avLst/>
-          </a:prstGeom>
-          <a:noFill/>
-        </p:spPr>
-        <p:txBody>
-          <a:bodyPr wrap="square" anchor="t" lIns="45720" rIns="45720">
-            <a:noAutofit/>
-          </a:bodyPr>
-          <a:lstStyle/>
-          <a:p>
-            <a:pPr algn="ctr"/>
-            <a:r>
-              <a:rPr lang="es-ES" sz="1200" b="1" dirty="0">
-                <a:solidFill>
-                  <a:srgbClr val="990F3D"/>
-                </a:solidFill>
-              </a:rPr>
-              <a:t>R6</a:t>
-            </a:r>
-          </a:p>
-        </p:txBody>
-      </p:sp>
-      <p:sp>
-        <p:nvSpPr>
-          <p:cNvPr id="155" name="Caja 155"/>
-          <p:cNvSpPr/>
-          <p:nvPr/>
-        </p:nvSpPr>
-        <p:spPr>
-          <a:xfrm>
-            <a:off x="10271000" y="2350000"/>
-            <a:ext cx="1240000" cy="1500000"/>
-          </a:xfrm>
-          <a:prstGeom prst="roundRect">
-            <a:avLst>
-              <a:gd name="adj" fmla="val 6000"/>
-            </a:avLst>
-          </a:prstGeom>
-          <a:solidFill>
-            <a:srgbClr val="C9A78D"/>
-          </a:solidFill>
-          <a:ln>
-            <a:noFill/>
-          </a:ln>
-        </p:spPr>
-        <p:txBody>
-          <a:bodyPr wrap="square" anchor="ctr" lIns="45720" rIns="45720">
-            <a:noAutofit/>
-          </a:bodyPr>
-          <a:lstStyle/>
-          <a:p>
-            <a:pPr algn="ctr"/>
-            <a:r>
-              <a:rPr lang="es-ES" sz="2400" b="1" dirty="0">
-                <a:solidFill>
-                  <a:srgbClr val="564D47"/>
-                </a:solidFill>
-              </a:rPr>
-              <a:t>F7</a:t>
-            </a:r>
-          </a:p>
-          <a:p>
-            <a:pPr algn="ctr"/>
-            <a:r>
-              <a:rPr lang="es-ES" sz="1050" dirty="0">
-                <a:solidFill>
-                  <a:srgbClr val="564D47"/>
-                </a:solidFill>
-              </a:rPr>
-              <a:t>Evolution or retirement</a:t>
-            </a:r>
-          </a:p>
-        </p:txBody>
-      </p:sp>
-      <p:sp>
-        <p:nvSpPr>
-          <p:cNvPr id="156" name="Texto 156"/>
-          <p:cNvSpPr txBox="1"/>
-          <p:nvPr/>
-        </p:nvSpPr>
-        <p:spPr>
-          <a:xfrm>
-            <a:off x="11181000" y="3900000"/>
-            <a:ext cx="800000" cy="300000"/>
-          </a:xfrm>
-          <a:prstGeom prst="rect">
-            <a:avLst/>
-          </a:prstGeom>
-          <a:noFill/>
-        </p:spPr>
-        <p:txBody>
-          <a:bodyPr wrap="square" anchor="t" lIns="45720" rIns="45720">
-            <a:noAutofit/>
-          </a:bodyPr>
-          <a:lstStyle/>
-          <a:p>
-            <a:pPr algn="ctr"/>
-            <a:r>
-              <a:rPr lang="es-ES" sz="1200" b="1" dirty="0">
-                <a:solidFill>
-                  <a:srgbClr val="990F3D"/>
-                </a:solidFill>
-              </a:rPr>
-              <a:t>G7</a:t>
-            </a:r>
-          </a:p>
-        </p:txBody>
-      </p:sp>
-      <p:sp>
-        <p:nvSpPr>
-          <p:cNvPr id="157" name="Texto 157"/>
-          <p:cNvSpPr txBox="1"/>
-          <p:nvPr/>
-        </p:nvSpPr>
-        <p:spPr>
-          <a:xfrm>
-            <a:off x="609600" y="4430000"/>
-            <a:ext cx="10972800" cy="600000"/>
-          </a:xfrm>
-          <a:prstGeom prst="rect">
-            <a:avLst/>
-          </a:prstGeom>
-          <a:noFill/>
-        </p:spPr>
-        <p:txBody>
-          <a:bodyPr wrap="square" anchor="t" lIns="45720" rIns="45720">
-            <a:noAutofit/>
-          </a:bodyPr>
-          <a:lstStyle/>
-          <a:p>
-            <a:pPr algn="ctr"/>
-            <a:r>
-              <a:rPr lang="es-ES" sz="2200" b="1" dirty="0">
-                <a:solidFill>
-                  <a:srgbClr val="990F3D"/>
-                </a:solidFill>
-              </a:rPr>
-              <a:t>STOPPED AT G3 · it leaves the funnel as "Discarded", with its reason</a:t>
+              <a:t>STOPPED AT G3 · BUILDING AND RUNNING AN UNVIABLE SYSTEM WAS AVOIDED</a:t>
             </a:r>
           </a:p>
         </p:txBody>
@@ -2832,21 +2277,21 @@
                   <a:srgbClr val="990F3D"/>
                 </a:solidFill>
               </a:rPr>
-              <a:t>Example 2 · When an initiative reaches production</a:t>
-            </a:r>
-          </a:p>
-        </p:txBody>
-      </p:sp>
-      <p:sp>
-        <p:nvSpPr>
-          <p:cNvPr id="162" name="Texto 162"/>
+              <a:t>Initiative 1, on the lifecycle</a:t>
+            </a:r>
+          </a:p>
+        </p:txBody>
+      </p:sp>
+      <p:sp>
+        <p:nvSpPr>
+          <p:cNvPr id="168" name="Texto 168"/>
           <p:cNvSpPr txBox="1"/>
           <p:nvPr/>
         </p:nvSpPr>
         <p:spPr>
           <a:xfrm>
             <a:off x="609600" y="1330000"/>
-            <a:ext cx="10972800" cy="500000"/>
+            <a:ext cx="10972800" cy="450000"/>
           </a:xfrm>
           <a:prstGeom prst="rect">
             <a:avLst/>
@@ -2861,169 +2306,26 @@
           <a:p>
             <a:pPr algn="l"/>
             <a:r>
-              <a:rPr lang="es-ES" sz="1700" b="1" dirty="0">
-                <a:solidFill>
-                  <a:srgbClr val="2F2B28"/>
-                </a:solidFill>
-              </a:rPr>
-              <a:t>First-line IT incident response assistant</a:t>
-            </a:r>
-          </a:p>
-        </p:txBody>
-      </p:sp>
-      <p:sp>
-        <p:nvSpPr>
-          <p:cNvPr id="163" name="Texto 163"/>
-          <p:cNvSpPr txBox="1"/>
-          <p:nvPr/>
-        </p:nvSpPr>
-        <p:spPr>
-          <a:xfrm>
-            <a:off x="609600" y="1900000"/>
-            <a:ext cx="10972800" cy="3550000"/>
-          </a:xfrm>
-          <a:prstGeom prst="rect">
-            <a:avLst/>
-          </a:prstGeom>
-          <a:noFill/>
-        </p:spPr>
-        <p:txBody>
-          <a:bodyPr wrap="square" anchor="t" lIns="45720" rIns="45720">
-            <a:noAutofit/>
-          </a:bodyPr>
-          <a:lstStyle/>
-          <a:p>
-            <a:pPr marL="285750" indent="-285750">
-              <a:spcAft>
-                <a:spcPts val="400"/>
-              </a:spcAft>
-              <a:buClr>
-                <a:srgbClr val="990F3D"/>
-              </a:buClr>
-              <a:buFont typeface="Arial"/>
-              <a:buChar char="•"/>
-            </a:pPr>
-            <a:r>
               <a:rPr lang="es-ES" sz="1500" dirty="0">
                 <a:solidFill>
-                  <a:srgbClr val="2F2B28"/>
-                </a:solidFill>
-              </a:rPr>
-              <a:t>Phases 0 and 1: IT sponsors it; against the non-AI alternative (more staff), the operations sphere with Optimise ambition is proposed (P07).</a:t>
-            </a:r>
-          </a:p>
-          <a:p>
-            <a:pPr marL="285750" indent="-285750">
-              <a:spcAft>
-                <a:spcPts val="400"/>
-              </a:spcAft>
-              <a:buClr>
-                <a:srgbClr val="990F3D"/>
-              </a:buClr>
-              <a:buFont typeface="Arial"/>
-              <a:buChar char="•"/>
-            </a:pPr>
-            <a:r>
-              <a:rPr lang="es-ES" sz="1500" dirty="0">
-                <a:solidFill>
-                  <a:srgbClr val="2F2B28"/>
-                </a:solidFill>
-              </a:rPr>
-              <a:t>Phase 2: hypothesis of 30% less resolution time for simple incidents; the controlled pilot yields 32%.</a:t>
-            </a:r>
-          </a:p>
-          <a:p>
-            <a:pPr marL="285750" indent="-285750">
-              <a:spcAft>
-                <a:spcPts val="400"/>
-              </a:spcAft>
-              <a:buClr>
-                <a:srgbClr val="990F3D"/>
-              </a:buClr>
-              <a:buFont typeface="Arial"/>
-              <a:buChar char="•"/>
-            </a:pPr>
-            <a:r>
-              <a:rPr lang="es-ES" sz="1500" dirty="0">
-                <a:solidFill>
-                  <a:srgbClr val="2F2B28"/>
-                </a:solidFill>
-              </a:rPr>
-              <a:t>Phase 3: no relevant bias, medium residual risk accepted by the right body (P12), supplier assessed (P14). G3, Proceed.</a:t>
-            </a:r>
-          </a:p>
-          <a:p>
-            <a:pPr marL="285750" indent="-285750">
-              <a:spcAft>
-                <a:spcPts val="400"/>
-              </a:spcAft>
-              <a:buClr>
-                <a:srgbClr val="990F3D"/>
-              </a:buClr>
-              <a:buFont typeface="Arial"/>
-              <a:buChar char="•"/>
-            </a:pPr>
-            <a:r>
-              <a:rPr lang="es-ES" sz="1500" dirty="0">
-                <a:solidFill>
-                  <a:srgbClr val="2F2B28"/>
-                </a:solidFill>
-              </a:rPr>
-              <a:t>Phases 4 and 5: mandatory human oversight above a severity level (P17), tested rollback (P19) and go-live sign-off (P23).</a:t>
-            </a:r>
-          </a:p>
-          <a:p>
-            <a:pPr marL="285750" indent="-285750">
-              <a:spcAft>
-                <a:spcPts val="400"/>
-              </a:spcAft>
-              <a:buClr>
-                <a:srgbClr val="990F3D"/>
-              </a:buClr>
-              <a:buFont typeface="Arial"/>
-              <a:buChar char="•"/>
-            </a:pPr>
-            <a:r>
-              <a:rPr lang="es-ES" sz="1500" dirty="0">
-                <a:solidFill>
-                  <a:srgbClr val="2F2B28"/>
-                </a:solidFill>
-              </a:rPr>
-              <a:t>Phase 6: fourteen months in use. Finance validates €1.1M a year (P28); released capacity was reassigned to complex incidents.</a:t>
-            </a:r>
-          </a:p>
-          <a:p>
-            <a:pPr marL="285750" indent="-285750">
-              <a:spcAft>
-                <a:spcPts val="400"/>
-              </a:spcAft>
-              <a:buClr>
-                <a:srgbClr val="990F3D"/>
-              </a:buClr>
-              <a:buFont typeface="Arial"/>
-              <a:buChar char="•"/>
-            </a:pPr>
-            <a:r>
-              <a:rPr lang="es-ES" sz="1500" dirty="0">
-                <a:solidFill>
-                  <a:srgbClr val="2F2B28"/>
-                </a:solidFill>
-              </a:rPr>
-              <a:t>In the funnel it sits under "In use"; on the dashboard it adds to annual net because its value is validated, not declared.</a:t>
-            </a:r>
-          </a:p>
-        </p:txBody>
-      </p:sp>
-      <p:sp>
-        <p:nvSpPr>
-          <p:cNvPr id="164" name="Caja 164"/>
+                  <a:srgbClr val="564D47"/>
+                </a:solidFill>
+              </a:rPr>
+              <a:t>It reached phase 3 and did not pass gate G3</a:t>
+            </a:r>
+          </a:p>
+        </p:txBody>
+      </p:sp>
+      <p:sp>
+        <p:nvSpPr>
+          <p:cNvPr id="148" name="Caja 148"/>
           <p:cNvSpPr/>
           <p:nvPr/>
         </p:nvSpPr>
         <p:spPr>
           <a:xfrm>
-            <a:off x="609600" y="5600000"/>
-            <a:ext cx="10972800" cy="900000"/>
+            <a:off x="681000" y="2350000"/>
+            <a:ext cx="1240000" cy="1500000"/>
           </a:xfrm>
           <a:prstGeom prst="roundRect">
             <a:avLst>
@@ -3031,7 +2333,7 @@
             </a:avLst>
           </a:prstGeom>
           <a:solidFill>
-            <a:srgbClr val="0D7680"/>
+            <a:srgbClr val="990F3D"/>
           </a:solidFill>
           <a:ln>
             <a:noFill/>
@@ -3045,12 +2347,693 @@
           <a:p>
             <a:pPr algn="ctr"/>
             <a:r>
-              <a:rPr lang="es-ES" sz="2100" b="1" dirty="0">
+              <a:rPr lang="es-ES" sz="2400" b="1" dirty="0">
                 <a:solidFill>
                   <a:srgbClr val="FFFFFF"/>
                 </a:solidFill>
               </a:rPr>
-              <a:t>IN PRODUCTION · €1.1M OF VALIDATED ANNUAL RETURN · QUARTERLY R6</a:t>
+              <a:t>F0</a:t>
+            </a:r>
+          </a:p>
+          <a:p>
+            <a:pPr algn="ctr"/>
+            <a:r>
+              <a:rPr lang="es-ES" sz="1050" dirty="0">
+                <a:solidFill>
+                  <a:srgbClr val="FFFFFF"/>
+                </a:solidFill>
+              </a:rPr>
+              <a:t>Context and constraints</a:t>
+            </a:r>
+          </a:p>
+        </p:txBody>
+      </p:sp>
+      <p:sp>
+        <p:nvSpPr>
+          <p:cNvPr id="149" name="Texto 149"/>
+          <p:cNvSpPr txBox="1"/>
+          <p:nvPr/>
+        </p:nvSpPr>
+        <p:spPr>
+          <a:xfrm>
+            <a:off x="1591000" y="3900000"/>
+            <a:ext cx="800000" cy="300000"/>
+          </a:xfrm>
+          <a:prstGeom prst="rect">
+            <a:avLst/>
+          </a:prstGeom>
+          <a:noFill/>
+        </p:spPr>
+        <p:txBody>
+          <a:bodyPr wrap="square" anchor="t" lIns="45720" rIns="45720">
+            <a:noAutofit/>
+          </a:bodyPr>
+          <a:lstStyle/>
+          <a:p>
+            <a:pPr algn="ctr"/>
+            <a:r>
+              <a:rPr lang="es-ES" sz="1200" b="1" dirty="0">
+                <a:solidFill>
+                  <a:srgbClr val="990F3D"/>
+                </a:solidFill>
+              </a:rPr>
+              <a:t>G0</a:t>
+            </a:r>
+          </a:p>
+        </p:txBody>
+      </p:sp>
+      <p:sp>
+        <p:nvSpPr>
+          <p:cNvPr id="150" name="Caja 150"/>
+          <p:cNvSpPr/>
+          <p:nvPr/>
+        </p:nvSpPr>
+        <p:spPr>
+          <a:xfrm>
+            <a:off x="2051000" y="2350000"/>
+            <a:ext cx="1240000" cy="1500000"/>
+          </a:xfrm>
+          <a:prstGeom prst="roundRect">
+            <a:avLst>
+              <a:gd name="adj" fmla="val 6000"/>
+            </a:avLst>
+          </a:prstGeom>
+          <a:solidFill>
+            <a:srgbClr val="990F3D"/>
+          </a:solidFill>
+          <a:ln>
+            <a:noFill/>
+          </a:ln>
+        </p:spPr>
+        <p:txBody>
+          <a:bodyPr wrap="square" anchor="ctr" lIns="45720" rIns="45720">
+            <a:noAutofit/>
+          </a:bodyPr>
+          <a:lstStyle/>
+          <a:p>
+            <a:pPr algn="ctr"/>
+            <a:r>
+              <a:rPr lang="es-ES" sz="2400" b="1" dirty="0">
+                <a:solidFill>
+                  <a:srgbClr val="FFFFFF"/>
+                </a:solidFill>
+              </a:rPr>
+              <a:t>F1</a:t>
+            </a:r>
+          </a:p>
+          <a:p>
+            <a:pPr algn="ctr"/>
+            <a:r>
+              <a:rPr lang="es-ES" sz="1050" dirty="0">
+                <a:solidFill>
+                  <a:srgbClr val="FFFFFF"/>
+                </a:solidFill>
+              </a:rPr>
+              <a:t>Opportunity discovery</a:t>
+            </a:r>
+          </a:p>
+        </p:txBody>
+      </p:sp>
+      <p:sp>
+        <p:nvSpPr>
+          <p:cNvPr id="151" name="Texto 151"/>
+          <p:cNvSpPr txBox="1"/>
+          <p:nvPr/>
+        </p:nvSpPr>
+        <p:spPr>
+          <a:xfrm>
+            <a:off x="2961000" y="3900000"/>
+            <a:ext cx="800000" cy="300000"/>
+          </a:xfrm>
+          <a:prstGeom prst="rect">
+            <a:avLst/>
+          </a:prstGeom>
+          <a:noFill/>
+        </p:spPr>
+        <p:txBody>
+          <a:bodyPr wrap="square" anchor="t" lIns="45720" rIns="45720">
+            <a:noAutofit/>
+          </a:bodyPr>
+          <a:lstStyle/>
+          <a:p>
+            <a:pPr algn="ctr"/>
+            <a:r>
+              <a:rPr lang="es-ES" sz="1200" b="1" dirty="0">
+                <a:solidFill>
+                  <a:srgbClr val="990F3D"/>
+                </a:solidFill>
+              </a:rPr>
+              <a:t>G1</a:t>
+            </a:r>
+          </a:p>
+        </p:txBody>
+      </p:sp>
+      <p:sp>
+        <p:nvSpPr>
+          <p:cNvPr id="152" name="Caja 152"/>
+          <p:cNvSpPr/>
+          <p:nvPr/>
+        </p:nvSpPr>
+        <p:spPr>
+          <a:xfrm>
+            <a:off x="3421000" y="2350000"/>
+            <a:ext cx="1240000" cy="1500000"/>
+          </a:xfrm>
+          <a:prstGeom prst="roundRect">
+            <a:avLst>
+              <a:gd name="adj" fmla="val 6000"/>
+            </a:avLst>
+          </a:prstGeom>
+          <a:solidFill>
+            <a:srgbClr val="990F3D"/>
+          </a:solidFill>
+          <a:ln>
+            <a:noFill/>
+          </a:ln>
+        </p:spPr>
+        <p:txBody>
+          <a:bodyPr wrap="square" anchor="ctr" lIns="45720" rIns="45720">
+            <a:noAutofit/>
+          </a:bodyPr>
+          <a:lstStyle/>
+          <a:p>
+            <a:pPr algn="ctr"/>
+            <a:r>
+              <a:rPr lang="es-ES" sz="2400" b="1" dirty="0">
+                <a:solidFill>
+                  <a:srgbClr val="FFFFFF"/>
+                </a:solidFill>
+              </a:rPr>
+              <a:t>F2</a:t>
+            </a:r>
+          </a:p>
+          <a:p>
+            <a:pPr algn="ctr"/>
+            <a:r>
+              <a:rPr lang="es-ES" sz="1050" dirty="0">
+                <a:solidFill>
+                  <a:srgbClr val="FFFFFF"/>
+                </a:solidFill>
+              </a:rPr>
+              <a:t>Value hypothesis</a:t>
+            </a:r>
+          </a:p>
+        </p:txBody>
+      </p:sp>
+      <p:sp>
+        <p:nvSpPr>
+          <p:cNvPr id="153" name="Texto 153"/>
+          <p:cNvSpPr txBox="1"/>
+          <p:nvPr/>
+        </p:nvSpPr>
+        <p:spPr>
+          <a:xfrm>
+            <a:off x="4331000" y="3900000"/>
+            <a:ext cx="800000" cy="300000"/>
+          </a:xfrm>
+          <a:prstGeom prst="rect">
+            <a:avLst/>
+          </a:prstGeom>
+          <a:noFill/>
+        </p:spPr>
+        <p:txBody>
+          <a:bodyPr wrap="square" anchor="t" lIns="45720" rIns="45720">
+            <a:noAutofit/>
+          </a:bodyPr>
+          <a:lstStyle/>
+          <a:p>
+            <a:pPr algn="ctr"/>
+            <a:r>
+              <a:rPr lang="es-ES" sz="1200" b="1" dirty="0">
+                <a:solidFill>
+                  <a:srgbClr val="990F3D"/>
+                </a:solidFill>
+              </a:rPr>
+              <a:t>G2</a:t>
+            </a:r>
+          </a:p>
+        </p:txBody>
+      </p:sp>
+      <p:sp>
+        <p:nvSpPr>
+          <p:cNvPr id="154" name="Caja 154"/>
+          <p:cNvSpPr/>
+          <p:nvPr/>
+        </p:nvSpPr>
+        <p:spPr>
+          <a:xfrm>
+            <a:off x="4791000" y="2350000"/>
+            <a:ext cx="1240000" cy="1500000"/>
+          </a:xfrm>
+          <a:prstGeom prst="roundRect">
+            <a:avLst>
+              <a:gd name="adj" fmla="val 6000"/>
+            </a:avLst>
+          </a:prstGeom>
+          <a:solidFill>
+            <a:srgbClr val="990F3D"/>
+          </a:solidFill>
+          <a:ln>
+            <a:noFill/>
+          </a:ln>
+        </p:spPr>
+        <p:txBody>
+          <a:bodyPr wrap="square" anchor="ctr" lIns="45720" rIns="45720">
+            <a:noAutofit/>
+          </a:bodyPr>
+          <a:lstStyle/>
+          <a:p>
+            <a:pPr algn="ctr"/>
+            <a:r>
+              <a:rPr lang="es-ES" sz="2400" b="1" dirty="0">
+                <a:solidFill>
+                  <a:srgbClr val="FFFFFF"/>
+                </a:solidFill>
+              </a:rPr>
+              <a:t>F3</a:t>
+            </a:r>
+          </a:p>
+          <a:p>
+            <a:pPr algn="ctr"/>
+            <a:r>
+              <a:rPr lang="es-ES" sz="1050" dirty="0">
+                <a:solidFill>
+                  <a:srgbClr val="FFFFFF"/>
+                </a:solidFill>
+              </a:rPr>
+              <a:t>Feasibility and risk</a:t>
+            </a:r>
+          </a:p>
+        </p:txBody>
+      </p:sp>
+      <p:sp>
+        <p:nvSpPr>
+          <p:cNvPr id="155" name="Texto 155"/>
+          <p:cNvSpPr txBox="1"/>
+          <p:nvPr/>
+        </p:nvSpPr>
+        <p:spPr>
+          <a:xfrm>
+            <a:off x="5701000" y="3900000"/>
+            <a:ext cx="800000" cy="300000"/>
+          </a:xfrm>
+          <a:prstGeom prst="rect">
+            <a:avLst/>
+          </a:prstGeom>
+          <a:noFill/>
+        </p:spPr>
+        <p:txBody>
+          <a:bodyPr wrap="square" anchor="t" lIns="45720" rIns="45720">
+            <a:noAutofit/>
+          </a:bodyPr>
+          <a:lstStyle/>
+          <a:p>
+            <a:pPr algn="ctr"/>
+            <a:r>
+              <a:rPr lang="es-ES" sz="1200" b="1" dirty="0">
+                <a:solidFill>
+                  <a:srgbClr val="990F3D"/>
+                </a:solidFill>
+              </a:rPr>
+              <a:t>G3</a:t>
+            </a:r>
+          </a:p>
+        </p:txBody>
+      </p:sp>
+      <p:sp>
+        <p:nvSpPr>
+          <p:cNvPr id="156" name="Caja 156"/>
+          <p:cNvSpPr/>
+          <p:nvPr/>
+        </p:nvSpPr>
+        <p:spPr>
+          <a:xfrm>
+            <a:off x="6161000" y="2350000"/>
+            <a:ext cx="1240000" cy="1500000"/>
+          </a:xfrm>
+          <a:prstGeom prst="roundRect">
+            <a:avLst>
+              <a:gd name="adj" fmla="val 6000"/>
+            </a:avLst>
+          </a:prstGeom>
+          <a:solidFill>
+            <a:srgbClr val="C9A78D"/>
+          </a:solidFill>
+          <a:ln>
+            <a:noFill/>
+          </a:ln>
+        </p:spPr>
+        <p:txBody>
+          <a:bodyPr wrap="square" anchor="ctr" lIns="45720" rIns="45720">
+            <a:noAutofit/>
+          </a:bodyPr>
+          <a:lstStyle/>
+          <a:p>
+            <a:pPr algn="ctr"/>
+            <a:r>
+              <a:rPr lang="es-ES" sz="2400" b="1" dirty="0">
+                <a:solidFill>
+                  <a:srgbClr val="564D47"/>
+                </a:solidFill>
+              </a:rPr>
+              <a:t>F4</a:t>
+            </a:r>
+          </a:p>
+          <a:p>
+            <a:pPr algn="ctr"/>
+            <a:r>
+              <a:rPr lang="es-ES" sz="1050" dirty="0">
+                <a:solidFill>
+                  <a:srgbClr val="564D47"/>
+                </a:solidFill>
+              </a:rPr>
+              <a:t>Solution design</a:t>
+            </a:r>
+          </a:p>
+        </p:txBody>
+      </p:sp>
+      <p:sp>
+        <p:nvSpPr>
+          <p:cNvPr id="157" name="Texto 157"/>
+          <p:cNvSpPr txBox="1"/>
+          <p:nvPr/>
+        </p:nvSpPr>
+        <p:spPr>
+          <a:xfrm>
+            <a:off x="7071000" y="3900000"/>
+            <a:ext cx="800000" cy="300000"/>
+          </a:xfrm>
+          <a:prstGeom prst="rect">
+            <a:avLst/>
+          </a:prstGeom>
+          <a:noFill/>
+        </p:spPr>
+        <p:txBody>
+          <a:bodyPr wrap="square" anchor="t" lIns="45720" rIns="45720">
+            <a:noAutofit/>
+          </a:bodyPr>
+          <a:lstStyle/>
+          <a:p>
+            <a:pPr algn="ctr"/>
+            <a:r>
+              <a:rPr lang="es-ES" sz="1200" b="1" dirty="0">
+                <a:solidFill>
+                  <a:srgbClr val="990F3D"/>
+                </a:solidFill>
+              </a:rPr>
+              <a:t>G4</a:t>
+            </a:r>
+          </a:p>
+        </p:txBody>
+      </p:sp>
+      <p:sp>
+        <p:nvSpPr>
+          <p:cNvPr id="158" name="Caja 158"/>
+          <p:cNvSpPr/>
+          <p:nvPr/>
+        </p:nvSpPr>
+        <p:spPr>
+          <a:xfrm>
+            <a:off x="7531000" y="2350000"/>
+            <a:ext cx="1240000" cy="1500000"/>
+          </a:xfrm>
+          <a:prstGeom prst="roundRect">
+            <a:avLst>
+              <a:gd name="adj" fmla="val 6000"/>
+            </a:avLst>
+          </a:prstGeom>
+          <a:solidFill>
+            <a:srgbClr val="C9A78D"/>
+          </a:solidFill>
+          <a:ln>
+            <a:noFill/>
+          </a:ln>
+        </p:spPr>
+        <p:txBody>
+          <a:bodyPr wrap="square" anchor="ctr" lIns="45720" rIns="45720">
+            <a:noAutofit/>
+          </a:bodyPr>
+          <a:lstStyle/>
+          <a:p>
+            <a:pPr algn="ctr"/>
+            <a:r>
+              <a:rPr lang="es-ES" sz="2400" b="1" dirty="0">
+                <a:solidFill>
+                  <a:srgbClr val="564D47"/>
+                </a:solidFill>
+              </a:rPr>
+              <a:t>F5</a:t>
+            </a:r>
+          </a:p>
+          <a:p>
+            <a:pPr algn="ctr"/>
+            <a:r>
+              <a:rPr lang="es-ES" sz="1050" dirty="0">
+                <a:solidFill>
+                  <a:srgbClr val="564D47"/>
+                </a:solidFill>
+              </a:rPr>
+              <a:t>Delivery and validation</a:t>
+            </a:r>
+          </a:p>
+        </p:txBody>
+      </p:sp>
+      <p:sp>
+        <p:nvSpPr>
+          <p:cNvPr id="159" name="Texto 159"/>
+          <p:cNvSpPr txBox="1"/>
+          <p:nvPr/>
+        </p:nvSpPr>
+        <p:spPr>
+          <a:xfrm>
+            <a:off x="8441000" y="3900000"/>
+            <a:ext cx="800000" cy="300000"/>
+          </a:xfrm>
+          <a:prstGeom prst="rect">
+            <a:avLst/>
+          </a:prstGeom>
+          <a:noFill/>
+        </p:spPr>
+        <p:txBody>
+          <a:bodyPr wrap="square" anchor="t" lIns="45720" rIns="45720">
+            <a:noAutofit/>
+          </a:bodyPr>
+          <a:lstStyle/>
+          <a:p>
+            <a:pPr algn="ctr"/>
+            <a:r>
+              <a:rPr lang="es-ES" sz="1200" b="1" dirty="0">
+                <a:solidFill>
+                  <a:srgbClr val="990F3D"/>
+                </a:solidFill>
+              </a:rPr>
+              <a:t>G5</a:t>
+            </a:r>
+          </a:p>
+        </p:txBody>
+      </p:sp>
+      <p:sp>
+        <p:nvSpPr>
+          <p:cNvPr id="160" name="Caja 160"/>
+          <p:cNvSpPr/>
+          <p:nvPr/>
+        </p:nvSpPr>
+        <p:spPr>
+          <a:xfrm>
+            <a:off x="8901000" y="2350000"/>
+            <a:ext cx="1240000" cy="1500000"/>
+          </a:xfrm>
+          <a:prstGeom prst="roundRect">
+            <a:avLst>
+              <a:gd name="adj" fmla="val 6000"/>
+            </a:avLst>
+          </a:prstGeom>
+          <a:solidFill>
+            <a:srgbClr val="C9A78D"/>
+          </a:solidFill>
+          <a:ln>
+            <a:noFill/>
+          </a:ln>
+        </p:spPr>
+        <p:txBody>
+          <a:bodyPr wrap="square" anchor="ctr" lIns="45720" rIns="45720">
+            <a:noAutofit/>
+          </a:bodyPr>
+          <a:lstStyle/>
+          <a:p>
+            <a:pPr algn="ctr"/>
+            <a:r>
+              <a:rPr lang="es-ES" sz="2400" b="1" dirty="0">
+                <a:solidFill>
+                  <a:srgbClr val="564D47"/>
+                </a:solidFill>
+              </a:rPr>
+              <a:t>F6</a:t>
+            </a:r>
+          </a:p>
+          <a:p>
+            <a:pPr algn="ctr"/>
+            <a:r>
+              <a:rPr lang="es-ES" sz="1050" dirty="0">
+                <a:solidFill>
+                  <a:srgbClr val="564D47"/>
+                </a:solidFill>
+              </a:rPr>
+              <a:t>Operation and governance</a:t>
+            </a:r>
+          </a:p>
+        </p:txBody>
+      </p:sp>
+      <p:sp>
+        <p:nvSpPr>
+          <p:cNvPr id="161" name="Texto 161"/>
+          <p:cNvSpPr txBox="1"/>
+          <p:nvPr/>
+        </p:nvSpPr>
+        <p:spPr>
+          <a:xfrm>
+            <a:off x="9811000" y="3900000"/>
+            <a:ext cx="800000" cy="300000"/>
+          </a:xfrm>
+          <a:prstGeom prst="rect">
+            <a:avLst/>
+          </a:prstGeom>
+          <a:noFill/>
+        </p:spPr>
+        <p:txBody>
+          <a:bodyPr wrap="square" anchor="t" lIns="45720" rIns="45720">
+            <a:noAutofit/>
+          </a:bodyPr>
+          <a:lstStyle/>
+          <a:p>
+            <a:pPr algn="ctr"/>
+            <a:r>
+              <a:rPr lang="es-ES" sz="1200" b="1" dirty="0">
+                <a:solidFill>
+                  <a:srgbClr val="990F3D"/>
+                </a:solidFill>
+              </a:rPr>
+              <a:t>R6</a:t>
+            </a:r>
+          </a:p>
+        </p:txBody>
+      </p:sp>
+      <p:sp>
+        <p:nvSpPr>
+          <p:cNvPr id="162" name="Caja 162"/>
+          <p:cNvSpPr/>
+          <p:nvPr/>
+        </p:nvSpPr>
+        <p:spPr>
+          <a:xfrm>
+            <a:off x="10271000" y="2350000"/>
+            <a:ext cx="1240000" cy="1500000"/>
+          </a:xfrm>
+          <a:prstGeom prst="roundRect">
+            <a:avLst>
+              <a:gd name="adj" fmla="val 6000"/>
+            </a:avLst>
+          </a:prstGeom>
+          <a:solidFill>
+            <a:srgbClr val="C9A78D"/>
+          </a:solidFill>
+          <a:ln>
+            <a:noFill/>
+          </a:ln>
+        </p:spPr>
+        <p:txBody>
+          <a:bodyPr wrap="square" anchor="ctr" lIns="45720" rIns="45720">
+            <a:noAutofit/>
+          </a:bodyPr>
+          <a:lstStyle/>
+          <a:p>
+            <a:pPr algn="ctr"/>
+            <a:r>
+              <a:rPr lang="es-ES" sz="2400" b="1" dirty="0">
+                <a:solidFill>
+                  <a:srgbClr val="564D47"/>
+                </a:solidFill>
+              </a:rPr>
+              <a:t>F7</a:t>
+            </a:r>
+          </a:p>
+          <a:p>
+            <a:pPr algn="ctr"/>
+            <a:r>
+              <a:rPr lang="es-ES" sz="1050" dirty="0">
+                <a:solidFill>
+                  <a:srgbClr val="564D47"/>
+                </a:solidFill>
+              </a:rPr>
+              <a:t>Evolution or retirement</a:t>
+            </a:r>
+          </a:p>
+        </p:txBody>
+      </p:sp>
+      <p:sp>
+        <p:nvSpPr>
+          <p:cNvPr id="163" name="Texto 163"/>
+          <p:cNvSpPr txBox="1"/>
+          <p:nvPr/>
+        </p:nvSpPr>
+        <p:spPr>
+          <a:xfrm>
+            <a:off x="11181000" y="3900000"/>
+            <a:ext cx="800000" cy="300000"/>
+          </a:xfrm>
+          <a:prstGeom prst="rect">
+            <a:avLst/>
+          </a:prstGeom>
+          <a:noFill/>
+        </p:spPr>
+        <p:txBody>
+          <a:bodyPr wrap="square" anchor="t" lIns="45720" rIns="45720">
+            <a:noAutofit/>
+          </a:bodyPr>
+          <a:lstStyle/>
+          <a:p>
+            <a:pPr algn="ctr"/>
+            <a:r>
+              <a:rPr lang="es-ES" sz="1200" b="1" dirty="0">
+                <a:solidFill>
+                  <a:srgbClr val="990F3D"/>
+                </a:solidFill>
+              </a:rPr>
+              <a:t>G7</a:t>
+            </a:r>
+          </a:p>
+        </p:txBody>
+      </p:sp>
+      <p:sp>
+        <p:nvSpPr>
+          <p:cNvPr id="164" name="Texto 164"/>
+          <p:cNvSpPr txBox="1"/>
+          <p:nvPr/>
+        </p:nvSpPr>
+        <p:spPr>
+          <a:xfrm>
+            <a:off x="609600" y="4430000"/>
+            <a:ext cx="10972800" cy="600000"/>
+          </a:xfrm>
+          <a:prstGeom prst="rect">
+            <a:avLst/>
+          </a:prstGeom>
+          <a:noFill/>
+        </p:spPr>
+        <p:txBody>
+          <a:bodyPr wrap="square" anchor="t" lIns="45720" rIns="45720">
+            <a:noAutofit/>
+          </a:bodyPr>
+          <a:lstStyle/>
+          <a:p>
+            <a:pPr algn="ctr"/>
+            <a:r>
+              <a:rPr lang="es-ES" sz="2200" b="1" dirty="0">
+                <a:solidFill>
+                  <a:srgbClr val="990F3D"/>
+                </a:solidFill>
+              </a:rPr>
+              <a:t>STOPPED AT G3 · it leaves the funnel as "Discarded", with its reason</a:t>
             </a:r>
           </a:p>
         </p:txBody>
@@ -3090,7 +3073,7 @@
       </p:grpSpPr>
       <p:sp>
         <p:nvSpPr>
-          <p:cNvPr id="185" name="Marca"/>
+          <p:cNvPr id="172" name="Marca"/>
           <p:cNvSpPr/>
           <p:nvPr/>
         </p:nvSpPr>
@@ -3114,7 +3097,7 @@
       </p:sp>
       <p:sp>
         <p:nvSpPr>
-          <p:cNvPr id="186" name="Texto 186"/>
+          <p:cNvPr id="173" name="Texto 173"/>
           <p:cNvSpPr txBox="1"/>
           <p:nvPr/>
         </p:nvSpPr>
@@ -3148,7 +3131,7 @@
       </p:sp>
       <p:sp>
         <p:nvSpPr>
-          <p:cNvPr id="187" name="Texto 187"/>
+          <p:cNvPr id="174" name="Texto 174"/>
           <p:cNvSpPr txBox="1"/>
           <p:nvPr/>
         </p:nvSpPr>
@@ -3175,21 +3158,21 @@
                   <a:srgbClr val="990F3D"/>
                 </a:solidFill>
               </a:rPr>
-              <a:t>Initiative 2, on the lifecycle</a:t>
-            </a:r>
-          </a:p>
-        </p:txBody>
-      </p:sp>
-      <p:sp>
-        <p:nvSpPr>
-          <p:cNvPr id="188" name="Texto 188"/>
+              <a:t>Example 2 · When an initiative reaches production</a:t>
+            </a:r>
+          </a:p>
+        </p:txBody>
+      </p:sp>
+      <p:sp>
+        <p:nvSpPr>
+          <p:cNvPr id="169" name="Texto 169"/>
           <p:cNvSpPr txBox="1"/>
           <p:nvPr/>
         </p:nvSpPr>
         <p:spPr>
           <a:xfrm>
             <a:off x="609600" y="1330000"/>
-            <a:ext cx="10972800" cy="450000"/>
+            <a:ext cx="10972800" cy="500000"/>
           </a:xfrm>
           <a:prstGeom prst="rect">
             <a:avLst/>
@@ -3204,26 +3187,169 @@
           <a:p>
             <a:pPr algn="l"/>
             <a:r>
+              <a:rPr lang="es-ES" sz="1700" b="1" dirty="0">
+                <a:solidFill>
+                  <a:srgbClr val="2F2B28"/>
+                </a:solidFill>
+              </a:rPr>
+              <a:t>First-line IT incident response assistant</a:t>
+            </a:r>
+          </a:p>
+        </p:txBody>
+      </p:sp>
+      <p:sp>
+        <p:nvSpPr>
+          <p:cNvPr id="170" name="Texto 170"/>
+          <p:cNvSpPr txBox="1"/>
+          <p:nvPr/>
+        </p:nvSpPr>
+        <p:spPr>
+          <a:xfrm>
+            <a:off x="609600" y="1900000"/>
+            <a:ext cx="10972800" cy="3550000"/>
+          </a:xfrm>
+          <a:prstGeom prst="rect">
+            <a:avLst/>
+          </a:prstGeom>
+          <a:noFill/>
+        </p:spPr>
+        <p:txBody>
+          <a:bodyPr wrap="square" anchor="t" lIns="45720" rIns="45720">
+            <a:noAutofit/>
+          </a:bodyPr>
+          <a:lstStyle/>
+          <a:p>
+            <a:pPr marL="285750" indent="-285750">
+              <a:spcAft>
+                <a:spcPts val="400"/>
+              </a:spcAft>
+              <a:buClr>
+                <a:srgbClr val="990F3D"/>
+              </a:buClr>
+              <a:buFont typeface="Arial"/>
+              <a:buChar char="•"/>
+            </a:pPr>
+            <a:r>
               <a:rPr lang="es-ES" sz="1500" dirty="0">
                 <a:solidFill>
-                  <a:srgbClr val="564D47"/>
-                </a:solidFill>
-              </a:rPr>
-              <a:t>It went through phases 0 to 6 and remains in use; phase 7 will come with G7</a:t>
-            </a:r>
-          </a:p>
-        </p:txBody>
-      </p:sp>
-      <p:sp>
-        <p:nvSpPr>
-          <p:cNvPr id="168" name="Caja 168"/>
+                  <a:srgbClr val="2F2B28"/>
+                </a:solidFill>
+              </a:rPr>
+              <a:t>Phases 0 and 1: IT sponsors it; against the non-AI alternative (more staff), the operations sphere with Optimise ambition is proposed (P07).</a:t>
+            </a:r>
+          </a:p>
+          <a:p>
+            <a:pPr marL="285750" indent="-285750">
+              <a:spcAft>
+                <a:spcPts val="400"/>
+              </a:spcAft>
+              <a:buClr>
+                <a:srgbClr val="990F3D"/>
+              </a:buClr>
+              <a:buFont typeface="Arial"/>
+              <a:buChar char="•"/>
+            </a:pPr>
+            <a:r>
+              <a:rPr lang="es-ES" sz="1500" dirty="0">
+                <a:solidFill>
+                  <a:srgbClr val="2F2B28"/>
+                </a:solidFill>
+              </a:rPr>
+              <a:t>Phase 2: hypothesis of 30% less resolution time for simple incidents; the controlled pilot yields 32%.</a:t>
+            </a:r>
+          </a:p>
+          <a:p>
+            <a:pPr marL="285750" indent="-285750">
+              <a:spcAft>
+                <a:spcPts val="400"/>
+              </a:spcAft>
+              <a:buClr>
+                <a:srgbClr val="990F3D"/>
+              </a:buClr>
+              <a:buFont typeface="Arial"/>
+              <a:buChar char="•"/>
+            </a:pPr>
+            <a:r>
+              <a:rPr lang="es-ES" sz="1500" dirty="0">
+                <a:solidFill>
+                  <a:srgbClr val="2F2B28"/>
+                </a:solidFill>
+              </a:rPr>
+              <a:t>Phase 3: no relevant bias, medium residual risk accepted by the right body (P12), supplier assessed (P14). G3, Proceed.</a:t>
+            </a:r>
+          </a:p>
+          <a:p>
+            <a:pPr marL="285750" indent="-285750">
+              <a:spcAft>
+                <a:spcPts val="400"/>
+              </a:spcAft>
+              <a:buClr>
+                <a:srgbClr val="990F3D"/>
+              </a:buClr>
+              <a:buFont typeface="Arial"/>
+              <a:buChar char="•"/>
+            </a:pPr>
+            <a:r>
+              <a:rPr lang="es-ES" sz="1500" dirty="0">
+                <a:solidFill>
+                  <a:srgbClr val="2F2B28"/>
+                </a:solidFill>
+              </a:rPr>
+              <a:t>Phases 4 and 5: mandatory human oversight above a severity level (P17), tested rollback (P19) and go-live sign-off (P23).</a:t>
+            </a:r>
+          </a:p>
+          <a:p>
+            <a:pPr marL="285750" indent="-285750">
+              <a:spcAft>
+                <a:spcPts val="400"/>
+              </a:spcAft>
+              <a:buClr>
+                <a:srgbClr val="990F3D"/>
+              </a:buClr>
+              <a:buFont typeface="Arial"/>
+              <a:buChar char="•"/>
+            </a:pPr>
+            <a:r>
+              <a:rPr lang="es-ES" sz="1500" dirty="0">
+                <a:solidFill>
+                  <a:srgbClr val="2F2B28"/>
+                </a:solidFill>
+              </a:rPr>
+              <a:t>Phase 6: fourteen months in use. Finance validates €1.1M a year (P28); released capacity was reassigned to complex incidents.</a:t>
+            </a:r>
+          </a:p>
+          <a:p>
+            <a:pPr marL="285750" indent="-285750">
+              <a:spcAft>
+                <a:spcPts val="400"/>
+              </a:spcAft>
+              <a:buClr>
+                <a:srgbClr val="990F3D"/>
+              </a:buClr>
+              <a:buFont typeface="Arial"/>
+              <a:buChar char="•"/>
+            </a:pPr>
+            <a:r>
+              <a:rPr lang="es-ES" sz="1500" dirty="0">
+                <a:solidFill>
+                  <a:srgbClr val="2F2B28"/>
+                </a:solidFill>
+              </a:rPr>
+              <a:t>In the funnel it sits under "In use"; on the dashboard it adds to annual net because its value is validated, not declared.</a:t>
+            </a:r>
+          </a:p>
+        </p:txBody>
+      </p:sp>
+      <p:sp>
+        <p:nvSpPr>
+          <p:cNvPr id="171" name="Caja 171"/>
           <p:cNvSpPr/>
           <p:nvPr/>
         </p:nvSpPr>
         <p:spPr>
           <a:xfrm>
-            <a:off x="681000" y="2350000"/>
-            <a:ext cx="1240000" cy="1500000"/>
+            <a:off x="609600" y="5600000"/>
+            <a:ext cx="10972800" cy="900000"/>
           </a:xfrm>
           <a:prstGeom prst="roundRect">
             <a:avLst>
@@ -3245,693 +3371,12 @@
           <a:p>
             <a:pPr algn="ctr"/>
             <a:r>
-              <a:rPr lang="es-ES" sz="2400" b="1" dirty="0">
+              <a:rPr lang="es-ES" sz="2100" b="1" dirty="0">
                 <a:solidFill>
                   <a:srgbClr val="FFFFFF"/>
                 </a:solidFill>
               </a:rPr>
-              <a:t>F0</a:t>
-            </a:r>
-          </a:p>
-          <a:p>
-            <a:pPr algn="ctr"/>
-            <a:r>
-              <a:rPr lang="es-ES" sz="1050" dirty="0">
-                <a:solidFill>
-                  <a:srgbClr val="FFFFFF"/>
-                </a:solidFill>
-              </a:rPr>
-              <a:t>Context and constraints</a:t>
-            </a:r>
-          </a:p>
-        </p:txBody>
-      </p:sp>
-      <p:sp>
-        <p:nvSpPr>
-          <p:cNvPr id="169" name="Texto 169"/>
-          <p:cNvSpPr txBox="1"/>
-          <p:nvPr/>
-        </p:nvSpPr>
-        <p:spPr>
-          <a:xfrm>
-            <a:off x="1591000" y="3900000"/>
-            <a:ext cx="800000" cy="300000"/>
-          </a:xfrm>
-          <a:prstGeom prst="rect">
-            <a:avLst/>
-          </a:prstGeom>
-          <a:noFill/>
-        </p:spPr>
-        <p:txBody>
-          <a:bodyPr wrap="square" anchor="t" lIns="45720" rIns="45720">
-            <a:noAutofit/>
-          </a:bodyPr>
-          <a:lstStyle/>
-          <a:p>
-            <a:pPr algn="ctr"/>
-            <a:r>
-              <a:rPr lang="es-ES" sz="1200" b="1" dirty="0">
-                <a:solidFill>
-                  <a:srgbClr val="990F3D"/>
-                </a:solidFill>
-              </a:rPr>
-              <a:t>G0</a:t>
-            </a:r>
-          </a:p>
-        </p:txBody>
-      </p:sp>
-      <p:sp>
-        <p:nvSpPr>
-          <p:cNvPr id="170" name="Caja 170"/>
-          <p:cNvSpPr/>
-          <p:nvPr/>
-        </p:nvSpPr>
-        <p:spPr>
-          <a:xfrm>
-            <a:off x="2051000" y="2350000"/>
-            <a:ext cx="1240000" cy="1500000"/>
-          </a:xfrm>
-          <a:prstGeom prst="roundRect">
-            <a:avLst>
-              <a:gd name="adj" fmla="val 6000"/>
-            </a:avLst>
-          </a:prstGeom>
-          <a:solidFill>
-            <a:srgbClr val="0D7680"/>
-          </a:solidFill>
-          <a:ln>
-            <a:noFill/>
-          </a:ln>
-        </p:spPr>
-        <p:txBody>
-          <a:bodyPr wrap="square" anchor="ctr" lIns="45720" rIns="45720">
-            <a:noAutofit/>
-          </a:bodyPr>
-          <a:lstStyle/>
-          <a:p>
-            <a:pPr algn="ctr"/>
-            <a:r>
-              <a:rPr lang="es-ES" sz="2400" b="1" dirty="0">
-                <a:solidFill>
-                  <a:srgbClr val="FFFFFF"/>
-                </a:solidFill>
-              </a:rPr>
-              <a:t>F1</a:t>
-            </a:r>
-          </a:p>
-          <a:p>
-            <a:pPr algn="ctr"/>
-            <a:r>
-              <a:rPr lang="es-ES" sz="1050" dirty="0">
-                <a:solidFill>
-                  <a:srgbClr val="FFFFFF"/>
-                </a:solidFill>
-              </a:rPr>
-              <a:t>Opportunity discovery</a:t>
-            </a:r>
-          </a:p>
-        </p:txBody>
-      </p:sp>
-      <p:sp>
-        <p:nvSpPr>
-          <p:cNvPr id="171" name="Texto 171"/>
-          <p:cNvSpPr txBox="1"/>
-          <p:nvPr/>
-        </p:nvSpPr>
-        <p:spPr>
-          <a:xfrm>
-            <a:off x="2961000" y="3900000"/>
-            <a:ext cx="800000" cy="300000"/>
-          </a:xfrm>
-          <a:prstGeom prst="rect">
-            <a:avLst/>
-          </a:prstGeom>
-          <a:noFill/>
-        </p:spPr>
-        <p:txBody>
-          <a:bodyPr wrap="square" anchor="t" lIns="45720" rIns="45720">
-            <a:noAutofit/>
-          </a:bodyPr>
-          <a:lstStyle/>
-          <a:p>
-            <a:pPr algn="ctr"/>
-            <a:r>
-              <a:rPr lang="es-ES" sz="1200" b="1" dirty="0">
-                <a:solidFill>
-                  <a:srgbClr val="990F3D"/>
-                </a:solidFill>
-              </a:rPr>
-              <a:t>G1</a:t>
-            </a:r>
-          </a:p>
-        </p:txBody>
-      </p:sp>
-      <p:sp>
-        <p:nvSpPr>
-          <p:cNvPr id="172" name="Caja 172"/>
-          <p:cNvSpPr/>
-          <p:nvPr/>
-        </p:nvSpPr>
-        <p:spPr>
-          <a:xfrm>
-            <a:off x="3421000" y="2350000"/>
-            <a:ext cx="1240000" cy="1500000"/>
-          </a:xfrm>
-          <a:prstGeom prst="roundRect">
-            <a:avLst>
-              <a:gd name="adj" fmla="val 6000"/>
-            </a:avLst>
-          </a:prstGeom>
-          <a:solidFill>
-            <a:srgbClr val="0D7680"/>
-          </a:solidFill>
-          <a:ln>
-            <a:noFill/>
-          </a:ln>
-        </p:spPr>
-        <p:txBody>
-          <a:bodyPr wrap="square" anchor="ctr" lIns="45720" rIns="45720">
-            <a:noAutofit/>
-          </a:bodyPr>
-          <a:lstStyle/>
-          <a:p>
-            <a:pPr algn="ctr"/>
-            <a:r>
-              <a:rPr lang="es-ES" sz="2400" b="1" dirty="0">
-                <a:solidFill>
-                  <a:srgbClr val="FFFFFF"/>
-                </a:solidFill>
-              </a:rPr>
-              <a:t>F2</a:t>
-            </a:r>
-          </a:p>
-          <a:p>
-            <a:pPr algn="ctr"/>
-            <a:r>
-              <a:rPr lang="es-ES" sz="1050" dirty="0">
-                <a:solidFill>
-                  <a:srgbClr val="FFFFFF"/>
-                </a:solidFill>
-              </a:rPr>
-              <a:t>Value hypothesis</a:t>
-            </a:r>
-          </a:p>
-        </p:txBody>
-      </p:sp>
-      <p:sp>
-        <p:nvSpPr>
-          <p:cNvPr id="173" name="Texto 173"/>
-          <p:cNvSpPr txBox="1"/>
-          <p:nvPr/>
-        </p:nvSpPr>
-        <p:spPr>
-          <a:xfrm>
-            <a:off x="4331000" y="3900000"/>
-            <a:ext cx="800000" cy="300000"/>
-          </a:xfrm>
-          <a:prstGeom prst="rect">
-            <a:avLst/>
-          </a:prstGeom>
-          <a:noFill/>
-        </p:spPr>
-        <p:txBody>
-          <a:bodyPr wrap="square" anchor="t" lIns="45720" rIns="45720">
-            <a:noAutofit/>
-          </a:bodyPr>
-          <a:lstStyle/>
-          <a:p>
-            <a:pPr algn="ctr"/>
-            <a:r>
-              <a:rPr lang="es-ES" sz="1200" b="1" dirty="0">
-                <a:solidFill>
-                  <a:srgbClr val="990F3D"/>
-                </a:solidFill>
-              </a:rPr>
-              <a:t>G2</a:t>
-            </a:r>
-          </a:p>
-        </p:txBody>
-      </p:sp>
-      <p:sp>
-        <p:nvSpPr>
-          <p:cNvPr id="174" name="Caja 174"/>
-          <p:cNvSpPr/>
-          <p:nvPr/>
-        </p:nvSpPr>
-        <p:spPr>
-          <a:xfrm>
-            <a:off x="4791000" y="2350000"/>
-            <a:ext cx="1240000" cy="1500000"/>
-          </a:xfrm>
-          <a:prstGeom prst="roundRect">
-            <a:avLst>
-              <a:gd name="adj" fmla="val 6000"/>
-            </a:avLst>
-          </a:prstGeom>
-          <a:solidFill>
-            <a:srgbClr val="0D7680"/>
-          </a:solidFill>
-          <a:ln>
-            <a:noFill/>
-          </a:ln>
-        </p:spPr>
-        <p:txBody>
-          <a:bodyPr wrap="square" anchor="ctr" lIns="45720" rIns="45720">
-            <a:noAutofit/>
-          </a:bodyPr>
-          <a:lstStyle/>
-          <a:p>
-            <a:pPr algn="ctr"/>
-            <a:r>
-              <a:rPr lang="es-ES" sz="2400" b="1" dirty="0">
-                <a:solidFill>
-                  <a:srgbClr val="FFFFFF"/>
-                </a:solidFill>
-              </a:rPr>
-              <a:t>F3</a:t>
-            </a:r>
-          </a:p>
-          <a:p>
-            <a:pPr algn="ctr"/>
-            <a:r>
-              <a:rPr lang="es-ES" sz="1050" dirty="0">
-                <a:solidFill>
-                  <a:srgbClr val="FFFFFF"/>
-                </a:solidFill>
-              </a:rPr>
-              <a:t>Feasibility and risk</a:t>
-            </a:r>
-          </a:p>
-        </p:txBody>
-      </p:sp>
-      <p:sp>
-        <p:nvSpPr>
-          <p:cNvPr id="175" name="Texto 175"/>
-          <p:cNvSpPr txBox="1"/>
-          <p:nvPr/>
-        </p:nvSpPr>
-        <p:spPr>
-          <a:xfrm>
-            <a:off x="5701000" y="3900000"/>
-            <a:ext cx="800000" cy="300000"/>
-          </a:xfrm>
-          <a:prstGeom prst="rect">
-            <a:avLst/>
-          </a:prstGeom>
-          <a:noFill/>
-        </p:spPr>
-        <p:txBody>
-          <a:bodyPr wrap="square" anchor="t" lIns="45720" rIns="45720">
-            <a:noAutofit/>
-          </a:bodyPr>
-          <a:lstStyle/>
-          <a:p>
-            <a:pPr algn="ctr"/>
-            <a:r>
-              <a:rPr lang="es-ES" sz="1200" b="1" dirty="0">
-                <a:solidFill>
-                  <a:srgbClr val="990F3D"/>
-                </a:solidFill>
-              </a:rPr>
-              <a:t>G3</a:t>
-            </a:r>
-          </a:p>
-        </p:txBody>
-      </p:sp>
-      <p:sp>
-        <p:nvSpPr>
-          <p:cNvPr id="176" name="Caja 176"/>
-          <p:cNvSpPr/>
-          <p:nvPr/>
-        </p:nvSpPr>
-        <p:spPr>
-          <a:xfrm>
-            <a:off x="6161000" y="2350000"/>
-            <a:ext cx="1240000" cy="1500000"/>
-          </a:xfrm>
-          <a:prstGeom prst="roundRect">
-            <a:avLst>
-              <a:gd name="adj" fmla="val 6000"/>
-            </a:avLst>
-          </a:prstGeom>
-          <a:solidFill>
-            <a:srgbClr val="0D7680"/>
-          </a:solidFill>
-          <a:ln>
-            <a:noFill/>
-          </a:ln>
-        </p:spPr>
-        <p:txBody>
-          <a:bodyPr wrap="square" anchor="ctr" lIns="45720" rIns="45720">
-            <a:noAutofit/>
-          </a:bodyPr>
-          <a:lstStyle/>
-          <a:p>
-            <a:pPr algn="ctr"/>
-            <a:r>
-              <a:rPr lang="es-ES" sz="2400" b="1" dirty="0">
-                <a:solidFill>
-                  <a:srgbClr val="FFFFFF"/>
-                </a:solidFill>
-              </a:rPr>
-              <a:t>F4</a:t>
-            </a:r>
-          </a:p>
-          <a:p>
-            <a:pPr algn="ctr"/>
-            <a:r>
-              <a:rPr lang="es-ES" sz="1050" dirty="0">
-                <a:solidFill>
-                  <a:srgbClr val="FFFFFF"/>
-                </a:solidFill>
-              </a:rPr>
-              <a:t>Solution design</a:t>
-            </a:r>
-          </a:p>
-        </p:txBody>
-      </p:sp>
-      <p:sp>
-        <p:nvSpPr>
-          <p:cNvPr id="177" name="Texto 177"/>
-          <p:cNvSpPr txBox="1"/>
-          <p:nvPr/>
-        </p:nvSpPr>
-        <p:spPr>
-          <a:xfrm>
-            <a:off x="7071000" y="3900000"/>
-            <a:ext cx="800000" cy="300000"/>
-          </a:xfrm>
-          <a:prstGeom prst="rect">
-            <a:avLst/>
-          </a:prstGeom>
-          <a:noFill/>
-        </p:spPr>
-        <p:txBody>
-          <a:bodyPr wrap="square" anchor="t" lIns="45720" rIns="45720">
-            <a:noAutofit/>
-          </a:bodyPr>
-          <a:lstStyle/>
-          <a:p>
-            <a:pPr algn="ctr"/>
-            <a:r>
-              <a:rPr lang="es-ES" sz="1200" b="1" dirty="0">
-                <a:solidFill>
-                  <a:srgbClr val="990F3D"/>
-                </a:solidFill>
-              </a:rPr>
-              <a:t>G4</a:t>
-            </a:r>
-          </a:p>
-        </p:txBody>
-      </p:sp>
-      <p:sp>
-        <p:nvSpPr>
-          <p:cNvPr id="178" name="Caja 178"/>
-          <p:cNvSpPr/>
-          <p:nvPr/>
-        </p:nvSpPr>
-        <p:spPr>
-          <a:xfrm>
-            <a:off x="7531000" y="2350000"/>
-            <a:ext cx="1240000" cy="1500000"/>
-          </a:xfrm>
-          <a:prstGeom prst="roundRect">
-            <a:avLst>
-              <a:gd name="adj" fmla="val 6000"/>
-            </a:avLst>
-          </a:prstGeom>
-          <a:solidFill>
-            <a:srgbClr val="0D7680"/>
-          </a:solidFill>
-          <a:ln>
-            <a:noFill/>
-          </a:ln>
-        </p:spPr>
-        <p:txBody>
-          <a:bodyPr wrap="square" anchor="ctr" lIns="45720" rIns="45720">
-            <a:noAutofit/>
-          </a:bodyPr>
-          <a:lstStyle/>
-          <a:p>
-            <a:pPr algn="ctr"/>
-            <a:r>
-              <a:rPr lang="es-ES" sz="2400" b="1" dirty="0">
-                <a:solidFill>
-                  <a:srgbClr val="FFFFFF"/>
-                </a:solidFill>
-              </a:rPr>
-              <a:t>F5</a:t>
-            </a:r>
-          </a:p>
-          <a:p>
-            <a:pPr algn="ctr"/>
-            <a:r>
-              <a:rPr lang="es-ES" sz="1050" dirty="0">
-                <a:solidFill>
-                  <a:srgbClr val="FFFFFF"/>
-                </a:solidFill>
-              </a:rPr>
-              <a:t>Delivery and validation</a:t>
-            </a:r>
-          </a:p>
-        </p:txBody>
-      </p:sp>
-      <p:sp>
-        <p:nvSpPr>
-          <p:cNvPr id="179" name="Texto 179"/>
-          <p:cNvSpPr txBox="1"/>
-          <p:nvPr/>
-        </p:nvSpPr>
-        <p:spPr>
-          <a:xfrm>
-            <a:off x="8441000" y="3900000"/>
-            <a:ext cx="800000" cy="300000"/>
-          </a:xfrm>
-          <a:prstGeom prst="rect">
-            <a:avLst/>
-          </a:prstGeom>
-          <a:noFill/>
-        </p:spPr>
-        <p:txBody>
-          <a:bodyPr wrap="square" anchor="t" lIns="45720" rIns="45720">
-            <a:noAutofit/>
-          </a:bodyPr>
-          <a:lstStyle/>
-          <a:p>
-            <a:pPr algn="ctr"/>
-            <a:r>
-              <a:rPr lang="es-ES" sz="1200" b="1" dirty="0">
-                <a:solidFill>
-                  <a:srgbClr val="990F3D"/>
-                </a:solidFill>
-              </a:rPr>
-              <a:t>G5</a:t>
-            </a:r>
-          </a:p>
-        </p:txBody>
-      </p:sp>
-      <p:sp>
-        <p:nvSpPr>
-          <p:cNvPr id="180" name="Caja 180"/>
-          <p:cNvSpPr/>
-          <p:nvPr/>
-        </p:nvSpPr>
-        <p:spPr>
-          <a:xfrm>
-            <a:off x="8901000" y="2350000"/>
-            <a:ext cx="1240000" cy="1500000"/>
-          </a:xfrm>
-          <a:prstGeom prst="roundRect">
-            <a:avLst>
-              <a:gd name="adj" fmla="val 6000"/>
-            </a:avLst>
-          </a:prstGeom>
-          <a:solidFill>
-            <a:srgbClr val="0D7680"/>
-          </a:solidFill>
-          <a:ln>
-            <a:noFill/>
-          </a:ln>
-        </p:spPr>
-        <p:txBody>
-          <a:bodyPr wrap="square" anchor="ctr" lIns="45720" rIns="45720">
-            <a:noAutofit/>
-          </a:bodyPr>
-          <a:lstStyle/>
-          <a:p>
-            <a:pPr algn="ctr"/>
-            <a:r>
-              <a:rPr lang="es-ES" sz="2400" b="1" dirty="0">
-                <a:solidFill>
-                  <a:srgbClr val="FFFFFF"/>
-                </a:solidFill>
-              </a:rPr>
-              <a:t>F6</a:t>
-            </a:r>
-          </a:p>
-          <a:p>
-            <a:pPr algn="ctr"/>
-            <a:r>
-              <a:rPr lang="es-ES" sz="1050" dirty="0">
-                <a:solidFill>
-                  <a:srgbClr val="FFFFFF"/>
-                </a:solidFill>
-              </a:rPr>
-              <a:t>Operation and governance</a:t>
-            </a:r>
-          </a:p>
-        </p:txBody>
-      </p:sp>
-      <p:sp>
-        <p:nvSpPr>
-          <p:cNvPr id="181" name="Texto 181"/>
-          <p:cNvSpPr txBox="1"/>
-          <p:nvPr/>
-        </p:nvSpPr>
-        <p:spPr>
-          <a:xfrm>
-            <a:off x="9811000" y="3900000"/>
-            <a:ext cx="800000" cy="300000"/>
-          </a:xfrm>
-          <a:prstGeom prst="rect">
-            <a:avLst/>
-          </a:prstGeom>
-          <a:noFill/>
-        </p:spPr>
-        <p:txBody>
-          <a:bodyPr wrap="square" anchor="t" lIns="45720" rIns="45720">
-            <a:noAutofit/>
-          </a:bodyPr>
-          <a:lstStyle/>
-          <a:p>
-            <a:pPr algn="ctr"/>
-            <a:r>
-              <a:rPr lang="es-ES" sz="1200" b="1" dirty="0">
-                <a:solidFill>
-                  <a:srgbClr val="990F3D"/>
-                </a:solidFill>
-              </a:rPr>
-              <a:t>R6</a:t>
-            </a:r>
-          </a:p>
-        </p:txBody>
-      </p:sp>
-      <p:sp>
-        <p:nvSpPr>
-          <p:cNvPr id="182" name="Caja 182"/>
-          <p:cNvSpPr/>
-          <p:nvPr/>
-        </p:nvSpPr>
-        <p:spPr>
-          <a:xfrm>
-            <a:off x="10271000" y="2350000"/>
-            <a:ext cx="1240000" cy="1500000"/>
-          </a:xfrm>
-          <a:prstGeom prst="roundRect">
-            <a:avLst>
-              <a:gd name="adj" fmla="val 6000"/>
-            </a:avLst>
-          </a:prstGeom>
-          <a:solidFill>
-            <a:srgbClr val="C9A78D"/>
-          </a:solidFill>
-          <a:ln>
-            <a:noFill/>
-          </a:ln>
-        </p:spPr>
-        <p:txBody>
-          <a:bodyPr wrap="square" anchor="ctr" lIns="45720" rIns="45720">
-            <a:noAutofit/>
-          </a:bodyPr>
-          <a:lstStyle/>
-          <a:p>
-            <a:pPr algn="ctr"/>
-            <a:r>
-              <a:rPr lang="es-ES" sz="2400" b="1" dirty="0">
-                <a:solidFill>
-                  <a:srgbClr val="564D47"/>
-                </a:solidFill>
-              </a:rPr>
-              <a:t>F7</a:t>
-            </a:r>
-          </a:p>
-          <a:p>
-            <a:pPr algn="ctr"/>
-            <a:r>
-              <a:rPr lang="es-ES" sz="1050" dirty="0">
-                <a:solidFill>
-                  <a:srgbClr val="564D47"/>
-                </a:solidFill>
-              </a:rPr>
-              <a:t>Evolution or retirement</a:t>
-            </a:r>
-          </a:p>
-        </p:txBody>
-      </p:sp>
-      <p:sp>
-        <p:nvSpPr>
-          <p:cNvPr id="183" name="Texto 183"/>
-          <p:cNvSpPr txBox="1"/>
-          <p:nvPr/>
-        </p:nvSpPr>
-        <p:spPr>
-          <a:xfrm>
-            <a:off x="11181000" y="3900000"/>
-            <a:ext cx="800000" cy="300000"/>
-          </a:xfrm>
-          <a:prstGeom prst="rect">
-            <a:avLst/>
-          </a:prstGeom>
-          <a:noFill/>
-        </p:spPr>
-        <p:txBody>
-          <a:bodyPr wrap="square" anchor="t" lIns="45720" rIns="45720">
-            <a:noAutofit/>
-          </a:bodyPr>
-          <a:lstStyle/>
-          <a:p>
-            <a:pPr algn="ctr"/>
-            <a:r>
-              <a:rPr lang="es-ES" sz="1200" b="1" dirty="0">
-                <a:solidFill>
-                  <a:srgbClr val="990F3D"/>
-                </a:solidFill>
-              </a:rPr>
-              <a:t>G7</a:t>
-            </a:r>
-          </a:p>
-        </p:txBody>
-      </p:sp>
-      <p:sp>
-        <p:nvSpPr>
-          <p:cNvPr id="184" name="Texto 184"/>
-          <p:cNvSpPr txBox="1"/>
-          <p:nvPr/>
-        </p:nvSpPr>
-        <p:spPr>
-          <a:xfrm>
-            <a:off x="609600" y="4430000"/>
-            <a:ext cx="10972800" cy="600000"/>
-          </a:xfrm>
-          <a:prstGeom prst="rect">
-            <a:avLst/>
-          </a:prstGeom>
-          <a:noFill/>
-        </p:spPr>
-        <p:txBody>
-          <a:bodyPr wrap="square" anchor="t" lIns="45720" rIns="45720">
-            <a:noAutofit/>
-          </a:bodyPr>
-          <a:lstStyle/>
-          <a:p>
-            <a:pPr algn="ctr"/>
-            <a:r>
-              <a:rPr lang="es-ES" sz="2200" b="1" dirty="0">
-                <a:solidFill>
-                  <a:srgbClr val="0D7680"/>
-                </a:solidFill>
-              </a:rPr>
-              <a:t>IN USE · each R6 confirms it keeps delivering value under control</a:t>
+              <a:t>IN PRODUCTION · €1.1M OF VALIDATED ANNUAL RETURN · QUARTERLY R6</a:t>
             </a:r>
           </a:p>
         </p:txBody>
@@ -3971,7 +3416,7 @@
       </p:grpSpPr>
       <p:sp>
         <p:nvSpPr>
-          <p:cNvPr id="190" name="Marca"/>
+          <p:cNvPr id="192" name="Marca"/>
           <p:cNvSpPr/>
           <p:nvPr/>
         </p:nvSpPr>
@@ -3995,7 +3440,7 @@
       </p:sp>
       <p:sp>
         <p:nvSpPr>
-          <p:cNvPr id="191" name="Texto 191"/>
+          <p:cNvPr id="193" name="Texto 193"/>
           <p:cNvSpPr txBox="1"/>
           <p:nvPr/>
         </p:nvSpPr>
@@ -4029,7 +3474,7 @@
       </p:sp>
       <p:sp>
         <p:nvSpPr>
-          <p:cNvPr id="192" name="Texto 192"/>
+          <p:cNvPr id="194" name="Texto 194"/>
           <p:cNvSpPr txBox="1"/>
           <p:nvPr/>
         </p:nvSpPr>
@@ -4056,21 +3501,21 @@
                   <a:srgbClr val="990F3D"/>
                 </a:solidFill>
               </a:rPr>
-              <a:t>How value is measured</a:t>
-            </a:r>
-          </a:p>
-        </p:txBody>
-      </p:sp>
-      <p:sp>
-        <p:nvSpPr>
-          <p:cNvPr id="189" name="Texto 189"/>
-          <p:cNvSpPr txBox="1"/>
-          <p:nvPr/>
-        </p:nvSpPr>
-        <p:spPr>
-          <a:xfrm>
-            <a:off x="609600" y="1750000"/>
-            <a:ext cx="10972800" cy="4400000"/>
+              <a:t>Initiative 2, on the lifecycle</a:t>
+            </a:r>
+          </a:p>
+        </p:txBody>
+      </p:sp>
+      <p:sp>
+        <p:nvSpPr>
+          <p:cNvPr id="195" name="Texto 195"/>
+          <p:cNvSpPr txBox="1"/>
+          <p:nvPr/>
+        </p:nvSpPr>
+        <p:spPr>
+          <a:xfrm>
+            <a:off x="609600" y="1330000"/>
+            <a:ext cx="10972800" cy="450000"/>
           </a:xfrm>
           <a:prstGeom prst="rect">
             <a:avLst/>
@@ -4083,103 +3528,736 @@
           </a:bodyPr>
           <a:lstStyle/>
           <a:p>
-            <a:pPr marL="285750" indent="-285750">
-              <a:spcAft>
-                <a:spcPts val="400"/>
-              </a:spcAft>
-              <a:buClr>
-                <a:srgbClr val="990F3D"/>
-              </a:buClr>
-              <a:buFont typeface="Arial"/>
-              <a:buChar char="•"/>
-            </a:pPr>
-            <a:r>
-              <a:rPr lang="es-ES" sz="1800" dirty="0">
-                <a:solidFill>
-                  <a:srgbClr val="2F2B28"/>
-                </a:solidFill>
-              </a:rPr>
-              <a:t>Every amount carries a formula and a status: validated (finance), declared (the team) or estimated.</a:t>
-            </a:r>
-          </a:p>
-          <a:p>
-            <a:pPr marL="285750" indent="-285750">
-              <a:spcAft>
-                <a:spcPts val="400"/>
-              </a:spcAft>
-              <a:buClr>
-                <a:srgbClr val="990F3D"/>
-              </a:buClr>
-              <a:buFont typeface="Arial"/>
-              <a:buChar char="•"/>
-            </a:pPr>
-            <a:r>
-              <a:rPr lang="es-ES" sz="1800" dirty="0">
-                <a:solidFill>
-                  <a:srgbClr val="2F2B28"/>
-                </a:solidFill>
-              </a:rPr>
-              <a:t>Released hours are not savings until they are materialised: a cost goes down or they are reassigned to a valuable activity.</a:t>
-            </a:r>
-          </a:p>
-          <a:p>
-            <a:pPr marL="285750" indent="-285750">
-              <a:spcAft>
-                <a:spcPts val="400"/>
-              </a:spcAft>
-              <a:buClr>
-                <a:srgbClr val="990F3D"/>
-              </a:buClr>
-              <a:buFont typeface="Arial"/>
-              <a:buChar char="•"/>
-            </a:pPr>
-            <a:r>
-              <a:rPr lang="es-ES" sz="1800" dirty="0">
-                <a:solidFill>
-                  <a:srgbClr val="2F2B28"/>
-                </a:solidFill>
-              </a:rPr>
-              <a:t>Cost is complete: build, consumption, operation, human oversight and retirement.</a:t>
-            </a:r>
-          </a:p>
-          <a:p>
-            <a:pPr marL="285750" indent="-285750">
-              <a:spcAft>
-                <a:spcPts val="400"/>
-              </a:spcAft>
-              <a:buClr>
-                <a:srgbClr val="990F3D"/>
-              </a:buClr>
-              <a:buFont typeface="Arial"/>
-              <a:buChar char="•"/>
-            </a:pPr>
-            <a:r>
-              <a:rPr lang="es-ES" sz="1800" dirty="0">
-                <a:solidFill>
-                  <a:srgbClr val="2F2B28"/>
-                </a:solidFill>
-              </a:rPr>
-              <a:t>The transformation index uses eight evidence signals to tell transformation apart from mere efficiency.</a:t>
-            </a:r>
-          </a:p>
-          <a:p>
-            <a:pPr marL="285750" indent="-285750">
-              <a:spcAft>
-                <a:spcPts val="400"/>
-              </a:spcAft>
-              <a:buClr>
-                <a:srgbClr val="990F3D"/>
-              </a:buClr>
-              <a:buFont typeface="Arial"/>
-              <a:buChar char="•"/>
-            </a:pPr>
-            <a:r>
-              <a:rPr lang="es-ES" sz="1800" dirty="0">
-                <a:solidFill>
-                  <a:srgbClr val="2F2B28"/>
-                </a:solidFill>
-              </a:rPr>
-              <a:t>Ten measurement rules (document 40). No figure enters the portfolio net without its status.</a:t>
+            <a:pPr algn="l"/>
+            <a:r>
+              <a:rPr lang="es-ES" sz="1500" dirty="0">
+                <a:solidFill>
+                  <a:srgbClr val="564D47"/>
+                </a:solidFill>
+              </a:rPr>
+              <a:t>It went through phases 0 to 6 and remains in use; phase 7 will come with G7</a:t>
+            </a:r>
+          </a:p>
+        </p:txBody>
+      </p:sp>
+      <p:sp>
+        <p:nvSpPr>
+          <p:cNvPr id="175" name="Caja 175"/>
+          <p:cNvSpPr/>
+          <p:nvPr/>
+        </p:nvSpPr>
+        <p:spPr>
+          <a:xfrm>
+            <a:off x="681000" y="2350000"/>
+            <a:ext cx="1240000" cy="1500000"/>
+          </a:xfrm>
+          <a:prstGeom prst="roundRect">
+            <a:avLst>
+              <a:gd name="adj" fmla="val 6000"/>
+            </a:avLst>
+          </a:prstGeom>
+          <a:solidFill>
+            <a:srgbClr val="0D7680"/>
+          </a:solidFill>
+          <a:ln>
+            <a:noFill/>
+          </a:ln>
+        </p:spPr>
+        <p:txBody>
+          <a:bodyPr wrap="square" anchor="ctr" lIns="45720" rIns="45720">
+            <a:noAutofit/>
+          </a:bodyPr>
+          <a:lstStyle/>
+          <a:p>
+            <a:pPr algn="ctr"/>
+            <a:r>
+              <a:rPr lang="es-ES" sz="2400" b="1" dirty="0">
+                <a:solidFill>
+                  <a:srgbClr val="FFFFFF"/>
+                </a:solidFill>
+              </a:rPr>
+              <a:t>F0</a:t>
+            </a:r>
+          </a:p>
+          <a:p>
+            <a:pPr algn="ctr"/>
+            <a:r>
+              <a:rPr lang="es-ES" sz="1050" dirty="0">
+                <a:solidFill>
+                  <a:srgbClr val="FFFFFF"/>
+                </a:solidFill>
+              </a:rPr>
+              <a:t>Context and constraints</a:t>
+            </a:r>
+          </a:p>
+        </p:txBody>
+      </p:sp>
+      <p:sp>
+        <p:nvSpPr>
+          <p:cNvPr id="176" name="Texto 176"/>
+          <p:cNvSpPr txBox="1"/>
+          <p:nvPr/>
+        </p:nvSpPr>
+        <p:spPr>
+          <a:xfrm>
+            <a:off x="1591000" y="3900000"/>
+            <a:ext cx="800000" cy="300000"/>
+          </a:xfrm>
+          <a:prstGeom prst="rect">
+            <a:avLst/>
+          </a:prstGeom>
+          <a:noFill/>
+        </p:spPr>
+        <p:txBody>
+          <a:bodyPr wrap="square" anchor="t" lIns="45720" rIns="45720">
+            <a:noAutofit/>
+          </a:bodyPr>
+          <a:lstStyle/>
+          <a:p>
+            <a:pPr algn="ctr"/>
+            <a:r>
+              <a:rPr lang="es-ES" sz="1200" b="1" dirty="0">
+                <a:solidFill>
+                  <a:srgbClr val="990F3D"/>
+                </a:solidFill>
+              </a:rPr>
+              <a:t>G0</a:t>
+            </a:r>
+          </a:p>
+        </p:txBody>
+      </p:sp>
+      <p:sp>
+        <p:nvSpPr>
+          <p:cNvPr id="177" name="Caja 177"/>
+          <p:cNvSpPr/>
+          <p:nvPr/>
+        </p:nvSpPr>
+        <p:spPr>
+          <a:xfrm>
+            <a:off x="2051000" y="2350000"/>
+            <a:ext cx="1240000" cy="1500000"/>
+          </a:xfrm>
+          <a:prstGeom prst="roundRect">
+            <a:avLst>
+              <a:gd name="adj" fmla="val 6000"/>
+            </a:avLst>
+          </a:prstGeom>
+          <a:solidFill>
+            <a:srgbClr val="0D7680"/>
+          </a:solidFill>
+          <a:ln>
+            <a:noFill/>
+          </a:ln>
+        </p:spPr>
+        <p:txBody>
+          <a:bodyPr wrap="square" anchor="ctr" lIns="45720" rIns="45720">
+            <a:noAutofit/>
+          </a:bodyPr>
+          <a:lstStyle/>
+          <a:p>
+            <a:pPr algn="ctr"/>
+            <a:r>
+              <a:rPr lang="es-ES" sz="2400" b="1" dirty="0">
+                <a:solidFill>
+                  <a:srgbClr val="FFFFFF"/>
+                </a:solidFill>
+              </a:rPr>
+              <a:t>F1</a:t>
+            </a:r>
+          </a:p>
+          <a:p>
+            <a:pPr algn="ctr"/>
+            <a:r>
+              <a:rPr lang="es-ES" sz="1050" dirty="0">
+                <a:solidFill>
+                  <a:srgbClr val="FFFFFF"/>
+                </a:solidFill>
+              </a:rPr>
+              <a:t>Opportunity discovery</a:t>
+            </a:r>
+          </a:p>
+        </p:txBody>
+      </p:sp>
+      <p:sp>
+        <p:nvSpPr>
+          <p:cNvPr id="178" name="Texto 178"/>
+          <p:cNvSpPr txBox="1"/>
+          <p:nvPr/>
+        </p:nvSpPr>
+        <p:spPr>
+          <a:xfrm>
+            <a:off x="2961000" y="3900000"/>
+            <a:ext cx="800000" cy="300000"/>
+          </a:xfrm>
+          <a:prstGeom prst="rect">
+            <a:avLst/>
+          </a:prstGeom>
+          <a:noFill/>
+        </p:spPr>
+        <p:txBody>
+          <a:bodyPr wrap="square" anchor="t" lIns="45720" rIns="45720">
+            <a:noAutofit/>
+          </a:bodyPr>
+          <a:lstStyle/>
+          <a:p>
+            <a:pPr algn="ctr"/>
+            <a:r>
+              <a:rPr lang="es-ES" sz="1200" b="1" dirty="0">
+                <a:solidFill>
+                  <a:srgbClr val="990F3D"/>
+                </a:solidFill>
+              </a:rPr>
+              <a:t>G1</a:t>
+            </a:r>
+          </a:p>
+        </p:txBody>
+      </p:sp>
+      <p:sp>
+        <p:nvSpPr>
+          <p:cNvPr id="179" name="Caja 179"/>
+          <p:cNvSpPr/>
+          <p:nvPr/>
+        </p:nvSpPr>
+        <p:spPr>
+          <a:xfrm>
+            <a:off x="3421000" y="2350000"/>
+            <a:ext cx="1240000" cy="1500000"/>
+          </a:xfrm>
+          <a:prstGeom prst="roundRect">
+            <a:avLst>
+              <a:gd name="adj" fmla="val 6000"/>
+            </a:avLst>
+          </a:prstGeom>
+          <a:solidFill>
+            <a:srgbClr val="0D7680"/>
+          </a:solidFill>
+          <a:ln>
+            <a:noFill/>
+          </a:ln>
+        </p:spPr>
+        <p:txBody>
+          <a:bodyPr wrap="square" anchor="ctr" lIns="45720" rIns="45720">
+            <a:noAutofit/>
+          </a:bodyPr>
+          <a:lstStyle/>
+          <a:p>
+            <a:pPr algn="ctr"/>
+            <a:r>
+              <a:rPr lang="es-ES" sz="2400" b="1" dirty="0">
+                <a:solidFill>
+                  <a:srgbClr val="FFFFFF"/>
+                </a:solidFill>
+              </a:rPr>
+              <a:t>F2</a:t>
+            </a:r>
+          </a:p>
+          <a:p>
+            <a:pPr algn="ctr"/>
+            <a:r>
+              <a:rPr lang="es-ES" sz="1050" dirty="0">
+                <a:solidFill>
+                  <a:srgbClr val="FFFFFF"/>
+                </a:solidFill>
+              </a:rPr>
+              <a:t>Value hypothesis</a:t>
+            </a:r>
+          </a:p>
+        </p:txBody>
+      </p:sp>
+      <p:sp>
+        <p:nvSpPr>
+          <p:cNvPr id="180" name="Texto 180"/>
+          <p:cNvSpPr txBox="1"/>
+          <p:nvPr/>
+        </p:nvSpPr>
+        <p:spPr>
+          <a:xfrm>
+            <a:off x="4331000" y="3900000"/>
+            <a:ext cx="800000" cy="300000"/>
+          </a:xfrm>
+          <a:prstGeom prst="rect">
+            <a:avLst/>
+          </a:prstGeom>
+          <a:noFill/>
+        </p:spPr>
+        <p:txBody>
+          <a:bodyPr wrap="square" anchor="t" lIns="45720" rIns="45720">
+            <a:noAutofit/>
+          </a:bodyPr>
+          <a:lstStyle/>
+          <a:p>
+            <a:pPr algn="ctr"/>
+            <a:r>
+              <a:rPr lang="es-ES" sz="1200" b="1" dirty="0">
+                <a:solidFill>
+                  <a:srgbClr val="990F3D"/>
+                </a:solidFill>
+              </a:rPr>
+              <a:t>G2</a:t>
+            </a:r>
+          </a:p>
+        </p:txBody>
+      </p:sp>
+      <p:sp>
+        <p:nvSpPr>
+          <p:cNvPr id="181" name="Caja 181"/>
+          <p:cNvSpPr/>
+          <p:nvPr/>
+        </p:nvSpPr>
+        <p:spPr>
+          <a:xfrm>
+            <a:off x="4791000" y="2350000"/>
+            <a:ext cx="1240000" cy="1500000"/>
+          </a:xfrm>
+          <a:prstGeom prst="roundRect">
+            <a:avLst>
+              <a:gd name="adj" fmla="val 6000"/>
+            </a:avLst>
+          </a:prstGeom>
+          <a:solidFill>
+            <a:srgbClr val="0D7680"/>
+          </a:solidFill>
+          <a:ln>
+            <a:noFill/>
+          </a:ln>
+        </p:spPr>
+        <p:txBody>
+          <a:bodyPr wrap="square" anchor="ctr" lIns="45720" rIns="45720">
+            <a:noAutofit/>
+          </a:bodyPr>
+          <a:lstStyle/>
+          <a:p>
+            <a:pPr algn="ctr"/>
+            <a:r>
+              <a:rPr lang="es-ES" sz="2400" b="1" dirty="0">
+                <a:solidFill>
+                  <a:srgbClr val="FFFFFF"/>
+                </a:solidFill>
+              </a:rPr>
+              <a:t>F3</a:t>
+            </a:r>
+          </a:p>
+          <a:p>
+            <a:pPr algn="ctr"/>
+            <a:r>
+              <a:rPr lang="es-ES" sz="1050" dirty="0">
+                <a:solidFill>
+                  <a:srgbClr val="FFFFFF"/>
+                </a:solidFill>
+              </a:rPr>
+              <a:t>Feasibility and risk</a:t>
+            </a:r>
+          </a:p>
+        </p:txBody>
+      </p:sp>
+      <p:sp>
+        <p:nvSpPr>
+          <p:cNvPr id="182" name="Texto 182"/>
+          <p:cNvSpPr txBox="1"/>
+          <p:nvPr/>
+        </p:nvSpPr>
+        <p:spPr>
+          <a:xfrm>
+            <a:off x="5701000" y="3900000"/>
+            <a:ext cx="800000" cy="300000"/>
+          </a:xfrm>
+          <a:prstGeom prst="rect">
+            <a:avLst/>
+          </a:prstGeom>
+          <a:noFill/>
+        </p:spPr>
+        <p:txBody>
+          <a:bodyPr wrap="square" anchor="t" lIns="45720" rIns="45720">
+            <a:noAutofit/>
+          </a:bodyPr>
+          <a:lstStyle/>
+          <a:p>
+            <a:pPr algn="ctr"/>
+            <a:r>
+              <a:rPr lang="es-ES" sz="1200" b="1" dirty="0">
+                <a:solidFill>
+                  <a:srgbClr val="990F3D"/>
+                </a:solidFill>
+              </a:rPr>
+              <a:t>G3</a:t>
+            </a:r>
+          </a:p>
+        </p:txBody>
+      </p:sp>
+      <p:sp>
+        <p:nvSpPr>
+          <p:cNvPr id="183" name="Caja 183"/>
+          <p:cNvSpPr/>
+          <p:nvPr/>
+        </p:nvSpPr>
+        <p:spPr>
+          <a:xfrm>
+            <a:off x="6161000" y="2350000"/>
+            <a:ext cx="1240000" cy="1500000"/>
+          </a:xfrm>
+          <a:prstGeom prst="roundRect">
+            <a:avLst>
+              <a:gd name="adj" fmla="val 6000"/>
+            </a:avLst>
+          </a:prstGeom>
+          <a:solidFill>
+            <a:srgbClr val="0D7680"/>
+          </a:solidFill>
+          <a:ln>
+            <a:noFill/>
+          </a:ln>
+        </p:spPr>
+        <p:txBody>
+          <a:bodyPr wrap="square" anchor="ctr" lIns="45720" rIns="45720">
+            <a:noAutofit/>
+          </a:bodyPr>
+          <a:lstStyle/>
+          <a:p>
+            <a:pPr algn="ctr"/>
+            <a:r>
+              <a:rPr lang="es-ES" sz="2400" b="1" dirty="0">
+                <a:solidFill>
+                  <a:srgbClr val="FFFFFF"/>
+                </a:solidFill>
+              </a:rPr>
+              <a:t>F4</a:t>
+            </a:r>
+          </a:p>
+          <a:p>
+            <a:pPr algn="ctr"/>
+            <a:r>
+              <a:rPr lang="es-ES" sz="1050" dirty="0">
+                <a:solidFill>
+                  <a:srgbClr val="FFFFFF"/>
+                </a:solidFill>
+              </a:rPr>
+              <a:t>Solution design</a:t>
+            </a:r>
+          </a:p>
+        </p:txBody>
+      </p:sp>
+      <p:sp>
+        <p:nvSpPr>
+          <p:cNvPr id="184" name="Texto 184"/>
+          <p:cNvSpPr txBox="1"/>
+          <p:nvPr/>
+        </p:nvSpPr>
+        <p:spPr>
+          <a:xfrm>
+            <a:off x="7071000" y="3900000"/>
+            <a:ext cx="800000" cy="300000"/>
+          </a:xfrm>
+          <a:prstGeom prst="rect">
+            <a:avLst/>
+          </a:prstGeom>
+          <a:noFill/>
+        </p:spPr>
+        <p:txBody>
+          <a:bodyPr wrap="square" anchor="t" lIns="45720" rIns="45720">
+            <a:noAutofit/>
+          </a:bodyPr>
+          <a:lstStyle/>
+          <a:p>
+            <a:pPr algn="ctr"/>
+            <a:r>
+              <a:rPr lang="es-ES" sz="1200" b="1" dirty="0">
+                <a:solidFill>
+                  <a:srgbClr val="990F3D"/>
+                </a:solidFill>
+              </a:rPr>
+              <a:t>G4</a:t>
+            </a:r>
+          </a:p>
+        </p:txBody>
+      </p:sp>
+      <p:sp>
+        <p:nvSpPr>
+          <p:cNvPr id="185" name="Caja 185"/>
+          <p:cNvSpPr/>
+          <p:nvPr/>
+        </p:nvSpPr>
+        <p:spPr>
+          <a:xfrm>
+            <a:off x="7531000" y="2350000"/>
+            <a:ext cx="1240000" cy="1500000"/>
+          </a:xfrm>
+          <a:prstGeom prst="roundRect">
+            <a:avLst>
+              <a:gd name="adj" fmla="val 6000"/>
+            </a:avLst>
+          </a:prstGeom>
+          <a:solidFill>
+            <a:srgbClr val="0D7680"/>
+          </a:solidFill>
+          <a:ln>
+            <a:noFill/>
+          </a:ln>
+        </p:spPr>
+        <p:txBody>
+          <a:bodyPr wrap="square" anchor="ctr" lIns="45720" rIns="45720">
+            <a:noAutofit/>
+          </a:bodyPr>
+          <a:lstStyle/>
+          <a:p>
+            <a:pPr algn="ctr"/>
+            <a:r>
+              <a:rPr lang="es-ES" sz="2400" b="1" dirty="0">
+                <a:solidFill>
+                  <a:srgbClr val="FFFFFF"/>
+                </a:solidFill>
+              </a:rPr>
+              <a:t>F5</a:t>
+            </a:r>
+          </a:p>
+          <a:p>
+            <a:pPr algn="ctr"/>
+            <a:r>
+              <a:rPr lang="es-ES" sz="1050" dirty="0">
+                <a:solidFill>
+                  <a:srgbClr val="FFFFFF"/>
+                </a:solidFill>
+              </a:rPr>
+              <a:t>Delivery and validation</a:t>
+            </a:r>
+          </a:p>
+        </p:txBody>
+      </p:sp>
+      <p:sp>
+        <p:nvSpPr>
+          <p:cNvPr id="186" name="Texto 186"/>
+          <p:cNvSpPr txBox="1"/>
+          <p:nvPr/>
+        </p:nvSpPr>
+        <p:spPr>
+          <a:xfrm>
+            <a:off x="8441000" y="3900000"/>
+            <a:ext cx="800000" cy="300000"/>
+          </a:xfrm>
+          <a:prstGeom prst="rect">
+            <a:avLst/>
+          </a:prstGeom>
+          <a:noFill/>
+        </p:spPr>
+        <p:txBody>
+          <a:bodyPr wrap="square" anchor="t" lIns="45720" rIns="45720">
+            <a:noAutofit/>
+          </a:bodyPr>
+          <a:lstStyle/>
+          <a:p>
+            <a:pPr algn="ctr"/>
+            <a:r>
+              <a:rPr lang="es-ES" sz="1200" b="1" dirty="0">
+                <a:solidFill>
+                  <a:srgbClr val="990F3D"/>
+                </a:solidFill>
+              </a:rPr>
+              <a:t>G5</a:t>
+            </a:r>
+          </a:p>
+        </p:txBody>
+      </p:sp>
+      <p:sp>
+        <p:nvSpPr>
+          <p:cNvPr id="187" name="Caja 187"/>
+          <p:cNvSpPr/>
+          <p:nvPr/>
+        </p:nvSpPr>
+        <p:spPr>
+          <a:xfrm>
+            <a:off x="8901000" y="2350000"/>
+            <a:ext cx="1240000" cy="1500000"/>
+          </a:xfrm>
+          <a:prstGeom prst="roundRect">
+            <a:avLst>
+              <a:gd name="adj" fmla="val 6000"/>
+            </a:avLst>
+          </a:prstGeom>
+          <a:solidFill>
+            <a:srgbClr val="0D7680"/>
+          </a:solidFill>
+          <a:ln>
+            <a:noFill/>
+          </a:ln>
+        </p:spPr>
+        <p:txBody>
+          <a:bodyPr wrap="square" anchor="ctr" lIns="45720" rIns="45720">
+            <a:noAutofit/>
+          </a:bodyPr>
+          <a:lstStyle/>
+          <a:p>
+            <a:pPr algn="ctr"/>
+            <a:r>
+              <a:rPr lang="es-ES" sz="2400" b="1" dirty="0">
+                <a:solidFill>
+                  <a:srgbClr val="FFFFFF"/>
+                </a:solidFill>
+              </a:rPr>
+              <a:t>F6</a:t>
+            </a:r>
+          </a:p>
+          <a:p>
+            <a:pPr algn="ctr"/>
+            <a:r>
+              <a:rPr lang="es-ES" sz="1050" dirty="0">
+                <a:solidFill>
+                  <a:srgbClr val="FFFFFF"/>
+                </a:solidFill>
+              </a:rPr>
+              <a:t>Operation and governance</a:t>
+            </a:r>
+          </a:p>
+        </p:txBody>
+      </p:sp>
+      <p:sp>
+        <p:nvSpPr>
+          <p:cNvPr id="188" name="Texto 188"/>
+          <p:cNvSpPr txBox="1"/>
+          <p:nvPr/>
+        </p:nvSpPr>
+        <p:spPr>
+          <a:xfrm>
+            <a:off x="9811000" y="3900000"/>
+            <a:ext cx="800000" cy="300000"/>
+          </a:xfrm>
+          <a:prstGeom prst="rect">
+            <a:avLst/>
+          </a:prstGeom>
+          <a:noFill/>
+        </p:spPr>
+        <p:txBody>
+          <a:bodyPr wrap="square" anchor="t" lIns="45720" rIns="45720">
+            <a:noAutofit/>
+          </a:bodyPr>
+          <a:lstStyle/>
+          <a:p>
+            <a:pPr algn="ctr"/>
+            <a:r>
+              <a:rPr lang="es-ES" sz="1200" b="1" dirty="0">
+                <a:solidFill>
+                  <a:srgbClr val="990F3D"/>
+                </a:solidFill>
+              </a:rPr>
+              <a:t>R6</a:t>
+            </a:r>
+          </a:p>
+        </p:txBody>
+      </p:sp>
+      <p:sp>
+        <p:nvSpPr>
+          <p:cNvPr id="189" name="Caja 189"/>
+          <p:cNvSpPr/>
+          <p:nvPr/>
+        </p:nvSpPr>
+        <p:spPr>
+          <a:xfrm>
+            <a:off x="10271000" y="2350000"/>
+            <a:ext cx="1240000" cy="1500000"/>
+          </a:xfrm>
+          <a:prstGeom prst="roundRect">
+            <a:avLst>
+              <a:gd name="adj" fmla="val 6000"/>
+            </a:avLst>
+          </a:prstGeom>
+          <a:solidFill>
+            <a:srgbClr val="C9A78D"/>
+          </a:solidFill>
+          <a:ln>
+            <a:noFill/>
+          </a:ln>
+        </p:spPr>
+        <p:txBody>
+          <a:bodyPr wrap="square" anchor="ctr" lIns="45720" rIns="45720">
+            <a:noAutofit/>
+          </a:bodyPr>
+          <a:lstStyle/>
+          <a:p>
+            <a:pPr algn="ctr"/>
+            <a:r>
+              <a:rPr lang="es-ES" sz="2400" b="1" dirty="0">
+                <a:solidFill>
+                  <a:srgbClr val="564D47"/>
+                </a:solidFill>
+              </a:rPr>
+              <a:t>F7</a:t>
+            </a:r>
+          </a:p>
+          <a:p>
+            <a:pPr algn="ctr"/>
+            <a:r>
+              <a:rPr lang="es-ES" sz="1050" dirty="0">
+                <a:solidFill>
+                  <a:srgbClr val="564D47"/>
+                </a:solidFill>
+              </a:rPr>
+              <a:t>Evolution or retirement</a:t>
+            </a:r>
+          </a:p>
+        </p:txBody>
+      </p:sp>
+      <p:sp>
+        <p:nvSpPr>
+          <p:cNvPr id="190" name="Texto 190"/>
+          <p:cNvSpPr txBox="1"/>
+          <p:nvPr/>
+        </p:nvSpPr>
+        <p:spPr>
+          <a:xfrm>
+            <a:off x="11181000" y="3900000"/>
+            <a:ext cx="800000" cy="300000"/>
+          </a:xfrm>
+          <a:prstGeom prst="rect">
+            <a:avLst/>
+          </a:prstGeom>
+          <a:noFill/>
+        </p:spPr>
+        <p:txBody>
+          <a:bodyPr wrap="square" anchor="t" lIns="45720" rIns="45720">
+            <a:noAutofit/>
+          </a:bodyPr>
+          <a:lstStyle/>
+          <a:p>
+            <a:pPr algn="ctr"/>
+            <a:r>
+              <a:rPr lang="es-ES" sz="1200" b="1" dirty="0">
+                <a:solidFill>
+                  <a:srgbClr val="990F3D"/>
+                </a:solidFill>
+              </a:rPr>
+              <a:t>G7</a:t>
+            </a:r>
+          </a:p>
+        </p:txBody>
+      </p:sp>
+      <p:sp>
+        <p:nvSpPr>
+          <p:cNvPr id="191" name="Texto 191"/>
+          <p:cNvSpPr txBox="1"/>
+          <p:nvPr/>
+        </p:nvSpPr>
+        <p:spPr>
+          <a:xfrm>
+            <a:off x="609600" y="4430000"/>
+            <a:ext cx="10972800" cy="600000"/>
+          </a:xfrm>
+          <a:prstGeom prst="rect">
+            <a:avLst/>
+          </a:prstGeom>
+          <a:noFill/>
+        </p:spPr>
+        <p:txBody>
+          <a:bodyPr wrap="square" anchor="t" lIns="45720" rIns="45720">
+            <a:noAutofit/>
+          </a:bodyPr>
+          <a:lstStyle/>
+          <a:p>
+            <a:pPr algn="ctr"/>
+            <a:r>
+              <a:rPr lang="es-ES" sz="2200" b="1" dirty="0">
+                <a:solidFill>
+                  <a:srgbClr val="0D7680"/>
+                </a:solidFill>
+              </a:rPr>
+              <a:t>IN USE · each R6 confirms it keeps delivering value under control</a:t>
             </a:r>
           </a:p>
         </p:txBody>
@@ -4198,7 +4276,7 @@
     <p:bg>
       <p:bgPr>
         <a:solidFill>
-          <a:srgbClr val="1A1817"/>
+          <a:srgbClr val="FBE2CD"/>
         </a:solidFill>
         <a:effectLst/>
       </p:bgPr>
@@ -4219,13 +4297,13 @@
       </p:grpSpPr>
       <p:sp>
         <p:nvSpPr>
-          <p:cNvPr id="193" name="Marca"/>
+          <p:cNvPr id="197" name="Marca"/>
           <p:cNvSpPr/>
           <p:nvPr/>
         </p:nvSpPr>
         <p:spPr>
           <a:xfrm>
-            <a:off x="609600" y="2400000"/>
+            <a:off x="609600" y="365760"/>
             <a:ext cx="182880" cy="182880"/>
           </a:xfrm>
           <a:prstGeom prst="rect">
@@ -4243,14 +4321,48 @@
       </p:sp>
       <p:sp>
         <p:nvSpPr>
-          <p:cNvPr id="194" name="Texto 194"/>
-          <p:cNvSpPr txBox="1"/>
-          <p:nvPr/>
-        </p:nvSpPr>
-        <p:spPr>
-          <a:xfrm>
-            <a:off x="838200" y="2320000"/>
-            <a:ext cx="9000000" cy="400000"/>
+          <p:cNvPr id="198" name="Texto 198"/>
+          <p:cNvSpPr txBox="1"/>
+          <p:nvPr/>
+        </p:nvSpPr>
+        <p:spPr>
+          <a:xfrm>
+            <a:off x="838200" y="300000"/>
+            <a:ext cx="10500000" cy="320000"/>
+          </a:xfrm>
+          <a:prstGeom prst="rect">
+            <a:avLst/>
+          </a:prstGeom>
+          <a:noFill/>
+        </p:spPr>
+        <p:txBody>
+          <a:bodyPr wrap="square" anchor="ctr" lIns="45720" rIns="45720">
+            <a:noAutofit/>
+          </a:bodyPr>
+          <a:lstStyle/>
+          <a:p>
+            <a:pPr algn="l"/>
+            <a:r>
+              <a:rPr lang="es-ES" sz="1400" b="1" dirty="0">
+                <a:solidFill>
+                  <a:srgbClr val="1A1817"/>
+                </a:solidFill>
+              </a:rPr>
+              <a:t>SEVEN-G · COURSE · COMPANY · SELF-CONSULTING</a:t>
+            </a:r>
+          </a:p>
+        </p:txBody>
+      </p:sp>
+      <p:sp>
+        <p:nvSpPr>
+          <p:cNvPr id="199" name="Texto 199"/>
+          <p:cNvSpPr txBox="1"/>
+          <p:nvPr/>
+        </p:nvSpPr>
+        <p:spPr>
+          <a:xfrm>
+            <a:off x="609600" y="700000"/>
+            <a:ext cx="10972800" cy="650000"/>
           </a:xfrm>
           <a:prstGeom prst="rect">
             <a:avLst/>
@@ -4265,26 +4377,26 @@
           <a:p>
             <a:pPr algn="l"/>
             <a:r>
-              <a:rPr lang="es-ES" sz="1600" b="1" dirty="0">
-                <a:solidFill>
-                  <a:srgbClr val="F3CFB2"/>
-                </a:solidFill>
-              </a:rPr>
-              <a:t>SELF-CONSULTING</a:t>
-            </a:r>
-          </a:p>
-        </p:txBody>
-      </p:sp>
-      <p:sp>
-        <p:nvSpPr>
-          <p:cNvPr id="195" name="Texto 195"/>
-          <p:cNvSpPr txBox="1"/>
-          <p:nvPr/>
-        </p:nvSpPr>
-        <p:spPr>
-          <a:xfrm>
-            <a:off x="609600" y="2850000"/>
-            <a:ext cx="10972800" cy="1400000"/>
+              <a:rPr lang="es-ES" sz="2700" b="1" dirty="0">
+                <a:solidFill>
+                  <a:srgbClr val="990F3D"/>
+                </a:solidFill>
+              </a:rPr>
+              <a:t>How value is measured</a:t>
+            </a:r>
+          </a:p>
+        </p:txBody>
+      </p:sp>
+      <p:sp>
+        <p:nvSpPr>
+          <p:cNvPr id="196" name="Texto 196"/>
+          <p:cNvSpPr txBox="1"/>
+          <p:nvPr/>
+        </p:nvSpPr>
+        <p:spPr>
+          <a:xfrm>
+            <a:off x="609600" y="1750000"/>
+            <a:ext cx="10972800" cy="4400000"/>
           </a:xfrm>
           <a:prstGeom prst="rect">
             <a:avLst/>
@@ -4297,48 +4409,103 @@
           </a:bodyPr>
           <a:lstStyle/>
           <a:p>
-            <a:pPr algn="l"/>
-            <a:r>
-              <a:rPr lang="es-ES" sz="4000" b="1" dirty="0">
-                <a:solidFill>
-                  <a:srgbClr val="FBE2CD"/>
-                </a:solidFill>
-              </a:rPr>
-              <a:t>Implementing it in your company, by your own means</a:t>
-            </a:r>
-          </a:p>
-        </p:txBody>
-      </p:sp>
-      <p:sp>
-        <p:nvSpPr>
-          <p:cNvPr id="196" name="Texto 196"/>
-          <p:cNvSpPr txBox="1"/>
-          <p:nvPr/>
-        </p:nvSpPr>
-        <p:spPr>
-          <a:xfrm>
-            <a:off x="609600" y="4400000"/>
-            <a:ext cx="10500000" cy="900000"/>
-          </a:xfrm>
-          <a:prstGeom prst="rect">
-            <a:avLst/>
-          </a:prstGeom>
-          <a:noFill/>
-        </p:spPr>
-        <p:txBody>
-          <a:bodyPr wrap="square" anchor="t" lIns="45720" rIns="45720">
-            <a:noAutofit/>
-          </a:bodyPr>
-          <a:lstStyle/>
-          <a:p>
-            <a:pPr algn="l"/>
-            <a:r>
-              <a:rPr lang="es-ES" sz="1700" dirty="0">
-                <a:solidFill>
-                  <a:srgbClr val="F3CFB2"/>
-                </a:solidFill>
-              </a:rPr>
-              <a:t>The framework is designed to be applied without hiring anyone. This is what it takes, and in what order.</a:t>
+            <a:pPr marL="285750" indent="-285750">
+              <a:spcAft>
+                <a:spcPts val="400"/>
+              </a:spcAft>
+              <a:buClr>
+                <a:srgbClr val="990F3D"/>
+              </a:buClr>
+              <a:buFont typeface="Arial"/>
+              <a:buChar char="•"/>
+            </a:pPr>
+            <a:r>
+              <a:rPr lang="es-ES" sz="1800" dirty="0">
+                <a:solidFill>
+                  <a:srgbClr val="2F2B28"/>
+                </a:solidFill>
+              </a:rPr>
+              <a:t>Every amount carries a formula and a status: validated (finance), declared (the team) or estimated.</a:t>
+            </a:r>
+          </a:p>
+          <a:p>
+            <a:pPr marL="285750" indent="-285750">
+              <a:spcAft>
+                <a:spcPts val="400"/>
+              </a:spcAft>
+              <a:buClr>
+                <a:srgbClr val="990F3D"/>
+              </a:buClr>
+              <a:buFont typeface="Arial"/>
+              <a:buChar char="•"/>
+            </a:pPr>
+            <a:r>
+              <a:rPr lang="es-ES" sz="1800" dirty="0">
+                <a:solidFill>
+                  <a:srgbClr val="2F2B28"/>
+                </a:solidFill>
+              </a:rPr>
+              <a:t>Released hours are not savings until they are materialised: a cost goes down or they are reassigned to a valuable activity.</a:t>
+            </a:r>
+          </a:p>
+          <a:p>
+            <a:pPr marL="285750" indent="-285750">
+              <a:spcAft>
+                <a:spcPts val="400"/>
+              </a:spcAft>
+              <a:buClr>
+                <a:srgbClr val="990F3D"/>
+              </a:buClr>
+              <a:buFont typeface="Arial"/>
+              <a:buChar char="•"/>
+            </a:pPr>
+            <a:r>
+              <a:rPr lang="es-ES" sz="1800" dirty="0">
+                <a:solidFill>
+                  <a:srgbClr val="2F2B28"/>
+                </a:solidFill>
+              </a:rPr>
+              <a:t>Cost is complete: build, consumption, operation, human oversight and retirement.</a:t>
+            </a:r>
+          </a:p>
+          <a:p>
+            <a:pPr marL="285750" indent="-285750">
+              <a:spcAft>
+                <a:spcPts val="400"/>
+              </a:spcAft>
+              <a:buClr>
+                <a:srgbClr val="990F3D"/>
+              </a:buClr>
+              <a:buFont typeface="Arial"/>
+              <a:buChar char="•"/>
+            </a:pPr>
+            <a:r>
+              <a:rPr lang="es-ES" sz="1800" dirty="0">
+                <a:solidFill>
+                  <a:srgbClr val="2F2B28"/>
+                </a:solidFill>
+              </a:rPr>
+              <a:t>The transformation index uses eight evidence signals to tell transformation apart from mere efficiency.</a:t>
+            </a:r>
+          </a:p>
+          <a:p>
+            <a:pPr marL="285750" indent="-285750">
+              <a:spcAft>
+                <a:spcPts val="400"/>
+              </a:spcAft>
+              <a:buClr>
+                <a:srgbClr val="990F3D"/>
+              </a:buClr>
+              <a:buFont typeface="Arial"/>
+              <a:buChar char="•"/>
+            </a:pPr>
+            <a:r>
+              <a:rPr lang="es-ES" sz="1800" dirty="0">
+                <a:solidFill>
+                  <a:srgbClr val="2F2B28"/>
+                </a:solidFill>
+              </a:rPr>
+              <a:t>Ten measurement rules (document 40). No figure enters the portfolio net without its status.</a:t>
             </a:r>
           </a:p>
         </p:txBody>
@@ -4639,7 +4806,7 @@
     <p:bg>
       <p:bgPr>
         <a:solidFill>
-          <a:srgbClr val="FBE2CD"/>
+          <a:srgbClr val="1A1817"/>
         </a:solidFill>
         <a:effectLst/>
       </p:bgPr>
@@ -4660,13 +4827,13 @@
       </p:grpSpPr>
       <p:sp>
         <p:nvSpPr>
-          <p:cNvPr id="198" name="Marca"/>
+          <p:cNvPr id="200" name="Marca"/>
           <p:cNvSpPr/>
           <p:nvPr/>
         </p:nvSpPr>
         <p:spPr>
           <a:xfrm>
-            <a:off x="609600" y="365760"/>
+            <a:off x="609600" y="2400000"/>
             <a:ext cx="182880" cy="182880"/>
           </a:xfrm>
           <a:prstGeom prst="rect">
@@ -4684,48 +4851,48 @@
       </p:sp>
       <p:sp>
         <p:nvSpPr>
-          <p:cNvPr id="199" name="Texto 199"/>
-          <p:cNvSpPr txBox="1"/>
-          <p:nvPr/>
-        </p:nvSpPr>
-        <p:spPr>
-          <a:xfrm>
-            <a:off x="838200" y="300000"/>
-            <a:ext cx="10500000" cy="320000"/>
-          </a:xfrm>
-          <a:prstGeom prst="rect">
-            <a:avLst/>
-          </a:prstGeom>
-          <a:noFill/>
-        </p:spPr>
-        <p:txBody>
-          <a:bodyPr wrap="square" anchor="ctr" lIns="45720" rIns="45720">
+          <p:cNvPr id="201" name="Texto 201"/>
+          <p:cNvSpPr txBox="1"/>
+          <p:nvPr/>
+        </p:nvSpPr>
+        <p:spPr>
+          <a:xfrm>
+            <a:off x="838200" y="2320000"/>
+            <a:ext cx="9000000" cy="400000"/>
+          </a:xfrm>
+          <a:prstGeom prst="rect">
+            <a:avLst/>
+          </a:prstGeom>
+          <a:noFill/>
+        </p:spPr>
+        <p:txBody>
+          <a:bodyPr wrap="square" anchor="t" lIns="45720" rIns="45720">
             <a:noAutofit/>
           </a:bodyPr>
           <a:lstStyle/>
           <a:p>
             <a:pPr algn="l"/>
             <a:r>
-              <a:rPr lang="es-ES" sz="1400" b="1" dirty="0">
-                <a:solidFill>
-                  <a:srgbClr val="1A1817"/>
-                </a:solidFill>
-              </a:rPr>
-              <a:t>SEVEN-G · COURSE · COMPANY · SELF-CONSULTING</a:t>
-            </a:r>
-          </a:p>
-        </p:txBody>
-      </p:sp>
-      <p:sp>
-        <p:nvSpPr>
-          <p:cNvPr id="200" name="Texto 200"/>
-          <p:cNvSpPr txBox="1"/>
-          <p:nvPr/>
-        </p:nvSpPr>
-        <p:spPr>
-          <a:xfrm>
-            <a:off x="609600" y="700000"/>
-            <a:ext cx="10972800" cy="650000"/>
+              <a:rPr lang="es-ES" sz="1600" b="1" dirty="0">
+                <a:solidFill>
+                  <a:srgbClr val="F3CFB2"/>
+                </a:solidFill>
+              </a:rPr>
+              <a:t>SELF-CONSULTING</a:t>
+            </a:r>
+          </a:p>
+        </p:txBody>
+      </p:sp>
+      <p:sp>
+        <p:nvSpPr>
+          <p:cNvPr id="202" name="Texto 202"/>
+          <p:cNvSpPr txBox="1"/>
+          <p:nvPr/>
+        </p:nvSpPr>
+        <p:spPr>
+          <a:xfrm>
+            <a:off x="609600" y="2850000"/>
+            <a:ext cx="10972800" cy="1400000"/>
           </a:xfrm>
           <a:prstGeom prst="rect">
             <a:avLst/>
@@ -4740,26 +4907,26 @@
           <a:p>
             <a:pPr algn="l"/>
             <a:r>
-              <a:rPr lang="es-ES" sz="2700" b="1" dirty="0">
-                <a:solidFill>
-                  <a:srgbClr val="990F3D"/>
-                </a:solidFill>
-              </a:rPr>
-              <a:t>Before starting: what the company needs</a:t>
-            </a:r>
-          </a:p>
-        </p:txBody>
-      </p:sp>
-      <p:sp>
-        <p:nvSpPr>
-          <p:cNvPr id="197" name="Texto 197"/>
-          <p:cNvSpPr txBox="1"/>
-          <p:nvPr/>
-        </p:nvSpPr>
-        <p:spPr>
-          <a:xfrm>
-            <a:off x="609600" y="1750000"/>
-            <a:ext cx="10972800" cy="4400000"/>
+              <a:rPr lang="es-ES" sz="4000" b="1" dirty="0">
+                <a:solidFill>
+                  <a:srgbClr val="FBE2CD"/>
+                </a:solidFill>
+              </a:rPr>
+              <a:t>Implementing it in your company, by your own means</a:t>
+            </a:r>
+          </a:p>
+        </p:txBody>
+      </p:sp>
+      <p:sp>
+        <p:nvSpPr>
+          <p:cNvPr id="203" name="Texto 203"/>
+          <p:cNvSpPr txBox="1"/>
+          <p:nvPr/>
+        </p:nvSpPr>
+        <p:spPr>
+          <a:xfrm>
+            <a:off x="609600" y="4400000"/>
+            <a:ext cx="10500000" cy="900000"/>
           </a:xfrm>
           <a:prstGeom prst="rect">
             <a:avLst/>
@@ -4772,123 +4939,14 @@
           </a:bodyPr>
           <a:lstStyle/>
           <a:p>
-            <a:pPr marL="285750" indent="-285750">
-              <a:spcAft>
-                <a:spcPts val="400"/>
-              </a:spcAft>
-              <a:buClr>
-                <a:srgbClr val="990F3D"/>
-              </a:buClr>
-              <a:buFont typeface="Arial"/>
-              <a:buChar char="•"/>
-            </a:pPr>
-            <a:r>
-              <a:rPr lang="es-ES" sz="1800" dirty="0">
-                <a:solidFill>
-                  <a:srgbClr val="2F2B28"/>
-                </a:solidFill>
-              </a:rPr>
-              <a:t>An implementation mandate signed by the top executive, with objective, perimeter and deadline (P32).</a:t>
-            </a:r>
-          </a:p>
-          <a:p>
-            <a:pPr marL="285750" indent="-285750">
-              <a:spcAft>
-                <a:spcPts val="400"/>
-              </a:spcAft>
-              <a:buClr>
-                <a:srgbClr val="990F3D"/>
-              </a:buClr>
-              <a:buFont typeface="Arial"/>
-              <a:buChar char="•"/>
-            </a:pPr>
-            <a:r>
-              <a:rPr lang="es-ES" sz="1800" dirty="0">
-                <a:solidFill>
-                  <a:srgbClr val="2F2B28"/>
-                </a:solidFill>
-              </a:rPr>
-              <a:t>The board knows the plan and reserves a session around week 12 to approve the direction (C2).</a:t>
-            </a:r>
-          </a:p>
-          <a:p>
-            <a:pPr marL="285750" indent="-285750">
-              <a:spcAft>
-                <a:spcPts val="400"/>
-              </a:spcAft>
-              <a:buClr>
-                <a:srgbClr val="990F3D"/>
-              </a:buClr>
-              <a:buFont typeface="Arial"/>
-              <a:buChar char="•"/>
-            </a:pPr>
-            <a:r>
-              <a:rPr lang="es-ES" sz="1800" dirty="0">
-                <a:solidFill>
-                  <a:srgbClr val="2F2B28"/>
-                </a:solidFill>
-              </a:rPr>
-              <a:t>An implementation lead with real dedication and a core team: business, technology, data, risk, compliance, security, people and finance.</a:t>
-            </a:r>
-          </a:p>
-          <a:p>
-            <a:pPr marL="285750" indent="-285750">
-              <a:spcAft>
-                <a:spcPts val="400"/>
-              </a:spcAft>
-              <a:buClr>
-                <a:srgbClr val="990F3D"/>
-              </a:buClr>
-              <a:buFont typeface="Arial"/>
-              <a:buChar char="•"/>
-            </a:pPr>
-            <a:r>
-              <a:rPr lang="es-ES" sz="1800" dirty="0">
-                <a:solidFill>
-                  <a:srgbClr val="2F2B28"/>
-                </a:solidFill>
-              </a:rPr>
-              <a:t>Internal audit informed and legal counsel available for regulatory classification.</a:t>
-            </a:r>
-          </a:p>
-          <a:p>
-            <a:pPr marL="285750" indent="-285750">
-              <a:spcAft>
-                <a:spcPts val="400"/>
-              </a:spcAft>
-              <a:buClr>
-                <a:srgbClr val="990F3D"/>
-              </a:buClr>
-              <a:buFont typeface="Arial"/>
-              <a:buChar char="•"/>
-            </a:pPr>
-            <a:r>
-              <a:rPr lang="es-ES" sz="1800" dirty="0">
-                <a:solidFill>
-                  <a:srgbClr val="2F2B28"/>
-                </a:solidFill>
-              </a:rPr>
-              <a:t>A register: T01, or a spreadsheet with the same fields.</a:t>
-            </a:r>
-          </a:p>
-          <a:p>
-            <a:pPr marL="285750" indent="-285750">
-              <a:spcAft>
-                <a:spcPts val="400"/>
-              </a:spcAft>
-              <a:buClr>
-                <a:srgbClr val="990F3D"/>
-              </a:buClr>
-              <a:buFont typeface="Arial"/>
-              <a:buChar char="•"/>
-            </a:pPr>
-            <a:r>
-              <a:rPr lang="es-ES" sz="1800" dirty="0">
-                <a:solidFill>
-                  <a:srgbClr val="2F2B28"/>
-                </a:solidFill>
-              </a:rPr>
-              <a:t>No moratorium: AI activity continues; only what the diagnosis flags as unacceptable risk is stopped.</a:t>
+            <a:pPr algn="l"/>
+            <a:r>
+              <a:rPr lang="es-ES" sz="1700" dirty="0">
+                <a:solidFill>
+                  <a:srgbClr val="F3CFB2"/>
+                </a:solidFill>
+              </a:rPr>
+              <a:t>The framework is designed to be applied without hiring anyone. This is what it takes, and in what order.</a:t>
             </a:r>
           </a:p>
         </p:txBody>
@@ -4928,7 +4986,7 @@
       </p:grpSpPr>
       <p:sp>
         <p:nvSpPr>
-          <p:cNvPr id="203" name="Marca"/>
+          <p:cNvPr id="205" name="Marca"/>
           <p:cNvSpPr/>
           <p:nvPr/>
         </p:nvSpPr>
@@ -4952,7 +5010,7 @@
       </p:sp>
       <p:sp>
         <p:nvSpPr>
-          <p:cNvPr id="204" name="Texto 204"/>
+          <p:cNvPr id="206" name="Texto 206"/>
           <p:cNvSpPr txBox="1"/>
           <p:nvPr/>
         </p:nvSpPr>
@@ -4986,7 +5044,7 @@
       </p:sp>
       <p:sp>
         <p:nvSpPr>
-          <p:cNvPr id="205" name="Texto 205"/>
+          <p:cNvPr id="207" name="Texto 207"/>
           <p:cNvSpPr txBox="1"/>
           <p:nvPr/>
         </p:nvSpPr>
@@ -5013,14 +5071,14 @@
                   <a:srgbClr val="990F3D"/>
                 </a:solidFill>
               </a:rPr>
-              <a:t>Lite or Enterprise: proportionality</a:t>
-            </a:r>
-          </a:p>
-        </p:txBody>
-      </p:sp>
-      <p:sp>
-        <p:nvSpPr>
-          <p:cNvPr id="201" name="Texto 201"/>
+              <a:t>Before starting: what the company needs</a:t>
+            </a:r>
+          </a:p>
+        </p:txBody>
+      </p:sp>
+      <p:sp>
+        <p:nvSpPr>
+          <p:cNvPr id="204" name="Texto 204"/>
           <p:cNvSpPr txBox="1"/>
           <p:nvPr/>
         </p:nvSpPr>
@@ -5056,7 +5114,7 @@
                   <a:srgbClr val="2F2B28"/>
                 </a:solidFill>
               </a:rPr>
-              <a:t>Two different decisions: implementation scope belongs to the company; intensity, to each initiative.</a:t>
+              <a:t>An implementation mandate signed by the top executive, with objective, perimeter and deadline (P32).</a:t>
             </a:r>
           </a:p>
           <a:p>
@@ -5076,7 +5134,7 @@
                   <a:srgbClr val="2F2B28"/>
                 </a:solidFill>
               </a:rPr>
-              <a:t>Size does not decide. One Enterprise criterion is enough for an initiative: high risk, decisions about people, direct exposure, acting agents, protected data, critical function, Transform or high investment.</a:t>
+              <a:t>The board knows the plan and reserves a session around week 12 to approve the direction (C2).</a:t>
             </a:r>
           </a:p>
           <a:p>
@@ -5096,7 +5154,7 @@
                   <a:srgbClr val="2F2B28"/>
                 </a:solidFill>
               </a:rPr>
-              <a:t>Minimum Lite path: board with a quarterly AI item, monthly executive committee and a one-person part-time AI office.</a:t>
+              <a:t>An implementation lead with real dedication and a core team: business, technology, data, risk, compliance, security, people and finance.</a:t>
             </a:r>
           </a:p>
           <a:p>
@@ -5116,7 +5174,7 @@
                   <a:srgbClr val="2F2B28"/>
                 </a:solidFill>
               </a:rPr>
-              <a:t>In Lite, gates are grouped (G0–G2 together, G4–G5 together, six-monthly R6). G3 always stands alone.</a:t>
+              <a:t>Internal audit informed and legal counsel available for regulatory classification.</a:t>
             </a:r>
           </a:p>
           <a:p>
@@ -5136,41 +5194,27 @@
                   <a:srgbClr val="2F2B28"/>
                 </a:solidFill>
               </a:rPr>
-              <a:t>No mandatory evidence is skipped in Lite: it is simplified. The inventory is never reduced.</a:t>
-            </a:r>
-          </a:p>
-        </p:txBody>
-      </p:sp>
-      <p:sp>
-        <p:nvSpPr>
-          <p:cNvPr id="202" name="Texto 202"/>
-          <p:cNvSpPr txBox="1"/>
-          <p:nvPr/>
-        </p:nvSpPr>
-        <p:spPr>
-          <a:xfrm>
-            <a:off x="609600" y="6250000"/>
-            <a:ext cx="10972800" cy="450000"/>
-          </a:xfrm>
-          <a:prstGeom prst="rect">
-            <a:avLst/>
-          </a:prstGeom>
-          <a:noFill/>
-        </p:spPr>
-        <p:txBody>
-          <a:bodyPr wrap="square" anchor="t" lIns="45720" rIns="45720">
-            <a:noAutofit/>
-          </a:bodyPr>
-          <a:lstStyle/>
-          <a:p>
-            <a:pPr algn="l"/>
-            <a:r>
-              <a:rPr lang="es-ES" sz="1400" b="1" dirty="0">
-                <a:solidFill>
-                  <a:srgbClr val="0F5499"/>
-                </a:solidFill>
-              </a:rPr>
-              <a:t>Document 90, section 2.4, and the obligation matrix (document 94).</a:t>
+              <a:t>A register: T01, or a spreadsheet with the same fields.</a:t>
+            </a:r>
+          </a:p>
+          <a:p>
+            <a:pPr marL="285750" indent="-285750">
+              <a:spcAft>
+                <a:spcPts val="400"/>
+              </a:spcAft>
+              <a:buClr>
+                <a:srgbClr val="990F3D"/>
+              </a:buClr>
+              <a:buFont typeface="Arial"/>
+              <a:buChar char="•"/>
+            </a:pPr>
+            <a:r>
+              <a:rPr lang="es-ES" sz="1800" dirty="0">
+                <a:solidFill>
+                  <a:srgbClr val="2F2B28"/>
+                </a:solidFill>
+              </a:rPr>
+              <a:t>No moratorium: AI activity continues; only what the diagnosis flags as unacceptable risk is stopped.</a:t>
             </a:r>
           </a:p>
         </p:txBody>
@@ -5210,7 +5254,7 @@
       </p:grpSpPr>
       <p:sp>
         <p:nvSpPr>
-          <p:cNvPr id="216" name="Marca"/>
+          <p:cNvPr id="210" name="Marca"/>
           <p:cNvSpPr/>
           <p:nvPr/>
         </p:nvSpPr>
@@ -5234,7 +5278,7 @@
       </p:sp>
       <p:sp>
         <p:nvSpPr>
-          <p:cNvPr id="217" name="Texto 217"/>
+          <p:cNvPr id="211" name="Texto 211"/>
           <p:cNvSpPr txBox="1"/>
           <p:nvPr/>
         </p:nvSpPr>
@@ -5268,7 +5312,7 @@
       </p:sp>
       <p:sp>
         <p:nvSpPr>
-          <p:cNvPr id="218" name="Texto 218"/>
+          <p:cNvPr id="212" name="Texto 212"/>
           <p:cNvSpPr txBox="1"/>
           <p:nvPr/>
         </p:nvSpPr>
@@ -5295,20 +5339,143 @@
                   <a:srgbClr val="990F3D"/>
                 </a:solidFill>
               </a:rPr>
-              <a:t>The 90-day plan</a:t>
-            </a:r>
-          </a:p>
-        </p:txBody>
-      </p:sp>
-      <p:sp>
-        <p:nvSpPr>
-          <p:cNvPr id="219" name="Texto 219"/>
-          <p:cNvSpPr txBox="1"/>
-          <p:nvPr/>
-        </p:nvSpPr>
-        <p:spPr>
-          <a:xfrm>
-            <a:off x="609600" y="1330000"/>
+              <a:t>Lite or Enterprise: proportionality</a:t>
+            </a:r>
+          </a:p>
+        </p:txBody>
+      </p:sp>
+      <p:sp>
+        <p:nvSpPr>
+          <p:cNvPr id="208" name="Texto 208"/>
+          <p:cNvSpPr txBox="1"/>
+          <p:nvPr/>
+        </p:nvSpPr>
+        <p:spPr>
+          <a:xfrm>
+            <a:off x="609600" y="1750000"/>
+            <a:ext cx="10972800" cy="4400000"/>
+          </a:xfrm>
+          <a:prstGeom prst="rect">
+            <a:avLst/>
+          </a:prstGeom>
+          <a:noFill/>
+        </p:spPr>
+        <p:txBody>
+          <a:bodyPr wrap="square" anchor="t" lIns="45720" rIns="45720">
+            <a:noAutofit/>
+          </a:bodyPr>
+          <a:lstStyle/>
+          <a:p>
+            <a:pPr marL="285750" indent="-285750">
+              <a:spcAft>
+                <a:spcPts val="400"/>
+              </a:spcAft>
+              <a:buClr>
+                <a:srgbClr val="990F3D"/>
+              </a:buClr>
+              <a:buFont typeface="Arial"/>
+              <a:buChar char="•"/>
+            </a:pPr>
+            <a:r>
+              <a:rPr lang="es-ES" sz="1800" dirty="0">
+                <a:solidFill>
+                  <a:srgbClr val="2F2B28"/>
+                </a:solidFill>
+              </a:rPr>
+              <a:t>Two different decisions: implementation scope belongs to the company; intensity, to each initiative.</a:t>
+            </a:r>
+          </a:p>
+          <a:p>
+            <a:pPr marL="285750" indent="-285750">
+              <a:spcAft>
+                <a:spcPts val="400"/>
+              </a:spcAft>
+              <a:buClr>
+                <a:srgbClr val="990F3D"/>
+              </a:buClr>
+              <a:buFont typeface="Arial"/>
+              <a:buChar char="•"/>
+            </a:pPr>
+            <a:r>
+              <a:rPr lang="es-ES" sz="1800" dirty="0">
+                <a:solidFill>
+                  <a:srgbClr val="2F2B28"/>
+                </a:solidFill>
+              </a:rPr>
+              <a:t>Size does not decide. One Enterprise criterion is enough for an initiative: high risk, decisions about people, direct exposure, acting agents, protected data, critical function, Transform or high investment.</a:t>
+            </a:r>
+          </a:p>
+          <a:p>
+            <a:pPr marL="285750" indent="-285750">
+              <a:spcAft>
+                <a:spcPts val="400"/>
+              </a:spcAft>
+              <a:buClr>
+                <a:srgbClr val="990F3D"/>
+              </a:buClr>
+              <a:buFont typeface="Arial"/>
+              <a:buChar char="•"/>
+            </a:pPr>
+            <a:r>
+              <a:rPr lang="es-ES" sz="1800" dirty="0">
+                <a:solidFill>
+                  <a:srgbClr val="2F2B28"/>
+                </a:solidFill>
+              </a:rPr>
+              <a:t>Minimum Lite path: board with a quarterly AI item, monthly executive committee and a one-person part-time AI office.</a:t>
+            </a:r>
+          </a:p>
+          <a:p>
+            <a:pPr marL="285750" indent="-285750">
+              <a:spcAft>
+                <a:spcPts val="400"/>
+              </a:spcAft>
+              <a:buClr>
+                <a:srgbClr val="990F3D"/>
+              </a:buClr>
+              <a:buFont typeface="Arial"/>
+              <a:buChar char="•"/>
+            </a:pPr>
+            <a:r>
+              <a:rPr lang="es-ES" sz="1800" dirty="0">
+                <a:solidFill>
+                  <a:srgbClr val="2F2B28"/>
+                </a:solidFill>
+              </a:rPr>
+              <a:t>In Lite, gates are grouped (G0–G2 together, G4–G5 together, six-monthly R6). G3 always stands alone.</a:t>
+            </a:r>
+          </a:p>
+          <a:p>
+            <a:pPr marL="285750" indent="-285750">
+              <a:spcAft>
+                <a:spcPts val="400"/>
+              </a:spcAft>
+              <a:buClr>
+                <a:srgbClr val="990F3D"/>
+              </a:buClr>
+              <a:buFont typeface="Arial"/>
+              <a:buChar char="•"/>
+            </a:pPr>
+            <a:r>
+              <a:rPr lang="es-ES" sz="1800" dirty="0">
+                <a:solidFill>
+                  <a:srgbClr val="2F2B28"/>
+                </a:solidFill>
+              </a:rPr>
+              <a:t>No mandatory evidence is skipped in Lite: it is simplified. The inventory is never reduced.</a:t>
+            </a:r>
+          </a:p>
+        </p:txBody>
+      </p:sp>
+      <p:sp>
+        <p:nvSpPr>
+          <p:cNvPr id="209" name="Texto 209"/>
+          <p:cNvSpPr txBox="1"/>
+          <p:nvPr/>
+        </p:nvSpPr>
+        <p:spPr>
+          <a:xfrm>
+            <a:off x="609600" y="6250000"/>
             <a:ext cx="10972800" cy="450000"/>
           </a:xfrm>
           <a:prstGeom prst="rect">
@@ -5324,394 +5491,12 @@
           <a:p>
             <a:pPr algn="l"/>
             <a:r>
-              <a:rPr lang="es-ES" sz="1500" dirty="0">
-                <a:solidFill>
-                  <a:srgbClr val="564D47"/>
-                </a:solidFill>
-              </a:rPr>
-              <a:t>Three months, three results and one board decision</a:t>
-            </a:r>
-          </a:p>
-        </p:txBody>
-      </p:sp>
-      <p:sp>
-        <p:nvSpPr>
-          <p:cNvPr id="206" name="Caja 206"/>
-          <p:cNvSpPr/>
-          <p:nvPr/>
-        </p:nvSpPr>
-        <p:spPr>
-          <a:xfrm>
-            <a:off x="609600" y="2050000"/>
-            <a:ext cx="3577600" cy="800000"/>
-          </a:xfrm>
-          <a:prstGeom prst="roundRect">
-            <a:avLst>
-              <a:gd name="adj" fmla="val 6000"/>
-            </a:avLst>
-          </a:prstGeom>
-          <a:solidFill>
-            <a:srgbClr val="0F5499"/>
-          </a:solidFill>
-          <a:ln>
-            <a:noFill/>
-          </a:ln>
-        </p:spPr>
-        <p:txBody>
-          <a:bodyPr wrap="square" anchor="ctr" lIns="45720" rIns="45720">
-            <a:noAutofit/>
-          </a:bodyPr>
-          <a:lstStyle/>
-          <a:p>
-            <a:pPr algn="ctr"/>
-            <a:r>
-              <a:rPr lang="es-ES" sz="1700" b="1" dirty="0">
-                <a:solidFill>
-                  <a:srgbClr val="FFFFFF"/>
-                </a:solidFill>
-              </a:rPr>
-              <a:t>Month 1 · Diagnosis (C1)</a:t>
-            </a:r>
-          </a:p>
-        </p:txBody>
-      </p:sp>
-      <p:sp>
-        <p:nvSpPr>
-          <p:cNvPr id="207" name="Caja 207"/>
-          <p:cNvSpPr/>
-          <p:nvPr/>
-        </p:nvSpPr>
-        <p:spPr>
-          <a:xfrm>
-            <a:off x="609600" y="2790000"/>
-            <a:ext cx="3577600" cy="2500000"/>
-          </a:xfrm>
-          <a:prstGeom prst="roundRect">
-            <a:avLst>
-              <a:gd name="adj" fmla="val 6000"/>
-            </a:avLst>
-          </a:prstGeom>
-          <a:solidFill>
-            <a:srgbClr val="F3CFB2"/>
-          </a:solidFill>
-          <a:ln>
-            <a:noFill/>
-          </a:ln>
-        </p:spPr>
-        <p:txBody>
-          <a:bodyPr wrap="square" anchor="ctr" lIns="45720" rIns="45720">
-            <a:noAutofit/>
-          </a:bodyPr>
-          <a:lstStyle/>
-          <a:p>
-            <a:pPr algn="ctr"/>
-            <a:r>
-              <a:rPr lang="es-ES" sz="1000" b="1" dirty="0">
-                <a:solidFill>
-                  <a:srgbClr val="2F2B28"/>
-                </a:solidFill>
-              </a:rPr>
-              <a:t/>
-            </a:r>
-          </a:p>
-        </p:txBody>
-      </p:sp>
-      <p:sp>
-        <p:nvSpPr>
-          <p:cNvPr id="208" name="Texto 208"/>
-          <p:cNvSpPr txBox="1"/>
-          <p:nvPr/>
-        </p:nvSpPr>
-        <p:spPr>
-          <a:xfrm>
-            <a:off x="649600" y="2890000"/>
-            <a:ext cx="3497600" cy="2340000"/>
-          </a:xfrm>
-          <a:prstGeom prst="rect">
-            <a:avLst/>
-          </a:prstGeom>
-          <a:noFill/>
-        </p:spPr>
-        <p:txBody>
-          <a:bodyPr wrap="square" anchor="t" lIns="45720" rIns="45720">
-            <a:noAutofit/>
-          </a:bodyPr>
-          <a:lstStyle/>
-          <a:p>
-            <a:pPr algn="l"/>
-            <a:r>
-              <a:rPr lang="es-ES" sz="1300" dirty="0">
-                <a:solidFill>
-                  <a:srgbClr val="2F2B28"/>
-                </a:solidFill>
-              </a:rPr>
-              <a:t>Mandate (P32). Inventory of all AI, including third-party and unauthorised, with a completeness statement. Evidence-based maturity (T15) and transformation index (T14). Milestone 1: verified C1 report (P33).</a:t>
-            </a:r>
-          </a:p>
-        </p:txBody>
-      </p:sp>
-      <p:sp>
-        <p:nvSpPr>
-          <p:cNvPr id="209" name="Caja 209"/>
-          <p:cNvSpPr/>
-          <p:nvPr/>
-        </p:nvSpPr>
-        <p:spPr>
-          <a:xfrm>
-            <a:off x="4307200" y="2050000"/>
-            <a:ext cx="3577600" cy="800000"/>
-          </a:xfrm>
-          <a:prstGeom prst="roundRect">
-            <a:avLst>
-              <a:gd name="adj" fmla="val 6000"/>
-            </a:avLst>
-          </a:prstGeom>
-          <a:solidFill>
-            <a:srgbClr val="593380"/>
-          </a:solidFill>
-          <a:ln>
-            <a:noFill/>
-          </a:ln>
-        </p:spPr>
-        <p:txBody>
-          <a:bodyPr wrap="square" anchor="ctr" lIns="45720" rIns="45720">
-            <a:noAutofit/>
-          </a:bodyPr>
-          <a:lstStyle/>
-          <a:p>
-            <a:pPr algn="ctr"/>
-            <a:r>
-              <a:rPr lang="es-ES" sz="1700" b="1" dirty="0">
-                <a:solidFill>
-                  <a:srgbClr val="FFFFFF"/>
-                </a:solidFill>
-              </a:rPr>
-              <a:t>Month 2 · Risks and opportunities</a:t>
-            </a:r>
-          </a:p>
-        </p:txBody>
-      </p:sp>
-      <p:sp>
-        <p:nvSpPr>
-          <p:cNvPr id="210" name="Caja 210"/>
-          <p:cNvSpPr/>
-          <p:nvPr/>
-        </p:nvSpPr>
-        <p:spPr>
-          <a:xfrm>
-            <a:off x="4307200" y="2790000"/>
-            <a:ext cx="3577600" cy="2500000"/>
-          </a:xfrm>
-          <a:prstGeom prst="roundRect">
-            <a:avLst>
-              <a:gd name="adj" fmla="val 6000"/>
-            </a:avLst>
-          </a:prstGeom>
-          <a:solidFill>
-            <a:srgbClr val="F3CFB2"/>
-          </a:solidFill>
-          <a:ln>
-            <a:noFill/>
-          </a:ln>
-        </p:spPr>
-        <p:txBody>
-          <a:bodyPr wrap="square" anchor="ctr" lIns="45720" rIns="45720">
-            <a:noAutofit/>
-          </a:bodyPr>
-          <a:lstStyle/>
-          <a:p>
-            <a:pPr algn="ctr"/>
-            <a:r>
-              <a:rPr lang="es-ES" sz="1000" b="1" dirty="0">
-                <a:solidFill>
-                  <a:srgbClr val="2F2B28"/>
-                </a:solidFill>
-              </a:rPr>
-              <a:t/>
-            </a:r>
-          </a:p>
-        </p:txBody>
-      </p:sp>
-      <p:sp>
-        <p:nvSpPr>
-          <p:cNvPr id="211" name="Texto 211"/>
-          <p:cNvSpPr txBox="1"/>
-          <p:nvPr/>
-        </p:nvSpPr>
-        <p:spPr>
-          <a:xfrm>
-            <a:off x="4347200" y="2890000"/>
-            <a:ext cx="3497600" cy="2340000"/>
-          </a:xfrm>
-          <a:prstGeom prst="rect">
-            <a:avLst/>
-          </a:prstGeom>
-          <a:noFill/>
-        </p:spPr>
-        <p:txBody>
-          <a:bodyPr wrap="square" anchor="t" lIns="45720" rIns="45720">
-            <a:noAutofit/>
-          </a:bodyPr>
-          <a:lstStyle/>
-          <a:p>
-            <a:pPr algn="l"/>
-            <a:r>
-              <a:rPr lang="es-ES" sz="1300" dirty="0">
-                <a:solidFill>
-                  <a:srgbClr val="2F2B28"/>
-                </a:solidFill>
-              </a:rPr>
-              <a:t>Workshops per sphere: risks of what already exists (P11, P12) and opportunities with estimated value (P06, P07). Draft AI thesis, ambition and risk appetite (P35). Milestone 2: C2 proposal ready for the board.</a:t>
-            </a:r>
-          </a:p>
-        </p:txBody>
-      </p:sp>
-      <p:sp>
-        <p:nvSpPr>
-          <p:cNvPr id="212" name="Caja 212"/>
-          <p:cNvSpPr/>
-          <p:nvPr/>
-        </p:nvSpPr>
-        <p:spPr>
-          <a:xfrm>
-            <a:off x="8004800" y="2050000"/>
-            <a:ext cx="3577600" cy="800000"/>
-          </a:xfrm>
-          <a:prstGeom prst="roundRect">
-            <a:avLst>
-              <a:gd name="adj" fmla="val 6000"/>
-            </a:avLst>
-          </a:prstGeom>
-          <a:solidFill>
-            <a:srgbClr val="0D7680"/>
-          </a:solidFill>
-          <a:ln>
-            <a:noFill/>
-          </a:ln>
-        </p:spPr>
-        <p:txBody>
-          <a:bodyPr wrap="square" anchor="ctr" lIns="45720" rIns="45720">
-            <a:noAutofit/>
-          </a:bodyPr>
-          <a:lstStyle/>
-          <a:p>
-            <a:pPr algn="ctr"/>
-            <a:r>
-              <a:rPr lang="es-ES" sz="1700" b="1" dirty="0">
-                <a:solidFill>
-                  <a:srgbClr val="FFFFFF"/>
-                </a:solidFill>
-              </a:rPr>
-              <a:t>Month 3 · Governance and portfolio</a:t>
-            </a:r>
-          </a:p>
-        </p:txBody>
-      </p:sp>
-      <p:sp>
-        <p:nvSpPr>
-          <p:cNvPr id="213" name="Caja 213"/>
-          <p:cNvSpPr/>
-          <p:nvPr/>
-        </p:nvSpPr>
-        <p:spPr>
-          <a:xfrm>
-            <a:off x="8004800" y="2790000"/>
-            <a:ext cx="3577600" cy="2500000"/>
-          </a:xfrm>
-          <a:prstGeom prst="roundRect">
-            <a:avLst>
-              <a:gd name="adj" fmla="val 6000"/>
-            </a:avLst>
-          </a:prstGeom>
-          <a:solidFill>
-            <a:srgbClr val="F3CFB2"/>
-          </a:solidFill>
-          <a:ln>
-            <a:noFill/>
-          </a:ln>
-        </p:spPr>
-        <p:txBody>
-          <a:bodyPr wrap="square" anchor="ctr" lIns="45720" rIns="45720">
-            <a:noAutofit/>
-          </a:bodyPr>
-          <a:lstStyle/>
-          <a:p>
-            <a:pPr algn="ctr"/>
-            <a:r>
-              <a:rPr lang="es-ES" sz="1000" b="1" dirty="0">
-                <a:solidFill>
-                  <a:srgbClr val="2F2B28"/>
-                </a:solidFill>
-              </a:rPr>
-              <a:t/>
-            </a:r>
-          </a:p>
-        </p:txBody>
-      </p:sp>
-      <p:sp>
-        <p:nvSpPr>
-          <p:cNvPr id="214" name="Texto 214"/>
-          <p:cNvSpPr txBox="1"/>
-          <p:nvPr/>
-        </p:nvSpPr>
-        <p:spPr>
-          <a:xfrm>
-            <a:off x="8044800" y="2890000"/>
-            <a:ext cx="3497600" cy="2340000"/>
-          </a:xfrm>
-          <a:prstGeom prst="rect">
-            <a:avLst/>
-          </a:prstGeom>
-          <a:noFill/>
-        </p:spPr>
-        <p:txBody>
-          <a:bodyPr wrap="square" anchor="t" lIns="45720" rIns="45720">
-            <a:noAutofit/>
-          </a:bodyPr>
-          <a:lstStyle/>
-          <a:p>
-            <a:pPr algn="l"/>
-            <a:r>
-              <a:rPr lang="es-ES" sz="1300" dirty="0">
-                <a:solidFill>
-                  <a:srgbClr val="2F2B28"/>
-                </a:solidFill>
-              </a:rPr>
-              <a:t>Bodies and roles with no incompatibilities (P38, P03), gates and policies, first dashboard with real data (T17) and prioritised portfolio (P36). The board approves C2 and the committee, C3. Milestone 3: business as usual.</a:t>
-            </a:r>
-          </a:p>
-        </p:txBody>
-      </p:sp>
-      <p:sp>
-        <p:nvSpPr>
-          <p:cNvPr id="215" name="Texto 215"/>
-          <p:cNvSpPr txBox="1"/>
-          <p:nvPr/>
-        </p:nvSpPr>
-        <p:spPr>
-          <a:xfrm>
-            <a:off x="609600" y="6150000"/>
-            <a:ext cx="10972800" cy="500000"/>
-          </a:xfrm>
-          <a:prstGeom prst="rect">
-            <a:avLst/>
-          </a:prstGeom>
-          <a:noFill/>
-        </p:spPr>
-        <p:txBody>
-          <a:bodyPr wrap="square" anchor="t" lIns="45720" rIns="45720">
-            <a:noAutofit/>
-          </a:bodyPr>
-          <a:lstStyle/>
-          <a:p>
-            <a:pPr algn="l"/>
-            <a:r>
               <a:rPr lang="es-ES" sz="1400" b="1" dirty="0">
                 <a:solidFill>
                   <a:srgbClr val="0F5499"/>
                 </a:solidFill>
               </a:rPr>
-              <a:t>From week 13, no new initiative spends budget without going through G0.</a:t>
+              <a:t>Document 90, section 2.4, and the obligation matrix (document 94).</a:t>
             </a:r>
           </a:p>
         </p:txBody>
@@ -5751,7 +5536,7 @@
       </p:grpSpPr>
       <p:sp>
         <p:nvSpPr>
-          <p:cNvPr id="221" name="Marca"/>
+          <p:cNvPr id="223" name="Marca"/>
           <p:cNvSpPr/>
           <p:nvPr/>
         </p:nvSpPr>
@@ -5775,7 +5560,7 @@
       </p:sp>
       <p:sp>
         <p:nvSpPr>
-          <p:cNvPr id="222" name="Texto 222"/>
+          <p:cNvPr id="224" name="Texto 224"/>
           <p:cNvSpPr txBox="1"/>
           <p:nvPr/>
         </p:nvSpPr>
@@ -5809,7 +5594,7 @@
       </p:sp>
       <p:sp>
         <p:nvSpPr>
-          <p:cNvPr id="223" name="Texto 223"/>
+          <p:cNvPr id="225" name="Texto 225"/>
           <p:cNvSpPr txBox="1"/>
           <p:nvPr/>
         </p:nvSpPr>
@@ -5836,21 +5621,21 @@
                   <a:srgbClr val="990F3D"/>
                 </a:solidFill>
               </a:rPr>
-              <a:t>Three guarantees that are never negotiable, even at small scale</a:t>
-            </a:r>
-          </a:p>
-        </p:txBody>
-      </p:sp>
-      <p:sp>
-        <p:nvSpPr>
-          <p:cNvPr id="220" name="Texto 220"/>
-          <p:cNvSpPr txBox="1"/>
-          <p:nvPr/>
-        </p:nvSpPr>
-        <p:spPr>
-          <a:xfrm>
-            <a:off x="609600" y="1750000"/>
-            <a:ext cx="10972800" cy="4400000"/>
+              <a:t>The 90-day plan</a:t>
+            </a:r>
+          </a:p>
+        </p:txBody>
+      </p:sp>
+      <p:sp>
+        <p:nvSpPr>
+          <p:cNvPr id="226" name="Texto 226"/>
+          <p:cNvSpPr txBox="1"/>
+          <p:nvPr/>
+        </p:nvSpPr>
+        <p:spPr>
+          <a:xfrm>
+            <a:off x="609600" y="1330000"/>
+            <a:ext cx="10972800" cy="450000"/>
           </a:xfrm>
           <a:prstGeom prst="rect">
             <a:avLst/>
@@ -5863,103 +5648,396 @@
           </a:bodyPr>
           <a:lstStyle/>
           <a:p>
-            <a:pPr marL="285750" indent="-285750">
-              <a:spcAft>
-                <a:spcPts val="400"/>
-              </a:spcAft>
-              <a:buClr>
-                <a:srgbClr val="990F3D"/>
-              </a:buClr>
-              <a:buFont typeface="Arial"/>
-              <a:buChar char="•"/>
-            </a:pPr>
-            <a:r>
-              <a:rPr lang="es-ES" sz="1800" dirty="0">
-                <a:solidFill>
-                  <a:srgbClr val="2F2B28"/>
-                </a:solidFill>
-              </a:rPr>
-              <a:t>Whoever builds neither verifies nor decides on their own work.</a:t>
-            </a:r>
-          </a:p>
-          <a:p>
-            <a:pPr marL="285750" indent="-285750">
-              <a:spcAft>
-                <a:spcPts val="400"/>
-              </a:spcAft>
-              <a:buClr>
-                <a:srgbClr val="990F3D"/>
-              </a:buClr>
-              <a:buFont typeface="Arial"/>
-              <a:buChar char="•"/>
-            </a:pPr>
-            <a:r>
-              <a:rPr lang="es-ES" sz="1800" dirty="0">
-                <a:solidFill>
-                  <a:srgbClr val="2F2B28"/>
-                </a:solidFill>
-              </a:rPr>
-              <a:t>Risk sign-off comes from someone independent of the team.</a:t>
-            </a:r>
-          </a:p>
-          <a:p>
-            <a:pPr marL="285750" indent="-285750">
-              <a:spcAft>
-                <a:spcPts val="400"/>
-              </a:spcAft>
-              <a:buClr>
-                <a:srgbClr val="990F3D"/>
-              </a:buClr>
-              <a:buFont typeface="Arial"/>
-              <a:buChar char="•"/>
-            </a:pPr>
-            <a:r>
-              <a:rPr lang="es-ES" sz="1800" dirty="0">
-                <a:solidFill>
-                  <a:srgbClr val="2F2B28"/>
-                </a:solidFill>
-              </a:rPr>
-              <a:t>The board approves the direction and the risk appetite: this is not delegated.</a:t>
-            </a:r>
-          </a:p>
-          <a:p>
-            <a:pPr marL="285750" indent="-285750">
-              <a:spcAft>
-                <a:spcPts val="400"/>
-              </a:spcAft>
-              <a:buClr>
-                <a:srgbClr val="990F3D"/>
-              </a:buClr>
-              <a:buFont typeface="Arial"/>
-              <a:buChar char="•"/>
-            </a:pPr>
-            <a:r>
-              <a:rPr lang="es-ES" sz="1800" dirty="0">
-                <a:solidFill>
-                  <a:srgbClr val="2F2B28"/>
-                </a:solidFill>
-              </a:rPr>
-              <a:t>One person can hold several roles if they are not incompatible; the T01 register checks it (P03).</a:t>
-            </a:r>
-          </a:p>
-          <a:p>
-            <a:pPr marL="285750" indent="-285750">
-              <a:spcAft>
-                <a:spcPts val="400"/>
-              </a:spcAft>
-              <a:buClr>
-                <a:srgbClr val="990F3D"/>
-              </a:buClr>
-              <a:buFont typeface="Arial"/>
-              <a:buChar char="•"/>
-            </a:pPr>
-            <a:r>
-              <a:rPr lang="es-ES" sz="1800" dirty="0">
-                <a:solidFill>
-                  <a:srgbClr val="2F2B28"/>
-                </a:solidFill>
-              </a:rPr>
-              <a:t>What already exists is regularised with approved deadlines, not ignored: inventory first, then risks, then gates.</a:t>
+            <a:pPr algn="l"/>
+            <a:r>
+              <a:rPr lang="es-ES" sz="1500" dirty="0">
+                <a:solidFill>
+                  <a:srgbClr val="564D47"/>
+                </a:solidFill>
+              </a:rPr>
+              <a:t>Three months, three results and one board decision</a:t>
+            </a:r>
+          </a:p>
+        </p:txBody>
+      </p:sp>
+      <p:sp>
+        <p:nvSpPr>
+          <p:cNvPr id="213" name="Caja 213"/>
+          <p:cNvSpPr/>
+          <p:nvPr/>
+        </p:nvSpPr>
+        <p:spPr>
+          <a:xfrm>
+            <a:off x="609600" y="2050000"/>
+            <a:ext cx="3577600" cy="800000"/>
+          </a:xfrm>
+          <a:prstGeom prst="roundRect">
+            <a:avLst>
+              <a:gd name="adj" fmla="val 6000"/>
+            </a:avLst>
+          </a:prstGeom>
+          <a:solidFill>
+            <a:srgbClr val="0F5499"/>
+          </a:solidFill>
+          <a:ln>
+            <a:noFill/>
+          </a:ln>
+        </p:spPr>
+        <p:txBody>
+          <a:bodyPr wrap="square" anchor="ctr" lIns="45720" rIns="45720">
+            <a:noAutofit/>
+          </a:bodyPr>
+          <a:lstStyle/>
+          <a:p>
+            <a:pPr algn="ctr"/>
+            <a:r>
+              <a:rPr lang="es-ES" sz="1700" b="1" dirty="0">
+                <a:solidFill>
+                  <a:srgbClr val="FFFFFF"/>
+                </a:solidFill>
+              </a:rPr>
+              <a:t>Month 1 · Diagnosis (C1)</a:t>
+            </a:r>
+          </a:p>
+        </p:txBody>
+      </p:sp>
+      <p:sp>
+        <p:nvSpPr>
+          <p:cNvPr id="214" name="Caja 214"/>
+          <p:cNvSpPr/>
+          <p:nvPr/>
+        </p:nvSpPr>
+        <p:spPr>
+          <a:xfrm>
+            <a:off x="609600" y="2790000"/>
+            <a:ext cx="3577600" cy="2500000"/>
+          </a:xfrm>
+          <a:prstGeom prst="roundRect">
+            <a:avLst>
+              <a:gd name="adj" fmla="val 6000"/>
+            </a:avLst>
+          </a:prstGeom>
+          <a:solidFill>
+            <a:srgbClr val="F3CFB2"/>
+          </a:solidFill>
+          <a:ln>
+            <a:noFill/>
+          </a:ln>
+        </p:spPr>
+        <p:txBody>
+          <a:bodyPr wrap="square" anchor="ctr" lIns="45720" rIns="45720">
+            <a:noAutofit/>
+          </a:bodyPr>
+          <a:lstStyle/>
+          <a:p>
+            <a:pPr algn="ctr"/>
+            <a:r>
+              <a:rPr lang="es-ES" sz="1000" b="1" dirty="0">
+                <a:solidFill>
+                  <a:srgbClr val="2F2B28"/>
+                </a:solidFill>
+              </a:rPr>
+              <a:t/>
+            </a:r>
+          </a:p>
+        </p:txBody>
+      </p:sp>
+      <p:sp>
+        <p:nvSpPr>
+          <p:cNvPr id="215" name="Texto 215"/>
+          <p:cNvSpPr txBox="1"/>
+          <p:nvPr/>
+        </p:nvSpPr>
+        <p:spPr>
+          <a:xfrm>
+            <a:off x="649600" y="2890000"/>
+            <a:ext cx="3497600" cy="2340000"/>
+          </a:xfrm>
+          <a:prstGeom prst="rect">
+            <a:avLst/>
+          </a:prstGeom>
+          <a:noFill/>
+        </p:spPr>
+        <p:txBody>
+          <a:bodyPr wrap="square" anchor="t" lIns="45720" rIns="45720">
+            <a:noAutofit/>
+          </a:bodyPr>
+          <a:lstStyle/>
+          <a:p>
+            <a:pPr algn="l"/>
+            <a:r>
+              <a:rPr lang="es-ES" sz="1300" dirty="0">
+                <a:solidFill>
+                  <a:srgbClr val="2F2B28"/>
+                </a:solidFill>
+              </a:rPr>
+              <a:t>Mandate (P32). Inventory of all AI, including third-party and unauthorised, with a completeness statement. Evidence-based maturity (T15) and transformation index (T14). Milestone 1: verified C1 report (P33).</a:t>
+            </a:r>
+          </a:p>
+        </p:txBody>
+      </p:sp>
+      <p:sp>
+        <p:nvSpPr>
+          <p:cNvPr id="216" name="Caja 216"/>
+          <p:cNvSpPr/>
+          <p:nvPr/>
+        </p:nvSpPr>
+        <p:spPr>
+          <a:xfrm>
+            <a:off x="4307200" y="2050000"/>
+            <a:ext cx="3577600" cy="800000"/>
+          </a:xfrm>
+          <a:prstGeom prst="roundRect">
+            <a:avLst>
+              <a:gd name="adj" fmla="val 6000"/>
+            </a:avLst>
+          </a:prstGeom>
+          <a:solidFill>
+            <a:srgbClr val="593380"/>
+          </a:solidFill>
+          <a:ln>
+            <a:noFill/>
+          </a:ln>
+        </p:spPr>
+        <p:txBody>
+          <a:bodyPr wrap="square" anchor="ctr" lIns="45720" rIns="45720">
+            <a:noAutofit/>
+          </a:bodyPr>
+          <a:lstStyle/>
+          <a:p>
+            <a:pPr algn="ctr"/>
+            <a:r>
+              <a:rPr lang="es-ES" sz="1700" b="1" dirty="0">
+                <a:solidFill>
+                  <a:srgbClr val="FFFFFF"/>
+                </a:solidFill>
+              </a:rPr>
+              <a:t>Month 2 · Risks and opportunities</a:t>
+            </a:r>
+          </a:p>
+        </p:txBody>
+      </p:sp>
+      <p:sp>
+        <p:nvSpPr>
+          <p:cNvPr id="217" name="Caja 217"/>
+          <p:cNvSpPr/>
+          <p:nvPr/>
+        </p:nvSpPr>
+        <p:spPr>
+          <a:xfrm>
+            <a:off x="4307200" y="2790000"/>
+            <a:ext cx="3577600" cy="2500000"/>
+          </a:xfrm>
+          <a:prstGeom prst="roundRect">
+            <a:avLst>
+              <a:gd name="adj" fmla="val 6000"/>
+            </a:avLst>
+          </a:prstGeom>
+          <a:solidFill>
+            <a:srgbClr val="F3CFB2"/>
+          </a:solidFill>
+          <a:ln>
+            <a:noFill/>
+          </a:ln>
+        </p:spPr>
+        <p:txBody>
+          <a:bodyPr wrap="square" anchor="ctr" lIns="45720" rIns="45720">
+            <a:noAutofit/>
+          </a:bodyPr>
+          <a:lstStyle/>
+          <a:p>
+            <a:pPr algn="ctr"/>
+            <a:r>
+              <a:rPr lang="es-ES" sz="1000" b="1" dirty="0">
+                <a:solidFill>
+                  <a:srgbClr val="2F2B28"/>
+                </a:solidFill>
+              </a:rPr>
+              <a:t/>
+            </a:r>
+          </a:p>
+        </p:txBody>
+      </p:sp>
+      <p:sp>
+        <p:nvSpPr>
+          <p:cNvPr id="218" name="Texto 218"/>
+          <p:cNvSpPr txBox="1"/>
+          <p:nvPr/>
+        </p:nvSpPr>
+        <p:spPr>
+          <a:xfrm>
+            <a:off x="4347200" y="2890000"/>
+            <a:ext cx="3497600" cy="2340000"/>
+          </a:xfrm>
+          <a:prstGeom prst="rect">
+            <a:avLst/>
+          </a:prstGeom>
+          <a:noFill/>
+        </p:spPr>
+        <p:txBody>
+          <a:bodyPr wrap="square" anchor="t" lIns="45720" rIns="45720">
+            <a:noAutofit/>
+          </a:bodyPr>
+          <a:lstStyle/>
+          <a:p>
+            <a:pPr algn="l"/>
+            <a:r>
+              <a:rPr lang="es-ES" sz="1300" dirty="0">
+                <a:solidFill>
+                  <a:srgbClr val="2F2B28"/>
+                </a:solidFill>
+              </a:rPr>
+              <a:t>Workshops per sphere: risks of what already exists (P11, P12) and opportunities with estimated value (P06, P07). Draft AI thesis, ambition and risk appetite (P35). Milestone 2: C2 proposal ready for the board.</a:t>
+            </a:r>
+          </a:p>
+        </p:txBody>
+      </p:sp>
+      <p:sp>
+        <p:nvSpPr>
+          <p:cNvPr id="219" name="Caja 219"/>
+          <p:cNvSpPr/>
+          <p:nvPr/>
+        </p:nvSpPr>
+        <p:spPr>
+          <a:xfrm>
+            <a:off x="8004800" y="2050000"/>
+            <a:ext cx="3577600" cy="800000"/>
+          </a:xfrm>
+          <a:prstGeom prst="roundRect">
+            <a:avLst>
+              <a:gd name="adj" fmla="val 6000"/>
+            </a:avLst>
+          </a:prstGeom>
+          <a:solidFill>
+            <a:srgbClr val="0D7680"/>
+          </a:solidFill>
+          <a:ln>
+            <a:noFill/>
+          </a:ln>
+        </p:spPr>
+        <p:txBody>
+          <a:bodyPr wrap="square" anchor="ctr" lIns="45720" rIns="45720">
+            <a:noAutofit/>
+          </a:bodyPr>
+          <a:lstStyle/>
+          <a:p>
+            <a:pPr algn="ctr"/>
+            <a:r>
+              <a:rPr lang="es-ES" sz="1700" b="1" dirty="0">
+                <a:solidFill>
+                  <a:srgbClr val="FFFFFF"/>
+                </a:solidFill>
+              </a:rPr>
+              <a:t>Month 3 · Governance and portfolio</a:t>
+            </a:r>
+          </a:p>
+        </p:txBody>
+      </p:sp>
+      <p:sp>
+        <p:nvSpPr>
+          <p:cNvPr id="220" name="Caja 220"/>
+          <p:cNvSpPr/>
+          <p:nvPr/>
+        </p:nvSpPr>
+        <p:spPr>
+          <a:xfrm>
+            <a:off x="8004800" y="2790000"/>
+            <a:ext cx="3577600" cy="2500000"/>
+          </a:xfrm>
+          <a:prstGeom prst="roundRect">
+            <a:avLst>
+              <a:gd name="adj" fmla="val 6000"/>
+            </a:avLst>
+          </a:prstGeom>
+          <a:solidFill>
+            <a:srgbClr val="F3CFB2"/>
+          </a:solidFill>
+          <a:ln>
+            <a:noFill/>
+          </a:ln>
+        </p:spPr>
+        <p:txBody>
+          <a:bodyPr wrap="square" anchor="ctr" lIns="45720" rIns="45720">
+            <a:noAutofit/>
+          </a:bodyPr>
+          <a:lstStyle/>
+          <a:p>
+            <a:pPr algn="ctr"/>
+            <a:r>
+              <a:rPr lang="es-ES" sz="1000" b="1" dirty="0">
+                <a:solidFill>
+                  <a:srgbClr val="2F2B28"/>
+                </a:solidFill>
+              </a:rPr>
+              <a:t/>
+            </a:r>
+          </a:p>
+        </p:txBody>
+      </p:sp>
+      <p:sp>
+        <p:nvSpPr>
+          <p:cNvPr id="221" name="Texto 221"/>
+          <p:cNvSpPr txBox="1"/>
+          <p:nvPr/>
+        </p:nvSpPr>
+        <p:spPr>
+          <a:xfrm>
+            <a:off x="8044800" y="2890000"/>
+            <a:ext cx="3497600" cy="2340000"/>
+          </a:xfrm>
+          <a:prstGeom prst="rect">
+            <a:avLst/>
+          </a:prstGeom>
+          <a:noFill/>
+        </p:spPr>
+        <p:txBody>
+          <a:bodyPr wrap="square" anchor="t" lIns="45720" rIns="45720">
+            <a:noAutofit/>
+          </a:bodyPr>
+          <a:lstStyle/>
+          <a:p>
+            <a:pPr algn="l"/>
+            <a:r>
+              <a:rPr lang="es-ES" sz="1300" dirty="0">
+                <a:solidFill>
+                  <a:srgbClr val="2F2B28"/>
+                </a:solidFill>
+              </a:rPr>
+              <a:t>Bodies and roles with no incompatibilities (P38, P03), gates and policies, first dashboard with real data (T17) and prioritised portfolio (P36). The board approves C2 and the committee, C3. Milestone 3: business as usual.</a:t>
+            </a:r>
+          </a:p>
+        </p:txBody>
+      </p:sp>
+      <p:sp>
+        <p:nvSpPr>
+          <p:cNvPr id="222" name="Texto 222"/>
+          <p:cNvSpPr txBox="1"/>
+          <p:nvPr/>
+        </p:nvSpPr>
+        <p:spPr>
+          <a:xfrm>
+            <a:off x="609600" y="6150000"/>
+            <a:ext cx="10972800" cy="500000"/>
+          </a:xfrm>
+          <a:prstGeom prst="rect">
+            <a:avLst/>
+          </a:prstGeom>
+          <a:noFill/>
+        </p:spPr>
+        <p:txBody>
+          <a:bodyPr wrap="square" anchor="t" lIns="45720" rIns="45720">
+            <a:noAutofit/>
+          </a:bodyPr>
+          <a:lstStyle/>
+          <a:p>
+            <a:pPr algn="l"/>
+            <a:r>
+              <a:rPr lang="es-ES" sz="1400" b="1" dirty="0">
+                <a:solidFill>
+                  <a:srgbClr val="0F5499"/>
+                </a:solidFill>
+              </a:rPr>
+              <a:t>From week 13, no new initiative spends budget without going through G0.</a:t>
             </a:r>
           </a:p>
         </p:txBody>
@@ -5999,7 +6077,7 @@
       </p:grpSpPr>
       <p:sp>
         <p:nvSpPr>
-          <p:cNvPr id="225" name="Marca"/>
+          <p:cNvPr id="228" name="Marca"/>
           <p:cNvSpPr/>
           <p:nvPr/>
         </p:nvSpPr>
@@ -6023,7 +6101,7 @@
       </p:sp>
       <p:sp>
         <p:nvSpPr>
-          <p:cNvPr id="226" name="Texto 226"/>
+          <p:cNvPr id="229" name="Texto 229"/>
           <p:cNvSpPr txBox="1"/>
           <p:nvPr/>
         </p:nvSpPr>
@@ -6057,7 +6135,7 @@
       </p:sp>
       <p:sp>
         <p:nvSpPr>
-          <p:cNvPr id="227" name="Texto 227"/>
+          <p:cNvPr id="230" name="Texto 230"/>
           <p:cNvSpPr txBox="1"/>
           <p:nvPr/>
         </p:nvSpPr>
@@ -6084,14 +6162,14 @@
                   <a:srgbClr val="990F3D"/>
                 </a:solidFill>
               </a:rPr>
-              <a:t>Common mistakes when implementing it yourself</a:t>
-            </a:r>
-          </a:p>
-        </p:txBody>
-      </p:sp>
-      <p:sp>
-        <p:nvSpPr>
-          <p:cNvPr id="224" name="Texto 224"/>
+              <a:t>Three guarantees that are never negotiable, even at small scale</a:t>
+            </a:r>
+          </a:p>
+        </p:txBody>
+      </p:sp>
+      <p:sp>
+        <p:nvSpPr>
+          <p:cNvPr id="227" name="Texto 227"/>
           <p:cNvSpPr txBox="1"/>
           <p:nvPr/>
         </p:nvSpPr>
@@ -6127,7 +6205,7 @@
                   <a:srgbClr val="2F2B28"/>
                 </a:solidFill>
               </a:rPr>
-              <a:t>Applying Enterprise to everything: the framework becomes heavy and is abandoned. Or applying nothing "because we are small".</a:t>
+              <a:t>Whoever builds neither verifies nor decides on their own work.</a:t>
             </a:r>
           </a:p>
           <a:p>
@@ -6147,7 +6225,7 @@
                   <a:srgbClr val="2F2B28"/>
                 </a:solidFill>
               </a:rPr>
-              <a:t>Filling in templates after deciding: after-the-fact documentation invalidates the gate.</a:t>
+              <a:t>Risk sign-off comes from someone independent of the team.</a:t>
             </a:r>
           </a:p>
           <a:p>
@@ -6167,7 +6245,7 @@
                   <a:srgbClr val="2F2B28"/>
                 </a:solidFill>
               </a:rPr>
-              <a:t>Adding released hours as savings on the dashboard.</a:t>
+              <a:t>The board approves the direction and the risk appetite: this is not delegated.</a:t>
             </a:r>
           </a:p>
           <a:p>
@@ -6187,7 +6265,7 @@
                   <a:srgbClr val="2F2B28"/>
                 </a:solidFill>
               </a:rPr>
-              <a:t>Never stopping anything: a portfolio with no stops has formalities, not gates.</a:t>
+              <a:t>One person can hold several roles if they are not incompatible; the T01 register checks it (P03).</a:t>
             </a:r>
           </a:p>
           <a:p>
@@ -6207,27 +6285,7 @@
                   <a:srgbClr val="2F2B28"/>
                 </a:solidFill>
               </a:rPr>
-              <a:t>An incomplete inventory: third-party AI and unauthorised use count too.</a:t>
-            </a:r>
-          </a:p>
-          <a:p>
-            <a:pPr marL="285750" indent="-285750">
-              <a:spcAft>
-                <a:spcPts val="400"/>
-              </a:spcAft>
-              <a:buClr>
-                <a:srgbClr val="990F3D"/>
-              </a:buClr>
-              <a:buFont typeface="Arial"/>
-              <a:buChar char="•"/>
-            </a:pPr>
-            <a:r>
-              <a:rPr lang="es-ES" sz="1800" dirty="0">
-                <a:solidFill>
-                  <a:srgbClr val="2F2B28"/>
-                </a:solidFill>
-              </a:rPr>
-              <a:t>Leaving the board out until the end: its session is booked on day one.</a:t>
+              <a:t>What already exists is regularised with approved deadlines, not ignored: inventory first, then risks, then gates.</a:t>
             </a:r>
           </a:p>
         </p:txBody>
@@ -6267,7 +6325,7 @@
       </p:grpSpPr>
       <p:sp>
         <p:nvSpPr>
-          <p:cNvPr id="229" name="Marca"/>
+          <p:cNvPr id="232" name="Marca"/>
           <p:cNvSpPr/>
           <p:nvPr/>
         </p:nvSpPr>
@@ -6291,7 +6349,7 @@
       </p:sp>
       <p:sp>
         <p:nvSpPr>
-          <p:cNvPr id="230" name="Texto 230"/>
+          <p:cNvPr id="233" name="Texto 233"/>
           <p:cNvSpPr txBox="1"/>
           <p:nvPr/>
         </p:nvSpPr>
@@ -6325,7 +6383,7 @@
       </p:sp>
       <p:sp>
         <p:nvSpPr>
-          <p:cNvPr id="231" name="Texto 231"/>
+          <p:cNvPr id="234" name="Texto 234"/>
           <p:cNvSpPr txBox="1"/>
           <p:nvPr/>
         </p:nvSpPr>
@@ -6352,14 +6410,14 @@
                   <a:srgbClr val="990F3D"/>
                 </a:solidFill>
               </a:rPr>
-              <a:t>Where to start tomorrow</a:t>
-            </a:r>
-          </a:p>
-        </p:txBody>
-      </p:sp>
-      <p:sp>
-        <p:nvSpPr>
-          <p:cNvPr id="228" name="Texto 228"/>
+              <a:t>Common mistakes when implementing it yourself</a:t>
+            </a:r>
+          </a:p>
+        </p:txBody>
+      </p:sp>
+      <p:sp>
+        <p:nvSpPr>
+          <p:cNvPr id="231" name="Texto 231"/>
           <p:cNvSpPr txBox="1"/>
           <p:nvPr/>
         </p:nvSpPr>
@@ -6395,7 +6453,7 @@
                   <a:srgbClr val="2F2B28"/>
                 </a:solidFill>
               </a:rPr>
-              <a:t>One afternoon: open the sample register (T01) and its dashboard (T17), and answer the maturity diagnostic (T15) with your real situation.</a:t>
+              <a:t>Applying Enterprise to everything: the framework becomes heavy and is abandoned. Or applying nothing "because we are small".</a:t>
             </a:r>
           </a:p>
           <a:p>
@@ -6415,7 +6473,7 @@
                   <a:srgbClr val="2F2B28"/>
                 </a:solidFill>
               </a:rPr>
-              <a:t>One week: documents 00, 01 and 90; decide Lite or Enterprise scope and draft the mandate (P32).</a:t>
+              <a:t>Filling in templates after deciding: after-the-fact documentation invalidates the gate.</a:t>
             </a:r>
           </a:p>
           <a:p>
@@ -6435,7 +6493,7 @@
                   <a:srgbClr val="2F2B28"/>
                 </a:solidFill>
               </a:rPr>
-              <a:t>Adoption can be modular: just the register, just the gates, just measurement or just the dashboard, and extend later.</a:t>
+              <a:t>Adding released hours as savings on the dashboard.</a:t>
             </a:r>
           </a:p>
           <a:p>
@@ -6455,7 +6513,7 @@
                   <a:srgbClr val="2F2B28"/>
                 </a:solidFill>
               </a:rPr>
-              <a:t>If you want support, you can ask any professional; document 91 explains how to avoid depending on them.</a:t>
+              <a:t>Never stopping anything: a portfolio with no stops has formalities, not gates.</a:t>
             </a:r>
           </a:p>
           <a:p>
@@ -6475,7 +6533,27 @@
                   <a:srgbClr val="2F2B28"/>
                 </a:solidFill>
               </a:rPr>
-              <a:t>None of this requires registering or hiring anyone.</a:t>
+              <a:t>An incomplete inventory: third-party AI and unauthorised use count too.</a:t>
+            </a:r>
+          </a:p>
+          <a:p>
+            <a:pPr marL="285750" indent="-285750">
+              <a:spcAft>
+                <a:spcPts val="400"/>
+              </a:spcAft>
+              <a:buClr>
+                <a:srgbClr val="990F3D"/>
+              </a:buClr>
+              <a:buFont typeface="Arial"/>
+              <a:buChar char="•"/>
+            </a:pPr>
+            <a:r>
+              <a:rPr lang="es-ES" sz="1800" dirty="0">
+                <a:solidFill>
+                  <a:srgbClr val="2F2B28"/>
+                </a:solidFill>
+              </a:rPr>
+              <a:t>Leaving the board out until the end: its session is booked on day one.</a:t>
             </a:r>
           </a:p>
         </p:txBody>
@@ -6515,7 +6593,255 @@
       </p:grpSpPr>
       <p:sp>
         <p:nvSpPr>
-          <p:cNvPr id="232" name="Texto 232"/>
+          <p:cNvPr id="236" name="Marca"/>
+          <p:cNvSpPr/>
+          <p:nvPr/>
+        </p:nvSpPr>
+        <p:spPr>
+          <a:xfrm>
+            <a:off x="609600" y="365760"/>
+            <a:ext cx="182880" cy="182880"/>
+          </a:xfrm>
+          <a:prstGeom prst="rect">
+            <a:avLst/>
+          </a:prstGeom>
+          <a:solidFill>
+            <a:srgbClr val="990F3D"/>
+          </a:solidFill>
+        </p:spPr>
+        <p:txBody>
+          <a:bodyPr/>
+          <a:lstStyle/>
+          <a:p/>
+        </p:txBody>
+      </p:sp>
+      <p:sp>
+        <p:nvSpPr>
+          <p:cNvPr id="237" name="Texto 237"/>
+          <p:cNvSpPr txBox="1"/>
+          <p:nvPr/>
+        </p:nvSpPr>
+        <p:spPr>
+          <a:xfrm>
+            <a:off x="838200" y="300000"/>
+            <a:ext cx="10500000" cy="320000"/>
+          </a:xfrm>
+          <a:prstGeom prst="rect">
+            <a:avLst/>
+          </a:prstGeom>
+          <a:noFill/>
+        </p:spPr>
+        <p:txBody>
+          <a:bodyPr wrap="square" anchor="ctr" lIns="45720" rIns="45720">
+            <a:noAutofit/>
+          </a:bodyPr>
+          <a:lstStyle/>
+          <a:p>
+            <a:pPr algn="l"/>
+            <a:r>
+              <a:rPr lang="es-ES" sz="1400" b="1" dirty="0">
+                <a:solidFill>
+                  <a:srgbClr val="1A1817"/>
+                </a:solidFill>
+              </a:rPr>
+              <a:t>SEVEN-G · COURSE · COMPANY · SELF-CONSULTING</a:t>
+            </a:r>
+          </a:p>
+        </p:txBody>
+      </p:sp>
+      <p:sp>
+        <p:nvSpPr>
+          <p:cNvPr id="238" name="Texto 238"/>
+          <p:cNvSpPr txBox="1"/>
+          <p:nvPr/>
+        </p:nvSpPr>
+        <p:spPr>
+          <a:xfrm>
+            <a:off x="609600" y="700000"/>
+            <a:ext cx="10972800" cy="650000"/>
+          </a:xfrm>
+          <a:prstGeom prst="rect">
+            <a:avLst/>
+          </a:prstGeom>
+          <a:noFill/>
+        </p:spPr>
+        <p:txBody>
+          <a:bodyPr wrap="square" anchor="t" lIns="45720" rIns="45720">
+            <a:noAutofit/>
+          </a:bodyPr>
+          <a:lstStyle/>
+          <a:p>
+            <a:pPr algn="l"/>
+            <a:r>
+              <a:rPr lang="es-ES" sz="2700" b="1" dirty="0">
+                <a:solidFill>
+                  <a:srgbClr val="990F3D"/>
+                </a:solidFill>
+              </a:rPr>
+              <a:t>Where to start tomorrow</a:t>
+            </a:r>
+          </a:p>
+        </p:txBody>
+      </p:sp>
+      <p:sp>
+        <p:nvSpPr>
+          <p:cNvPr id="235" name="Texto 235"/>
+          <p:cNvSpPr txBox="1"/>
+          <p:nvPr/>
+        </p:nvSpPr>
+        <p:spPr>
+          <a:xfrm>
+            <a:off x="609600" y="1750000"/>
+            <a:ext cx="10972800" cy="4400000"/>
+          </a:xfrm>
+          <a:prstGeom prst="rect">
+            <a:avLst/>
+          </a:prstGeom>
+          <a:noFill/>
+        </p:spPr>
+        <p:txBody>
+          <a:bodyPr wrap="square" anchor="t" lIns="45720" rIns="45720">
+            <a:noAutofit/>
+          </a:bodyPr>
+          <a:lstStyle/>
+          <a:p>
+            <a:pPr marL="285750" indent="-285750">
+              <a:spcAft>
+                <a:spcPts val="400"/>
+              </a:spcAft>
+              <a:buClr>
+                <a:srgbClr val="990F3D"/>
+              </a:buClr>
+              <a:buFont typeface="Arial"/>
+              <a:buChar char="•"/>
+            </a:pPr>
+            <a:r>
+              <a:rPr lang="es-ES" sz="1800" dirty="0">
+                <a:solidFill>
+                  <a:srgbClr val="2F2B28"/>
+                </a:solidFill>
+              </a:rPr>
+              <a:t>One afternoon: open the sample register (T01) and its dashboard (T17), and answer the maturity diagnostic (T15) with your real situation.</a:t>
+            </a:r>
+          </a:p>
+          <a:p>
+            <a:pPr marL="285750" indent="-285750">
+              <a:spcAft>
+                <a:spcPts val="400"/>
+              </a:spcAft>
+              <a:buClr>
+                <a:srgbClr val="990F3D"/>
+              </a:buClr>
+              <a:buFont typeface="Arial"/>
+              <a:buChar char="•"/>
+            </a:pPr>
+            <a:r>
+              <a:rPr lang="es-ES" sz="1800" dirty="0">
+                <a:solidFill>
+                  <a:srgbClr val="2F2B28"/>
+                </a:solidFill>
+              </a:rPr>
+              <a:t>One week: documents 00, 01 and 90; decide Lite or Enterprise scope and draft the mandate (P32).</a:t>
+            </a:r>
+          </a:p>
+          <a:p>
+            <a:pPr marL="285750" indent="-285750">
+              <a:spcAft>
+                <a:spcPts val="400"/>
+              </a:spcAft>
+              <a:buClr>
+                <a:srgbClr val="990F3D"/>
+              </a:buClr>
+              <a:buFont typeface="Arial"/>
+              <a:buChar char="•"/>
+            </a:pPr>
+            <a:r>
+              <a:rPr lang="es-ES" sz="1800" dirty="0">
+                <a:solidFill>
+                  <a:srgbClr val="2F2B28"/>
+                </a:solidFill>
+              </a:rPr>
+              <a:t>Adoption can be modular: just the register, just the gates, just measurement or just the dashboard, and extend later.</a:t>
+            </a:r>
+          </a:p>
+          <a:p>
+            <a:pPr marL="285750" indent="-285750">
+              <a:spcAft>
+                <a:spcPts val="400"/>
+              </a:spcAft>
+              <a:buClr>
+                <a:srgbClr val="990F3D"/>
+              </a:buClr>
+              <a:buFont typeface="Arial"/>
+              <a:buChar char="•"/>
+            </a:pPr>
+            <a:r>
+              <a:rPr lang="es-ES" sz="1800" dirty="0">
+                <a:solidFill>
+                  <a:srgbClr val="2F2B28"/>
+                </a:solidFill>
+              </a:rPr>
+              <a:t>If you want support, you can ask any professional; document 91 explains how to avoid depending on them.</a:t>
+            </a:r>
+          </a:p>
+          <a:p>
+            <a:pPr marL="285750" indent="-285750">
+              <a:spcAft>
+                <a:spcPts val="400"/>
+              </a:spcAft>
+              <a:buClr>
+                <a:srgbClr val="990F3D"/>
+              </a:buClr>
+              <a:buFont typeface="Arial"/>
+              <a:buChar char="•"/>
+            </a:pPr>
+            <a:r>
+              <a:rPr lang="es-ES" sz="1800" dirty="0">
+                <a:solidFill>
+                  <a:srgbClr val="2F2B28"/>
+                </a:solidFill>
+              </a:rPr>
+              <a:t>None of this requires registering or hiring anyone.</a:t>
+            </a:r>
+          </a:p>
+        </p:txBody>
+      </p:sp>
+    </p:spTree>
+  </p:cSld>
+  <p:clrMapOvr>
+    <a:overrideClrMapping bg1="lt1" tx1="dk1" bg2="lt2" tx2="dk2" accent1="accent1" accent2="accent2" accent3="accent3" accent4="accent4" accent5="accent5" accent6="accent6" hlink="hlink" folHlink="folHlink"/>
+  </p:clrMapOvr>
+</p:sld>
+</file>
+
+<file path=ppt/slides/slide27.xml><?xml version="1.0" encoding="utf-8"?>
+<p:sld xmlns:a="http://schemas.openxmlformats.org/drawingml/2006/main" xmlns:r="http://schemas.openxmlformats.org/officeDocument/2006/relationships" xmlns:p="http://schemas.openxmlformats.org/presentationml/2006/main">
+  <p:cSld>
+    <p:bg>
+      <p:bgPr>
+        <a:solidFill>
+          <a:srgbClr val="FBE2CD"/>
+        </a:solidFill>
+        <a:effectLst/>
+      </p:bgPr>
+    </p:bg>
+    <p:spTree>
+      <p:nvGrpSpPr>
+        <p:cNvPr id="1" name=""/>
+        <p:cNvGrpSpPr/>
+        <p:nvPr/>
+      </p:nvGrpSpPr>
+      <p:grpSpPr>
+        <a:xfrm>
+          <a:off x="0" y="0"/>
+          <a:ext cx="0" cy="0"/>
+          <a:chOff x="0" y="0"/>
+          <a:chExt cx="0" cy="0"/>
+        </a:xfrm>
+      </p:grpSpPr>
+      <p:sp>
+        <p:nvSpPr>
+          <p:cNvPr id="239" name="Texto 239"/>
           <p:cNvSpPr txBox="1"/>
           <p:nvPr/>
         </p:nvSpPr>
@@ -6549,7 +6875,7 @@
       </p:sp>
       <p:sp>
         <p:nvSpPr>
-          <p:cNvPr id="233" name="Texto 233"/>
+          <p:cNvPr id="240" name="Texto 240"/>
           <p:cNvSpPr txBox="1"/>
           <p:nvPr/>
         </p:nvSpPr>
@@ -6583,7 +6909,7 @@
       </p:sp>
       <p:sp>
         <p:nvSpPr>
-          <p:cNvPr id="234" name="Texto 234"/>
+          <p:cNvPr id="241" name="Texto 241"/>
           <p:cNvSpPr txBox="1"/>
           <p:nvPr/>
         </p:nvSpPr>
@@ -6617,7 +6943,7 @@
       </p:sp>
       <p:sp>
         <p:nvSpPr>
-          <p:cNvPr id="235" name="Texto 235"/>
+          <p:cNvPr id="242" name="Texto 242"/>
           <p:cNvSpPr txBox="1"/>
           <p:nvPr/>
         </p:nvSpPr>
@@ -6651,7 +6977,7 @@
       </p:sp>
       <p:sp>
         <p:nvSpPr>
-          <p:cNvPr id="236" name="Texto 236"/>
+          <p:cNvPr id="243" name="Texto 243"/>
           <p:cNvSpPr txBox="1"/>
           <p:nvPr/>
         </p:nvSpPr>
